--- a/deck/Case_XP_Planejamento_Financeiro.pptx
+++ b/deck/Case_XP_Planejamento_Financeiro.pptx
@@ -160,7 +160,7 @@
                     <a:solidFill>
                       <a:srgbClr val="A5A5A5"/>
                     </a:solidFill>
-                    <a:latin typeface="Arial"/>
+                    <a:latin typeface="Roboto"/>
                   </a:defRPr>
                 </a:pPr>
               </a:p>
@@ -267,7 +267,7 @@
                     <a:solidFill>
                       <a:srgbClr val="A5A5A5"/>
                     </a:solidFill>
-                    <a:latin typeface="Arial"/>
+                    <a:latin typeface="Roboto"/>
                   </a:defRPr>
                 </a:pPr>
               </a:p>
@@ -353,7 +353,7 @@
                   <a:solidFill>
                     <a:srgbClr val="A5A5A5"/>
                   </a:solidFill>
-                  <a:latin typeface="Arial"/>
+                  <a:latin typeface="Roboto"/>
                 </a:defRPr>
               </a:pPr>
             </a:p>
@@ -399,7 +399,7 @@
                 <a:solidFill>
                   <a:srgbClr val="FFFFFF"/>
                 </a:solidFill>
-                <a:latin typeface="Arial"/>
+                <a:latin typeface="Roboto"/>
               </a:defRPr>
             </a:pPr>
             <a:endParaRPr lang="en-US"/>
@@ -449,9 +449,9 @@
             <a:pPr>
               <a:defRPr sz="950" b="0" i="0" u="none" strike="noStrike">
                 <a:solidFill>
-                  <a:srgbClr val="6E6E6E"/>
-                </a:solidFill>
-                <a:latin typeface="Arial"/>
+                  <a:srgbClr val="757575"/>
+                </a:solidFill>
+                <a:latin typeface="Roboto"/>
               </a:defRPr>
             </a:pPr>
             <a:endParaRPr lang="en-US"/>
@@ -464,7 +464,7 @@
       </c:valAx>
       <c:spPr>
         <a:solidFill>
-          <a:srgbClr val="000000"/>
+          <a:srgbClr val="0D0D0D"/>
         </a:solidFill>
         <a:ln>
           <a:noFill/>
@@ -484,8 +484,8 @@
               <a:solidFill>
                 <a:srgbClr val="A5A5A5"/>
               </a:solidFill>
-              <a:latin typeface="Arial"/>
-              <a:cs typeface="Arial"/>
+              <a:latin typeface="Roboto"/>
+              <a:cs typeface="Roboto"/>
             </a:defRPr>
           </a:pPr>
           <a:endParaRPr lang="en-US"/>
@@ -497,7 +497,7 @@
   </c:chart>
   <c:spPr>
     <a:solidFill>
-      <a:srgbClr val="000000"/>
+      <a:srgbClr val="0D0D0D"/>
     </a:solidFill>
     <a:ln>
       <a:noFill/>
@@ -2052,7 +2052,7 @@
     <p:bg>
       <p:bgPr>
         <a:solidFill>
-          <a:srgbClr val="000000"/>
+          <a:srgbClr val="0D0D0D"/>
         </a:solidFill>
       </p:bgPr>
     </p:bg>
@@ -2072,139 +2072,22 @@
       </p:grpSpPr>
       <p:sp>
         <p:nvSpPr>
-          <p:cNvPr id="2" name="Text 0"/>
-          <p:cNvSpPr txBox="1"/>
-          <p:nvPr/>
-        </p:nvSpPr>
-        <p:spPr>
-          <a:xfrm>
-            <a:off x="640080" y="1874520"/>
-            <a:ext cx="10607040" cy="868680"/>
-          </a:xfrm>
-          <a:prstGeom prst="rect">
-            <a:avLst/>
-          </a:prstGeom>
-          <a:noFill/>
-          <a:ln/>
-        </p:spPr>
-        <p:txBody>
-          <a:bodyPr wrap="square" lIns="0" tIns="0" rIns="0" bIns="0" rtlCol="0" anchor="ctr"/>
-          <a:lstStyle/>
-          <a:p>
-            <a:pPr indent="0" marL="0">
-              <a:buNone/>
-            </a:pPr>
-            <a:r>
-              <a:rPr lang="en-US" sz="5200" b="1" dirty="0">
-                <a:solidFill>
-                  <a:srgbClr val="FFFFFF"/>
-                </a:solidFill>
-                <a:latin typeface="Arial" pitchFamily="34" charset="0"/>
-                <a:ea typeface="Arial" pitchFamily="34" charset="-122"/>
-                <a:cs typeface="Arial" pitchFamily="34" charset="-120"/>
-              </a:rPr>
-              <a:t>Planejamento Financeiro</a:t>
-            </a:r>
-            <a:endParaRPr lang="en-US" sz="5200" dirty="0"/>
-          </a:p>
-        </p:txBody>
-      </p:sp>
-      <p:sp>
-        <p:nvSpPr>
-          <p:cNvPr id="3" name="Text 1"/>
-          <p:cNvSpPr txBox="1"/>
-          <p:nvPr/>
-        </p:nvSpPr>
-        <p:spPr>
-          <a:xfrm>
-            <a:off x="640080" y="2697480"/>
-            <a:ext cx="10607040" cy="868680"/>
-          </a:xfrm>
-          <a:prstGeom prst="rect">
-            <a:avLst/>
-          </a:prstGeom>
-          <a:noFill/>
-          <a:ln/>
-        </p:spPr>
-        <p:txBody>
-          <a:bodyPr wrap="square" lIns="0" tIns="0" rIns="0" bIns="0" rtlCol="0" anchor="ctr"/>
-          <a:lstStyle/>
-          <a:p>
-            <a:pPr indent="0" marL="0">
-              <a:buNone/>
-            </a:pPr>
-            <a:r>
-              <a:rPr lang="en-US" sz="5200" b="1" dirty="0">
-                <a:solidFill>
-                  <a:srgbClr val="FFC709"/>
-                </a:solidFill>
-                <a:latin typeface="Arial" pitchFamily="34" charset="0"/>
-                <a:ea typeface="Arial" pitchFamily="34" charset="-122"/>
-                <a:cs typeface="Arial" pitchFamily="34" charset="-120"/>
-              </a:rPr>
-              <a:t>Integrado</a:t>
-            </a:r>
-            <a:endParaRPr lang="en-US" sz="5200" dirty="0"/>
-          </a:p>
-        </p:txBody>
-      </p:sp>
-      <p:sp>
-        <p:nvSpPr>
-          <p:cNvPr id="4" name="Text 2"/>
-          <p:cNvSpPr txBox="1"/>
-          <p:nvPr/>
-        </p:nvSpPr>
-        <p:spPr>
-          <a:xfrm>
-            <a:off x="640080" y="3767328"/>
-            <a:ext cx="8686800" cy="365760"/>
-          </a:xfrm>
-          <a:prstGeom prst="rect">
-            <a:avLst/>
-          </a:prstGeom>
-          <a:noFill/>
-          <a:ln/>
-        </p:spPr>
-        <p:txBody>
-          <a:bodyPr wrap="square" lIns="0" tIns="0" rIns="0" bIns="0" rtlCol="0" anchor="ctr"/>
-          <a:lstStyle/>
-          <a:p>
-            <a:pPr indent="0" marL="0">
-              <a:buNone/>
-            </a:pPr>
-            <a:r>
-              <a:rPr lang="en-US" sz="1600" dirty="0">
-                <a:solidFill>
-                  <a:srgbClr val="A5A5A5"/>
-                </a:solidFill>
-                <a:latin typeface="Arial" pitchFamily="34" charset="0"/>
-                <a:ea typeface="Arial" pitchFamily="34" charset="-122"/>
-                <a:cs typeface="Arial" pitchFamily="34" charset="-120"/>
-              </a:rPr>
-              <a:t>Estruturação consultiva para a proteção da sua família e o futuro da sua filha.</a:t>
-            </a:r>
-            <a:endParaRPr lang="en-US" sz="1600" dirty="0"/>
-          </a:p>
-        </p:txBody>
-      </p:sp>
-      <p:sp>
-        <p:nvSpPr>
-          <p:cNvPr id="5" name="Shape 3"/>
+          <p:cNvPr id="2" name="Shape 0"/>
           <p:cNvSpPr/>
           <p:nvPr/>
         </p:nvSpPr>
         <p:spPr>
           <a:xfrm>
-            <a:off x="640080" y="5010912"/>
-            <a:ext cx="10881360" cy="0"/>
+            <a:off x="8046720" y="1188720"/>
+            <a:ext cx="3383280" cy="3383280"/>
           </a:xfrm>
           <a:prstGeom prst="line">
             <a:avLst/>
           </a:prstGeom>
           <a:noFill/>
-          <a:ln w="9525">
+          <a:ln w="28575">
             <a:solidFill>
-              <a:srgbClr val="2B2B2B"/>
+              <a:srgbClr val="FFC709"/>
             </a:solidFill>
             <a:prstDash val="solid"/>
           </a:ln>
@@ -2212,7 +2095,170 @@
       </p:sp>
       <p:sp>
         <p:nvSpPr>
+          <p:cNvPr id="3" name="Shape 1"/>
+          <p:cNvSpPr/>
+          <p:nvPr/>
+        </p:nvSpPr>
+        <p:spPr>
+          <a:xfrm flipH="1">
+            <a:off x="8046720" y="1188720"/>
+            <a:ext cx="3383280" cy="3383280"/>
+          </a:xfrm>
+          <a:prstGeom prst="line">
+            <a:avLst/>
+          </a:prstGeom>
+          <a:noFill/>
+          <a:ln w="28575">
+            <a:solidFill>
+              <a:srgbClr val="FFC709"/>
+            </a:solidFill>
+            <a:prstDash val="solid"/>
+          </a:ln>
+        </p:spPr>
+      </p:sp>
+      <p:sp>
+        <p:nvSpPr>
+          <p:cNvPr id="4" name="Text 2"/>
+          <p:cNvSpPr txBox="1"/>
+          <p:nvPr/>
+        </p:nvSpPr>
+        <p:spPr>
+          <a:xfrm>
+            <a:off x="640080" y="1847088"/>
+            <a:ext cx="7315200" cy="841248"/>
+          </a:xfrm>
+          <a:prstGeom prst="rect">
+            <a:avLst/>
+          </a:prstGeom>
+          <a:noFill/>
+          <a:ln/>
+        </p:spPr>
+        <p:txBody>
+          <a:bodyPr wrap="square" lIns="0" tIns="0" rIns="0" bIns="0" rtlCol="0" anchor="ctr"/>
+          <a:lstStyle/>
+          <a:p>
+            <a:pPr indent="0" marL="0">
+              <a:buNone/>
+            </a:pPr>
+            <a:r>
+              <a:rPr lang="en-US" sz="4400" b="1" dirty="0">
+                <a:solidFill>
+                  <a:srgbClr val="FFFFFF"/>
+                </a:solidFill>
+                <a:latin typeface="Roboto Slab" pitchFamily="34" charset="0"/>
+                <a:ea typeface="Roboto Slab" pitchFamily="34" charset="-122"/>
+                <a:cs typeface="Roboto Slab" pitchFamily="34" charset="-120"/>
+              </a:rPr>
+              <a:t>Planejamento</a:t>
+            </a:r>
+            <a:endParaRPr lang="en-US" sz="4400" dirty="0"/>
+          </a:p>
+        </p:txBody>
+      </p:sp>
+      <p:sp>
+        <p:nvSpPr>
+          <p:cNvPr id="5" name="Text 3"/>
+          <p:cNvSpPr txBox="1"/>
+          <p:nvPr/>
+        </p:nvSpPr>
+        <p:spPr>
+          <a:xfrm>
+            <a:off x="640080" y="2651760"/>
+            <a:ext cx="7315200" cy="841248"/>
+          </a:xfrm>
+          <a:prstGeom prst="rect">
+            <a:avLst/>
+          </a:prstGeom>
+          <a:noFill/>
+          <a:ln/>
+        </p:spPr>
+        <p:txBody>
+          <a:bodyPr wrap="square" lIns="0" tIns="0" rIns="0" bIns="0" rtlCol="0" anchor="ctr"/>
+          <a:lstStyle/>
+          <a:p>
+            <a:pPr indent="0" marL="0">
+              <a:buNone/>
+            </a:pPr>
+            <a:r>
+              <a:rPr lang="en-US" sz="4400" b="1" dirty="0">
+                <a:solidFill>
+                  <a:srgbClr val="FFC709"/>
+                </a:solidFill>
+                <a:latin typeface="Roboto Slab" pitchFamily="34" charset="0"/>
+                <a:ea typeface="Roboto Slab" pitchFamily="34" charset="-122"/>
+                <a:cs typeface="Roboto Slab" pitchFamily="34" charset="-120"/>
+              </a:rPr>
+              <a:t>Financeiro Integrado</a:t>
+            </a:r>
+            <a:endParaRPr lang="en-US" sz="4400" dirty="0"/>
+          </a:p>
+        </p:txBody>
+      </p:sp>
+      <p:sp>
+        <p:nvSpPr>
           <p:cNvPr id="6" name="Text 4"/>
+          <p:cNvSpPr txBox="1"/>
+          <p:nvPr/>
+        </p:nvSpPr>
+        <p:spPr>
+          <a:xfrm>
+            <a:off x="640080" y="3703320"/>
+            <a:ext cx="6949440" cy="365760"/>
+          </a:xfrm>
+          <a:prstGeom prst="rect">
+            <a:avLst/>
+          </a:prstGeom>
+          <a:noFill/>
+          <a:ln/>
+        </p:spPr>
+        <p:txBody>
+          <a:bodyPr wrap="square" lIns="0" tIns="0" rIns="0" bIns="0" rtlCol="0" anchor="ctr"/>
+          <a:lstStyle/>
+          <a:p>
+            <a:pPr indent="0" marL="0">
+              <a:buNone/>
+            </a:pPr>
+            <a:r>
+              <a:rPr lang="en-US" sz="1500" dirty="0">
+                <a:solidFill>
+                  <a:srgbClr val="A5A5A5"/>
+                </a:solidFill>
+                <a:latin typeface="Roboto" pitchFamily="34" charset="0"/>
+                <a:ea typeface="Roboto" pitchFamily="34" charset="-122"/>
+                <a:cs typeface="Roboto" pitchFamily="34" charset="-120"/>
+              </a:rPr>
+              <a:t>Estruturação consultiva para a proteção da sua família e o futuro da sua filha.</a:t>
+            </a:r>
+            <a:endParaRPr lang="en-US" sz="1500" dirty="0"/>
+          </a:p>
+        </p:txBody>
+      </p:sp>
+      <p:sp>
+        <p:nvSpPr>
+          <p:cNvPr id="7" name="Shape 5"/>
+          <p:cNvSpPr/>
+          <p:nvPr/>
+        </p:nvSpPr>
+        <p:spPr>
+          <a:xfrm>
+            <a:off x="640080" y="5010912"/>
+            <a:ext cx="10881360" cy="0"/>
+          </a:xfrm>
+          <a:prstGeom prst="line">
+            <a:avLst/>
+          </a:prstGeom>
+          <a:noFill/>
+          <a:ln w="9525">
+            <a:solidFill>
+              <a:srgbClr val="2E2E2E"/>
+            </a:solidFill>
+            <a:prstDash val="solid"/>
+          </a:ln>
+        </p:spPr>
+      </p:sp>
+      <p:sp>
+        <p:nvSpPr>
+          <p:cNvPr id="8" name="Text 6"/>
           <p:cNvSpPr txBox="1"/>
           <p:nvPr/>
         </p:nvSpPr>
@@ -2235,23 +2281,23 @@
               <a:buNone/>
             </a:pPr>
             <a:r>
-              <a:rPr lang="en-US" sz="2000" b="1" dirty="0">
+              <a:rPr lang="en-US" sz="1900" b="1" dirty="0">
                 <a:solidFill>
                   <a:srgbClr val="FFFFFF"/>
                 </a:solidFill>
-                <a:latin typeface="Arial" pitchFamily="34" charset="0"/>
-                <a:ea typeface="Arial" pitchFamily="34" charset="-122"/>
-                <a:cs typeface="Arial" pitchFamily="34" charset="-120"/>
+                <a:latin typeface="Roboto Slab" pitchFamily="34" charset="0"/>
+                <a:ea typeface="Roboto Slab" pitchFamily="34" charset="-122"/>
+                <a:cs typeface="Roboto Slab" pitchFamily="34" charset="-120"/>
               </a:rPr>
               <a:t>R$ 400.000</a:t>
             </a:r>
-            <a:endParaRPr lang="en-US" sz="2000" dirty="0"/>
-          </a:p>
-        </p:txBody>
-      </p:sp>
-      <p:sp>
-        <p:nvSpPr>
-          <p:cNvPr id="7" name="Text 5"/>
+            <a:endParaRPr lang="en-US" sz="1900" dirty="0"/>
+          </a:p>
+        </p:txBody>
+      </p:sp>
+      <p:sp>
+        <p:nvSpPr>
+          <p:cNvPr id="9" name="Text 7"/>
           <p:cNvSpPr txBox="1"/>
           <p:nvPr/>
         </p:nvSpPr>
@@ -2276,11 +2322,11 @@
             <a:r>
               <a:rPr lang="en-US" sz="1050" dirty="0">
                 <a:solidFill>
-                  <a:srgbClr val="6E6E6E"/>
-                </a:solidFill>
-                <a:latin typeface="Arial" pitchFamily="34" charset="0"/>
-                <a:ea typeface="Arial" pitchFamily="34" charset="-122"/>
-                <a:cs typeface="Arial" pitchFamily="34" charset="-120"/>
+                  <a:srgbClr val="757575"/>
+                </a:solidFill>
+                <a:latin typeface="Roboto" pitchFamily="34" charset="0"/>
+                <a:ea typeface="Roboto" pitchFamily="34" charset="-122"/>
+                <a:cs typeface="Roboto" pitchFamily="34" charset="-120"/>
               </a:rPr>
               <a:t>patrimônio total mapeado</a:t>
             </a:r>
@@ -2290,7 +2336,7 @@
       </p:sp>
       <p:sp>
         <p:nvSpPr>
-          <p:cNvPr id="8" name="Text 6"/>
+          <p:cNvPr id="10" name="Text 8"/>
           <p:cNvSpPr txBox="1"/>
           <p:nvPr/>
         </p:nvSpPr>
@@ -2313,23 +2359,23 @@
               <a:buNone/>
             </a:pPr>
             <a:r>
-              <a:rPr lang="en-US" sz="2000" b="1" dirty="0">
+              <a:rPr lang="en-US" sz="1900" b="1" dirty="0">
                 <a:solidFill>
                   <a:srgbClr val="FFFFFF"/>
                 </a:solidFill>
-                <a:latin typeface="Arial" pitchFamily="34" charset="0"/>
-                <a:ea typeface="Arial" pitchFamily="34" charset="-122"/>
-                <a:cs typeface="Arial" pitchFamily="34" charset="-120"/>
+                <a:latin typeface="Roboto Slab" pitchFamily="34" charset="0"/>
+                <a:ea typeface="Roboto Slab" pitchFamily="34" charset="-122"/>
+                <a:cs typeface="Roboto Slab" pitchFamily="34" charset="-120"/>
               </a:rPr>
               <a:t>3 caixas</a:t>
             </a:r>
-            <a:endParaRPr lang="en-US" sz="2000" dirty="0"/>
-          </a:p>
-        </p:txBody>
-      </p:sp>
-      <p:sp>
-        <p:nvSpPr>
-          <p:cNvPr id="9" name="Text 7"/>
+            <a:endParaRPr lang="en-US" sz="1900" dirty="0"/>
+          </a:p>
+        </p:txBody>
+      </p:sp>
+      <p:sp>
+        <p:nvSpPr>
+          <p:cNvPr id="11" name="Text 9"/>
           <p:cNvSpPr txBox="1"/>
           <p:nvPr/>
         </p:nvSpPr>
@@ -2354,11 +2400,11 @@
             <a:r>
               <a:rPr lang="en-US" sz="1050" dirty="0">
                 <a:solidFill>
-                  <a:srgbClr val="6E6E6E"/>
-                </a:solidFill>
-                <a:latin typeface="Arial" pitchFamily="34" charset="0"/>
-                <a:ea typeface="Arial" pitchFamily="34" charset="-122"/>
-                <a:cs typeface="Arial" pitchFamily="34" charset="-120"/>
+                  <a:srgbClr val="757575"/>
+                </a:solidFill>
+                <a:latin typeface="Roboto" pitchFamily="34" charset="0"/>
+                <a:ea typeface="Roboto" pitchFamily="34" charset="-122"/>
+                <a:cs typeface="Roboto" pitchFamily="34" charset="-120"/>
               </a:rPr>
               <a:t>alocação por objetivo</a:t>
             </a:r>
@@ -2368,7 +2414,7 @@
       </p:sp>
       <p:sp>
         <p:nvSpPr>
-          <p:cNvPr id="10" name="Text 8"/>
+          <p:cNvPr id="12" name="Text 10"/>
           <p:cNvSpPr txBox="1"/>
           <p:nvPr/>
         </p:nvSpPr>
@@ -2391,23 +2437,23 @@
               <a:buNone/>
             </a:pPr>
             <a:r>
-              <a:rPr lang="en-US" sz="2000" b="1" dirty="0">
+              <a:rPr lang="en-US" sz="1900" b="1" dirty="0">
                 <a:solidFill>
                   <a:srgbClr val="FFFFFF"/>
                 </a:solidFill>
-                <a:latin typeface="Arial" pitchFamily="34" charset="0"/>
-                <a:ea typeface="Arial" pitchFamily="34" charset="-122"/>
-                <a:cs typeface="Arial" pitchFamily="34" charset="-120"/>
+                <a:latin typeface="Roboto Slab" pitchFamily="34" charset="0"/>
+                <a:ea typeface="Roboto Slab" pitchFamily="34" charset="-122"/>
+                <a:cs typeface="Roboto Slab" pitchFamily="34" charset="-120"/>
               </a:rPr>
               <a:t>10%</a:t>
             </a:r>
-            <a:endParaRPr lang="en-US" sz="2000" dirty="0"/>
-          </a:p>
-        </p:txBody>
-      </p:sp>
-      <p:sp>
-        <p:nvSpPr>
-          <p:cNvPr id="11" name="Text 9"/>
+            <a:endParaRPr lang="en-US" sz="1900" dirty="0"/>
+          </a:p>
+        </p:txBody>
+      </p:sp>
+      <p:sp>
+        <p:nvSpPr>
+          <p:cNvPr id="13" name="Text 11"/>
           <p:cNvSpPr txBox="1"/>
           <p:nvPr/>
         </p:nvSpPr>
@@ -2432,11 +2478,11 @@
             <a:r>
               <a:rPr lang="en-US" sz="1050" dirty="0">
                 <a:solidFill>
-                  <a:srgbClr val="6E6E6E"/>
-                </a:solidFill>
-                <a:latin typeface="Arial" pitchFamily="34" charset="0"/>
-                <a:ea typeface="Arial" pitchFamily="34" charset="-122"/>
-                <a:cs typeface="Arial" pitchFamily="34" charset="-120"/>
+                  <a:srgbClr val="757575"/>
+                </a:solidFill>
+                <a:latin typeface="Roboto" pitchFamily="34" charset="0"/>
+                <a:ea typeface="Roboto" pitchFamily="34" charset="-122"/>
+                <a:cs typeface="Roboto" pitchFamily="34" charset="-120"/>
               </a:rPr>
               <a:t>em renda variável, na base total</a:t>
             </a:r>
@@ -2446,7 +2492,7 @@
       </p:sp>
       <p:sp>
         <p:nvSpPr>
-          <p:cNvPr id="12" name="Text 10"/>
+          <p:cNvPr id="14" name="Text 12"/>
           <p:cNvSpPr txBox="1"/>
           <p:nvPr/>
         </p:nvSpPr>
@@ -2469,23 +2515,23 @@
               <a:buNone/>
             </a:pPr>
             <a:r>
-              <a:rPr lang="en-US" sz="2000" b="1" dirty="0">
+              <a:rPr lang="en-US" sz="1900" b="1" dirty="0">
                 <a:solidFill>
                   <a:srgbClr val="FFFFFF"/>
                 </a:solidFill>
-                <a:latin typeface="Arial" pitchFamily="34" charset="0"/>
-                <a:ea typeface="Arial" pitchFamily="34" charset="-122"/>
-                <a:cs typeface="Arial" pitchFamily="34" charset="-120"/>
+                <a:latin typeface="Roboto Slab" pitchFamily="34" charset="0"/>
+                <a:ea typeface="Roboto Slab" pitchFamily="34" charset="-122"/>
+                <a:cs typeface="Roboto Slab" pitchFamily="34" charset="-120"/>
               </a:rPr>
               <a:t>R$ 0</a:t>
             </a:r>
-            <a:endParaRPr lang="en-US" sz="2000" dirty="0"/>
-          </a:p>
-        </p:txBody>
-      </p:sp>
-      <p:sp>
-        <p:nvSpPr>
-          <p:cNvPr id="13" name="Text 11"/>
+            <a:endParaRPr lang="en-US" sz="1900" dirty="0"/>
+          </a:p>
+        </p:txBody>
+      </p:sp>
+      <p:sp>
+        <p:nvSpPr>
+          <p:cNvPr id="15" name="Text 13"/>
           <p:cNvSpPr txBox="1"/>
           <p:nvPr/>
         </p:nvSpPr>
@@ -2510,11 +2556,11 @@
             <a:r>
               <a:rPr lang="en-US" sz="1050" dirty="0">
                 <a:solidFill>
-                  <a:srgbClr val="6E6E6E"/>
-                </a:solidFill>
-                <a:latin typeface="Arial" pitchFamily="34" charset="0"/>
-                <a:ea typeface="Arial" pitchFamily="34" charset="-122"/>
-                <a:cs typeface="Arial" pitchFamily="34" charset="-120"/>
+                  <a:srgbClr val="757575"/>
+                </a:solidFill>
+                <a:latin typeface="Roboto" pitchFamily="34" charset="0"/>
+                <a:ea typeface="Roboto" pitchFamily="34" charset="-122"/>
+                <a:cs typeface="Roboto" pitchFamily="34" charset="-120"/>
               </a:rPr>
               <a:t>de taxa de custódia</a:t>
             </a:r>
@@ -2524,13 +2570,52 @@
       </p:sp>
       <p:sp>
         <p:nvSpPr>
-          <p:cNvPr id="14" name="Text 12"/>
+          <p:cNvPr id="16" name="Text 14"/>
           <p:cNvSpPr txBox="1"/>
           <p:nvPr/>
         </p:nvSpPr>
         <p:spPr>
           <a:xfrm>
             <a:off x="640080" y="1371600"/>
+            <a:ext cx="4572000" cy="256032"/>
+          </a:xfrm>
+          <a:prstGeom prst="rect">
+            <a:avLst/>
+          </a:prstGeom>
+          <a:noFill/>
+          <a:ln/>
+        </p:spPr>
+        <p:txBody>
+          <a:bodyPr wrap="square" lIns="0" tIns="0" rIns="0" bIns="0" rtlCol="0" anchor="ctr"/>
+          <a:lstStyle/>
+          <a:p>
+            <a:pPr indent="0" marL="0">
+              <a:buNone/>
+            </a:pPr>
+            <a:r>
+              <a:rPr lang="en-US" sz="1250" b="1" dirty="0">
+                <a:solidFill>
+                  <a:srgbClr val="FFC709"/>
+                </a:solidFill>
+                <a:latin typeface="Roboto" pitchFamily="34" charset="0"/>
+                <a:ea typeface="Roboto" pitchFamily="34" charset="-122"/>
+                <a:cs typeface="Roboto" pitchFamily="34" charset="-120"/>
+              </a:rPr>
+              <a:t>XP Investimentos</a:t>
+            </a:r>
+            <a:endParaRPr lang="en-US" sz="1250" dirty="0"/>
+          </a:p>
+        </p:txBody>
+      </p:sp>
+      <p:sp>
+        <p:nvSpPr>
+          <p:cNvPr id="17" name="Text 15"/>
+          <p:cNvSpPr txBox="1"/>
+          <p:nvPr/>
+        </p:nvSpPr>
+        <p:spPr>
+          <a:xfrm>
+            <a:off x="640080" y="6035040"/>
             <a:ext cx="5486400" cy="256032"/>
           </a:xfrm>
           <a:prstGeom prst="rect">
@@ -2547,52 +2632,13 @@
               <a:buNone/>
             </a:pPr>
             <a:r>
-              <a:rPr lang="en-US" sz="1250" b="1" dirty="0">
-                <a:solidFill>
-                  <a:srgbClr val="FFC709"/>
-                </a:solidFill>
-                <a:latin typeface="Arial" pitchFamily="34" charset="0"/>
-                <a:ea typeface="Arial" pitchFamily="34" charset="-122"/>
-                <a:cs typeface="Arial" pitchFamily="34" charset="-120"/>
-              </a:rPr>
-              <a:t>XP Investimentos</a:t>
-            </a:r>
-            <a:endParaRPr lang="en-US" sz="1250" dirty="0"/>
-          </a:p>
-        </p:txBody>
-      </p:sp>
-      <p:sp>
-        <p:nvSpPr>
-          <p:cNvPr id="15" name="Text 13"/>
-          <p:cNvSpPr txBox="1"/>
-          <p:nvPr/>
-        </p:nvSpPr>
-        <p:spPr>
-          <a:xfrm>
-            <a:off x="7406640" y="1371600"/>
-            <a:ext cx="4114800" cy="256032"/>
-          </a:xfrm>
-          <a:prstGeom prst="rect">
-            <a:avLst/>
-          </a:prstGeom>
-          <a:noFill/>
-          <a:ln/>
-        </p:spPr>
-        <p:txBody>
-          <a:bodyPr wrap="square" lIns="0" tIns="0" rIns="0" bIns="0" rtlCol="0" anchor="ctr"/>
-          <a:lstStyle/>
-          <a:p>
-            <a:pPr algn="r" indent="0" marL="0">
-              <a:buNone/>
-            </a:pPr>
-            <a:r>
               <a:rPr lang="en-US" sz="1100" dirty="0">
                 <a:solidFill>
-                  <a:srgbClr val="6E6E6E"/>
-                </a:solidFill>
-                <a:latin typeface="Arial" pitchFamily="34" charset="0"/>
-                <a:ea typeface="Arial" pitchFamily="34" charset="-122"/>
-                <a:cs typeface="Arial" pitchFamily="34" charset="-120"/>
+                  <a:srgbClr val="757575"/>
+                </a:solidFill>
+                <a:latin typeface="Roboto" pitchFamily="34" charset="0"/>
+                <a:ea typeface="Roboto" pitchFamily="34" charset="-122"/>
+                <a:cs typeface="Roboto" pitchFamily="34" charset="-120"/>
               </a:rPr>
               <a:t>Reunião de diagnóstico  ·  30 minutos</a:t>
             </a:r>
@@ -2614,7 +2660,7 @@
     <p:bg>
       <p:bgPr>
         <a:solidFill>
-          <a:srgbClr val="000000"/>
+          <a:srgbClr val="0D0D0D"/>
         </a:solidFill>
       </p:bgPr>
     </p:bg>
@@ -2657,17 +2703,17 @@
               <a:buNone/>
             </a:pPr>
             <a:r>
-              <a:rPr lang="en-US" sz="1200" b="1" dirty="0">
+              <a:rPr lang="en-US" sz="1150" b="1" dirty="0">
                 <a:solidFill>
                   <a:srgbClr val="FFC709"/>
                 </a:solidFill>
-                <a:latin typeface="Arial" pitchFamily="34" charset="0"/>
-                <a:ea typeface="Arial" pitchFamily="34" charset="-122"/>
-                <a:cs typeface="Arial" pitchFamily="34" charset="-120"/>
+                <a:latin typeface="Roboto" pitchFamily="34" charset="0"/>
+                <a:ea typeface="Roboto" pitchFamily="34" charset="-122"/>
+                <a:cs typeface="Roboto" pitchFamily="34" charset="-120"/>
               </a:rPr>
               <a:t>Próximos passos</a:t>
             </a:r>
-            <a:endParaRPr lang="en-US" sz="1200" dirty="0"/>
+            <a:endParaRPr lang="en-US" sz="1150" dirty="0"/>
           </a:p>
         </p:txBody>
       </p:sp>
@@ -2696,17 +2742,17 @@
               <a:buNone/>
             </a:pPr>
             <a:r>
-              <a:rPr lang="en-US" sz="3400" b="1" dirty="0">
+              <a:rPr lang="en-US" sz="3000" b="1" dirty="0">
                 <a:solidFill>
                   <a:srgbClr val="FFFFFF"/>
                 </a:solidFill>
-                <a:latin typeface="Arial" pitchFamily="34" charset="0"/>
-                <a:ea typeface="Arial" pitchFamily="34" charset="-122"/>
-                <a:cs typeface="Arial" pitchFamily="34" charset="-120"/>
+                <a:latin typeface="Roboto Slab" pitchFamily="34" charset="0"/>
+                <a:ea typeface="Roboto Slab" pitchFamily="34" charset="-122"/>
+                <a:cs typeface="Roboto Slab" pitchFamily="34" charset="-120"/>
               </a:rPr>
               <a:t>Plano de ação imediato</a:t>
             </a:r>
-            <a:endParaRPr lang="en-US" sz="3400" dirty="0"/>
+            <a:endParaRPr lang="en-US" sz="3000" dirty="0"/>
           </a:p>
         </p:txBody>
       </p:sp>
@@ -2739,9 +2785,9 @@
                 <a:solidFill>
                   <a:srgbClr val="A5A5A5"/>
                 </a:solidFill>
-                <a:latin typeface="Arial" pitchFamily="34" charset="0"/>
-                <a:ea typeface="Arial" pitchFamily="34" charset="-122"/>
-                <a:cs typeface="Arial" pitchFamily="34" charset="-120"/>
+                <a:latin typeface="Roboto" pitchFamily="34" charset="0"/>
+                <a:ea typeface="Roboto" pitchFamily="34" charset="-122"/>
+                <a:cs typeface="Roboto" pitchFamily="34" charset="-120"/>
               </a:rPr>
               <a:t>Quatro movimentos. O primeiro começa ainda nesta reunião.</a:t>
             </a:r>
@@ -2801,9 +2847,9 @@
                 <a:solidFill>
                   <a:srgbClr val="FFC709"/>
                 </a:solidFill>
-                <a:latin typeface="Arial" pitchFamily="34" charset="0"/>
-                <a:ea typeface="Arial" pitchFamily="34" charset="-122"/>
-                <a:cs typeface="Arial" pitchFamily="34" charset="-120"/>
+                <a:latin typeface="Roboto" pitchFamily="34" charset="0"/>
+                <a:ea typeface="Roboto" pitchFamily="34" charset="-122"/>
+                <a:cs typeface="Roboto" pitchFamily="34" charset="-120"/>
               </a:rPr>
               <a:t>01</a:t>
             </a:r>
@@ -2840,9 +2886,9 @@
                 <a:solidFill>
                   <a:srgbClr val="FFFFFF"/>
                 </a:solidFill>
-                <a:latin typeface="Arial" pitchFamily="34" charset="0"/>
-                <a:ea typeface="Arial" pitchFamily="34" charset="-122"/>
-                <a:cs typeface="Arial" pitchFamily="34" charset="-120"/>
+                <a:latin typeface="Roboto" pitchFamily="34" charset="0"/>
+                <a:ea typeface="Roboto" pitchFamily="34" charset="-122"/>
+                <a:cs typeface="Roboto" pitchFamily="34" charset="-120"/>
               </a:rPr>
               <a:t>Hoje</a:t>
             </a:r>
@@ -2878,17 +2924,17 @@
               <a:buNone/>
             </a:pPr>
             <a:r>
-              <a:rPr lang="en-US" sz="1250" dirty="0">
+              <a:rPr lang="en-US" sz="1200" dirty="0">
                 <a:solidFill>
                   <a:srgbClr val="A5A5A5"/>
                 </a:solidFill>
-                <a:latin typeface="Arial" pitchFamily="34" charset="0"/>
-                <a:ea typeface="Arial" pitchFamily="34" charset="-122"/>
-                <a:cs typeface="Arial" pitchFamily="34" charset="-120"/>
+                <a:latin typeface="Roboto" pitchFamily="34" charset="0"/>
+                <a:ea typeface="Roboto" pitchFamily="34" charset="-122"/>
+                <a:cs typeface="Roboto" pitchFamily="34" charset="-120"/>
               </a:rPr>
               <a:t>Atualizar o seu suitability na conta XP e validar a proposta de alocação das três caixas.</a:t>
             </a:r>
-            <a:endParaRPr lang="en-US" sz="1250" dirty="0"/>
+            <a:endParaRPr lang="en-US" sz="1200" dirty="0"/>
           </a:p>
         </p:txBody>
       </p:sp>
@@ -2909,7 +2955,7 @@
           <a:noFill/>
           <a:ln w="9525">
             <a:solidFill>
-              <a:srgbClr val="2B2B2B"/>
+              <a:srgbClr val="2E2E2E"/>
             </a:solidFill>
             <a:prstDash val="solid"/>
           </a:ln>
@@ -2944,9 +2990,9 @@
                 <a:solidFill>
                   <a:srgbClr val="FFC709"/>
                 </a:solidFill>
-                <a:latin typeface="Arial" pitchFamily="34" charset="0"/>
-                <a:ea typeface="Arial" pitchFamily="34" charset="-122"/>
-                <a:cs typeface="Arial" pitchFamily="34" charset="-120"/>
+                <a:latin typeface="Roboto" pitchFamily="34" charset="0"/>
+                <a:ea typeface="Roboto" pitchFamily="34" charset="-122"/>
+                <a:cs typeface="Roboto" pitchFamily="34" charset="-120"/>
               </a:rPr>
               <a:t>02</a:t>
             </a:r>
@@ -2983,9 +3029,9 @@
                 <a:solidFill>
                   <a:srgbClr val="FFFFFF"/>
                 </a:solidFill>
-                <a:latin typeface="Arial" pitchFamily="34" charset="0"/>
-                <a:ea typeface="Arial" pitchFamily="34" charset="-122"/>
-                <a:cs typeface="Arial" pitchFamily="34" charset="-120"/>
+                <a:latin typeface="Roboto" pitchFamily="34" charset="0"/>
+                <a:ea typeface="Roboto" pitchFamily="34" charset="-122"/>
+                <a:cs typeface="Roboto" pitchFamily="34" charset="-120"/>
               </a:rPr>
               <a:t>Esta semana</a:t>
             </a:r>
@@ -3021,17 +3067,17 @@
               <a:buNone/>
             </a:pPr>
             <a:r>
-              <a:rPr lang="en-US" sz="1250" dirty="0">
+              <a:rPr lang="en-US" sz="1200" dirty="0">
                 <a:solidFill>
                   <a:srgbClr val="A5A5A5"/>
                 </a:solidFill>
-                <a:latin typeface="Arial" pitchFamily="34" charset="0"/>
-                <a:ea typeface="Arial" pitchFamily="34" charset="-122"/>
-                <a:cs typeface="Arial" pitchFamily="34" charset="-120"/>
+                <a:latin typeface="Roboto" pitchFamily="34" charset="0"/>
+                <a:ea typeface="Roboto" pitchFamily="34" charset="-122"/>
+                <a:cs typeface="Roboto" pitchFamily="34" charset="-120"/>
               </a:rPr>
               <a:t>Aplicar os R$ 200.000 da conta corrente: R$ 60 mil na reserva em CDB D+0 e R$ 140 mil em VGBL, LCI e LCA.</a:t>
             </a:r>
-            <a:endParaRPr lang="en-US" sz="1250" dirty="0"/>
+            <a:endParaRPr lang="en-US" sz="1200" dirty="0"/>
           </a:p>
         </p:txBody>
       </p:sp>
@@ -3052,7 +3098,7 @@
           <a:noFill/>
           <a:ln w="9525">
             <a:solidFill>
-              <a:srgbClr val="2B2B2B"/>
+              <a:srgbClr val="2E2E2E"/>
             </a:solidFill>
             <a:prstDash val="solid"/>
           </a:ln>
@@ -3087,9 +3133,9 @@
                 <a:solidFill>
                   <a:srgbClr val="FFC709"/>
                 </a:solidFill>
-                <a:latin typeface="Arial" pitchFamily="34" charset="0"/>
-                <a:ea typeface="Arial" pitchFamily="34" charset="-122"/>
-                <a:cs typeface="Arial" pitchFamily="34" charset="-120"/>
+                <a:latin typeface="Roboto" pitchFamily="34" charset="0"/>
+                <a:ea typeface="Roboto" pitchFamily="34" charset="-122"/>
+                <a:cs typeface="Roboto" pitchFamily="34" charset="-120"/>
               </a:rPr>
               <a:t>03</a:t>
             </a:r>
@@ -3126,9 +3172,9 @@
                 <a:solidFill>
                   <a:srgbClr val="FFFFFF"/>
                 </a:solidFill>
-                <a:latin typeface="Arial" pitchFamily="34" charset="0"/>
-                <a:ea typeface="Arial" pitchFamily="34" charset="-122"/>
-                <a:cs typeface="Arial" pitchFamily="34" charset="-120"/>
+                <a:latin typeface="Roboto" pitchFamily="34" charset="0"/>
+                <a:ea typeface="Roboto" pitchFamily="34" charset="-122"/>
+                <a:cs typeface="Roboto" pitchFamily="34" charset="-120"/>
               </a:rPr>
               <a:t>Próximos 5 meses</a:t>
             </a:r>
@@ -3164,17 +3210,17 @@
               <a:buNone/>
             </a:pPr>
             <a:r>
-              <a:rPr lang="en-US" sz="1250" dirty="0">
+              <a:rPr lang="en-US" sz="1200" dirty="0">
                 <a:solidFill>
                   <a:srgbClr val="A5A5A5"/>
                 </a:solidFill>
-                <a:latin typeface="Arial" pitchFamily="34" charset="0"/>
-                <a:ea typeface="Arial" pitchFamily="34" charset="-122"/>
-                <a:cs typeface="Arial" pitchFamily="34" charset="-120"/>
+                <a:latin typeface="Roboto" pitchFamily="34" charset="0"/>
+                <a:ea typeface="Roboto" pitchFamily="34" charset="-122"/>
+                <a:cs typeface="Roboto" pitchFamily="34" charset="-120"/>
               </a:rPr>
               <a:t>Desmontar a posição em ações em parcelas de até R$ 20 mil por mês, aproveitando a isenção de IR sobre vendas de ações até esse limite mensal.</a:t>
             </a:r>
-            <a:endParaRPr lang="en-US" sz="1250" dirty="0"/>
+            <a:endParaRPr lang="en-US" sz="1200" dirty="0"/>
           </a:p>
         </p:txBody>
       </p:sp>
@@ -3195,7 +3241,7 @@
           <a:noFill/>
           <a:ln w="9525">
             <a:solidFill>
-              <a:srgbClr val="2B2B2B"/>
+              <a:srgbClr val="2E2E2E"/>
             </a:solidFill>
             <a:prstDash val="solid"/>
           </a:ln>
@@ -3230,9 +3276,9 @@
                 <a:solidFill>
                   <a:srgbClr val="FFC709"/>
                 </a:solidFill>
-                <a:latin typeface="Arial" pitchFamily="34" charset="0"/>
-                <a:ea typeface="Arial" pitchFamily="34" charset="-122"/>
-                <a:cs typeface="Arial" pitchFamily="34" charset="-120"/>
+                <a:latin typeface="Roboto" pitchFamily="34" charset="0"/>
+                <a:ea typeface="Roboto" pitchFamily="34" charset="-122"/>
+                <a:cs typeface="Roboto" pitchFamily="34" charset="-120"/>
               </a:rPr>
               <a:t>04</a:t>
             </a:r>
@@ -3269,9 +3315,9 @@
                 <a:solidFill>
                   <a:srgbClr val="FFFFFF"/>
                 </a:solidFill>
-                <a:latin typeface="Arial" pitchFamily="34" charset="0"/>
-                <a:ea typeface="Arial" pitchFamily="34" charset="-122"/>
-                <a:cs typeface="Arial" pitchFamily="34" charset="-120"/>
+                <a:latin typeface="Roboto" pitchFamily="34" charset="0"/>
+                <a:ea typeface="Roboto" pitchFamily="34" charset="-122"/>
+                <a:cs typeface="Roboto" pitchFamily="34" charset="-120"/>
               </a:rPr>
               <a:t>Contínuo</a:t>
             </a:r>
@@ -3307,17 +3353,17 @@
               <a:buNone/>
             </a:pPr>
             <a:r>
-              <a:rPr lang="en-US" sz="1250" dirty="0">
+              <a:rPr lang="en-US" sz="1200" dirty="0">
                 <a:solidFill>
                   <a:srgbClr val="A5A5A5"/>
                 </a:solidFill>
-                <a:latin typeface="Arial" pitchFamily="34" charset="0"/>
-                <a:ea typeface="Arial" pitchFamily="34" charset="-122"/>
-                <a:cs typeface="Arial" pitchFamily="34" charset="-120"/>
+                <a:latin typeface="Roboto" pitchFamily="34" charset="0"/>
+                <a:ea typeface="Roboto" pitchFamily="34" charset="-122"/>
+                <a:cs typeface="Roboto" pitchFamily="34" charset="-120"/>
               </a:rPr>
               <a:t>Aporte mensal de R$ 3.600, relatório trimestral no aplicativo e revisão semestral de 30 minutos.</a:t>
             </a:r>
-            <a:endParaRPr lang="en-US" sz="1250" dirty="0"/>
+            <a:endParaRPr lang="en-US" sz="1200" dirty="0"/>
           </a:p>
         </p:txBody>
       </p:sp>
@@ -3338,7 +3384,7 @@
           <a:noFill/>
           <a:ln w="9525">
             <a:solidFill>
-              <a:srgbClr val="2B2B2B"/>
+              <a:srgbClr val="2E2E2E"/>
             </a:solidFill>
             <a:prstDash val="solid"/>
           </a:ln>
@@ -3373,9 +3419,9 @@
                 <a:solidFill>
                   <a:srgbClr val="FFC709"/>
                 </a:solidFill>
-                <a:latin typeface="Arial" pitchFamily="34" charset="0"/>
-                <a:ea typeface="Arial" pitchFamily="34" charset="-122"/>
-                <a:cs typeface="Arial" pitchFamily="34" charset="-120"/>
+                <a:latin typeface="Roboto" pitchFamily="34" charset="0"/>
+                <a:ea typeface="Roboto" pitchFamily="34" charset="-122"/>
+                <a:cs typeface="Roboto" pitchFamily="34" charset="-120"/>
               </a:rPr>
               <a:t>Atualizar o suitability leva 10 minutos. Seus R$ 200 mil param de perder para a inflação já no próximo dia útil.</a:t>
             </a:r>
@@ -3400,7 +3446,7 @@
           <a:noFill/>
           <a:ln w="9525">
             <a:solidFill>
-              <a:srgbClr val="2B2B2B"/>
+              <a:srgbClr val="2E2E2E"/>
             </a:solidFill>
             <a:prstDash val="solid"/>
           </a:ln>
@@ -3433,11 +3479,11 @@
             <a:r>
               <a:rPr lang="en-US" sz="900" dirty="0">
                 <a:solidFill>
-                  <a:srgbClr val="6E6E6E"/>
-                </a:solidFill>
-                <a:latin typeface="Arial" pitchFamily="34" charset="0"/>
-                <a:ea typeface="Arial" pitchFamily="34" charset="-122"/>
-                <a:cs typeface="Arial" pitchFamily="34" charset="-120"/>
+                  <a:srgbClr val="757575"/>
+                </a:solidFill>
+                <a:latin typeface="Roboto" pitchFamily="34" charset="0"/>
+                <a:ea typeface="Roboto" pitchFamily="34" charset="-122"/>
+                <a:cs typeface="Roboto" pitchFamily="34" charset="-120"/>
               </a:rPr>
               <a:t>XP Investimentos  ·  Planejamento Patrimonial</a:t>
             </a:r>
@@ -3453,8 +3499,8 @@
         </p:nvSpPr>
         <p:spPr>
           <a:xfrm>
-            <a:off x="10607040" y="6473952"/>
-            <a:ext cx="914400" cy="219456"/>
+            <a:off x="10149840" y="6473952"/>
+            <a:ext cx="1005840" cy="219456"/>
           </a:xfrm>
           <a:prstGeom prst="rect">
             <a:avLst/>
@@ -3472,17 +3518,63 @@
             <a:r>
               <a:rPr lang="en-US" sz="900" dirty="0">
                 <a:solidFill>
-                  <a:srgbClr val="6E6E6E"/>
-                </a:solidFill>
-                <a:latin typeface="Arial" pitchFamily="34" charset="0"/>
-                <a:ea typeface="Arial" pitchFamily="34" charset="-122"/>
-                <a:cs typeface="Arial" pitchFamily="34" charset="-120"/>
+                  <a:srgbClr val="757575"/>
+                </a:solidFill>
+                <a:latin typeface="Roboto" pitchFamily="34" charset="0"/>
+                <a:ea typeface="Roboto" pitchFamily="34" charset="-122"/>
+                <a:cs typeface="Roboto" pitchFamily="34" charset="-120"/>
               </a:rPr>
               <a:t>10</a:t>
             </a:r>
             <a:endParaRPr lang="en-US" sz="900" dirty="0"/>
           </a:p>
         </p:txBody>
+      </p:sp>
+      <p:sp>
+        <p:nvSpPr>
+          <p:cNvPr id="26" name="Shape 24"/>
+          <p:cNvSpPr/>
+          <p:nvPr/>
+        </p:nvSpPr>
+        <p:spPr>
+          <a:xfrm>
+            <a:off x="11365992" y="6510528"/>
+            <a:ext cx="155448" cy="155448"/>
+          </a:xfrm>
+          <a:prstGeom prst="line">
+            <a:avLst/>
+          </a:prstGeom>
+          <a:noFill/>
+          <a:ln w="9525">
+            <a:solidFill>
+              <a:srgbClr val="FFC709"/>
+            </a:solidFill>
+            <a:prstDash val="solid"/>
+          </a:ln>
+        </p:spPr>
+      </p:sp>
+      <p:sp>
+        <p:nvSpPr>
+          <p:cNvPr id="27" name="Shape 25"/>
+          <p:cNvSpPr/>
+          <p:nvPr/>
+        </p:nvSpPr>
+        <p:spPr>
+          <a:xfrm flipH="1">
+            <a:off x="11365992" y="6510528"/>
+            <a:ext cx="155448" cy="155448"/>
+          </a:xfrm>
+          <a:prstGeom prst="line">
+            <a:avLst/>
+          </a:prstGeom>
+          <a:noFill/>
+          <a:ln w="9525">
+            <a:solidFill>
+              <a:srgbClr val="FFC709"/>
+            </a:solidFill>
+            <a:prstDash val="solid"/>
+          </a:ln>
+        </p:spPr>
       </p:sp>
     </p:spTree>
   </p:cSld>
@@ -3498,7 +3590,7 @@
     <p:bg>
       <p:bgPr>
         <a:solidFill>
-          <a:srgbClr val="000000"/>
+          <a:srgbClr val="0D0D0D"/>
         </a:solidFill>
       </p:bgPr>
     </p:bg>
@@ -3541,17 +3633,17 @@
               <a:buNone/>
             </a:pPr>
             <a:r>
-              <a:rPr lang="en-US" sz="1200" b="1" dirty="0">
+              <a:rPr lang="en-US" sz="1150" b="1" dirty="0">
                 <a:solidFill>
                   <a:srgbClr val="FFC709"/>
                 </a:solidFill>
-                <a:latin typeface="Arial" pitchFamily="34" charset="0"/>
-                <a:ea typeface="Arial" pitchFamily="34" charset="-122"/>
-                <a:cs typeface="Arial" pitchFamily="34" charset="-120"/>
+                <a:latin typeface="Roboto" pitchFamily="34" charset="0"/>
+                <a:ea typeface="Roboto" pitchFamily="34" charset="-122"/>
+                <a:cs typeface="Roboto" pitchFamily="34" charset="-120"/>
               </a:rPr>
               <a:t>Diagnóstico</a:t>
             </a:r>
-            <a:endParaRPr lang="en-US" sz="1200" dirty="0"/>
+            <a:endParaRPr lang="en-US" sz="1150" dirty="0"/>
           </a:p>
         </p:txBody>
       </p:sp>
@@ -3580,17 +3672,17 @@
               <a:buNone/>
             </a:pPr>
             <a:r>
-              <a:rPr lang="en-US" sz="3400" b="1" dirty="0">
+              <a:rPr lang="en-US" sz="3000" b="1" dirty="0">
                 <a:solidFill>
                   <a:srgbClr val="FFFFFF"/>
                 </a:solidFill>
-                <a:latin typeface="Arial" pitchFamily="34" charset="0"/>
-                <a:ea typeface="Arial" pitchFamily="34" charset="-122"/>
-                <a:cs typeface="Arial" pitchFamily="34" charset="-120"/>
+                <a:latin typeface="Roboto Slab" pitchFamily="34" charset="0"/>
+                <a:ea typeface="Roboto Slab" pitchFamily="34" charset="-122"/>
+                <a:cs typeface="Roboto Slab" pitchFamily="34" charset="-120"/>
               </a:rPr>
               <a:t>A fotografia do seu momento financeiro</a:t>
             </a:r>
-            <a:endParaRPr lang="en-US" sz="3400" dirty="0"/>
+            <a:endParaRPr lang="en-US" sz="3000" dirty="0"/>
           </a:p>
         </p:txBody>
       </p:sp>
@@ -3623,9 +3715,9 @@
                 <a:solidFill>
                   <a:srgbClr val="A5A5A5"/>
                 </a:solidFill>
-                <a:latin typeface="Arial" pitchFamily="34" charset="0"/>
-                <a:ea typeface="Arial" pitchFamily="34" charset="-122"/>
-                <a:cs typeface="Arial" pitchFamily="34" charset="-120"/>
+                <a:latin typeface="Roboto" pitchFamily="34" charset="0"/>
+                <a:ea typeface="Roboto" pitchFamily="34" charset="-122"/>
+                <a:cs typeface="Roboto" pitchFamily="34" charset="-120"/>
               </a:rPr>
               <a:t>Patrimônio total de R$ 400.000 e dois gargalos a resolver.</a:t>
             </a:r>
@@ -3662,9 +3754,9 @@
                 <a:solidFill>
                   <a:srgbClr val="FFC709"/>
                 </a:solidFill>
-                <a:latin typeface="Arial" pitchFamily="34" charset="0"/>
-                <a:ea typeface="Arial" pitchFamily="34" charset="-122"/>
-                <a:cs typeface="Arial" pitchFamily="34" charset="-120"/>
+                <a:latin typeface="Roboto" pitchFamily="34" charset="0"/>
+                <a:ea typeface="Roboto" pitchFamily="34" charset="-122"/>
+                <a:cs typeface="Roboto" pitchFamily="34" charset="-120"/>
               </a:rPr>
               <a:t>Perfil</a:t>
             </a:r>
@@ -3699,11 +3791,11 @@
             <a:r>
               <a:rPr lang="en-US" sz="1150" dirty="0">
                 <a:solidFill>
-                  <a:srgbClr val="6E6E6E"/>
-                </a:solidFill>
-                <a:latin typeface="Arial" pitchFamily="34" charset="0"/>
-                <a:ea typeface="Arial" pitchFamily="34" charset="-122"/>
-                <a:cs typeface="Arial" pitchFamily="34" charset="-120"/>
+                  <a:srgbClr val="757575"/>
+                </a:solidFill>
+                <a:latin typeface="Roboto" pitchFamily="34" charset="0"/>
+                <a:ea typeface="Roboto" pitchFamily="34" charset="-122"/>
+                <a:cs typeface="Roboto" pitchFamily="34" charset="-120"/>
               </a:rPr>
               <a:t>Idade</a:t>
             </a:r>
@@ -3740,9 +3832,9 @@
                 <a:solidFill>
                   <a:srgbClr val="FFFFFF"/>
                 </a:solidFill>
-                <a:latin typeface="Arial" pitchFamily="34" charset="0"/>
-                <a:ea typeface="Arial" pitchFamily="34" charset="-122"/>
-                <a:cs typeface="Arial" pitchFamily="34" charset="-120"/>
+                <a:latin typeface="Roboto" pitchFamily="34" charset="0"/>
+                <a:ea typeface="Roboto" pitchFamily="34" charset="-122"/>
+                <a:cs typeface="Roboto" pitchFamily="34" charset="-120"/>
               </a:rPr>
               <a:t>40 anos</a:t>
             </a:r>
@@ -3767,7 +3859,7 @@
           <a:noFill/>
           <a:ln w="9525">
             <a:solidFill>
-              <a:srgbClr val="2B2B2B"/>
+              <a:srgbClr val="2E2E2E"/>
             </a:solidFill>
             <a:prstDash val="solid"/>
           </a:ln>
@@ -3800,11 +3892,11 @@
             <a:r>
               <a:rPr lang="en-US" sz="1150" dirty="0">
                 <a:solidFill>
-                  <a:srgbClr val="6E6E6E"/>
-                </a:solidFill>
-                <a:latin typeface="Arial" pitchFamily="34" charset="0"/>
-                <a:ea typeface="Arial" pitchFamily="34" charset="-122"/>
-                <a:cs typeface="Arial" pitchFamily="34" charset="-120"/>
+                  <a:srgbClr val="757575"/>
+                </a:solidFill>
+                <a:latin typeface="Roboto" pitchFamily="34" charset="0"/>
+                <a:ea typeface="Roboto" pitchFamily="34" charset="-122"/>
+                <a:cs typeface="Roboto" pitchFamily="34" charset="-120"/>
               </a:rPr>
               <a:t>Profissão</a:t>
             </a:r>
@@ -3841,9 +3933,9 @@
                 <a:solidFill>
                   <a:srgbClr val="FFFFFF"/>
                 </a:solidFill>
-                <a:latin typeface="Arial" pitchFamily="34" charset="0"/>
-                <a:ea typeface="Arial" pitchFamily="34" charset="-122"/>
-                <a:cs typeface="Arial" pitchFamily="34" charset="-120"/>
+                <a:latin typeface="Roboto" pitchFamily="34" charset="0"/>
+                <a:ea typeface="Roboto" pitchFamily="34" charset="-122"/>
+                <a:cs typeface="Roboto" pitchFamily="34" charset="-120"/>
               </a:rPr>
               <a:t>Engenheiro</a:t>
             </a:r>
@@ -3868,7 +3960,7 @@
           <a:noFill/>
           <a:ln w="9525">
             <a:solidFill>
-              <a:srgbClr val="2B2B2B"/>
+              <a:srgbClr val="2E2E2E"/>
             </a:solidFill>
             <a:prstDash val="solid"/>
           </a:ln>
@@ -3901,11 +3993,11 @@
             <a:r>
               <a:rPr lang="en-US" sz="1150" dirty="0">
                 <a:solidFill>
-                  <a:srgbClr val="6E6E6E"/>
-                </a:solidFill>
-                <a:latin typeface="Arial" pitchFamily="34" charset="0"/>
-                <a:ea typeface="Arial" pitchFamily="34" charset="-122"/>
-                <a:cs typeface="Arial" pitchFamily="34" charset="-120"/>
+                  <a:srgbClr val="757575"/>
+                </a:solidFill>
+                <a:latin typeface="Roboto" pitchFamily="34" charset="0"/>
+                <a:ea typeface="Roboto" pitchFamily="34" charset="-122"/>
+                <a:cs typeface="Roboto" pitchFamily="34" charset="-120"/>
               </a:rPr>
               <a:t>Estado civil</a:t>
             </a:r>
@@ -3942,9 +4034,9 @@
                 <a:solidFill>
                   <a:srgbClr val="FFFFFF"/>
                 </a:solidFill>
-                <a:latin typeface="Arial" pitchFamily="34" charset="0"/>
-                <a:ea typeface="Arial" pitchFamily="34" charset="-122"/>
-                <a:cs typeface="Arial" pitchFamily="34" charset="-120"/>
+                <a:latin typeface="Roboto" pitchFamily="34" charset="0"/>
+                <a:ea typeface="Roboto" pitchFamily="34" charset="-122"/>
+                <a:cs typeface="Roboto" pitchFamily="34" charset="-120"/>
               </a:rPr>
               <a:t>Casado, 1 filha</a:t>
             </a:r>
@@ -3969,7 +4061,7 @@
           <a:noFill/>
           <a:ln w="9525">
             <a:solidFill>
-              <a:srgbClr val="2B2B2B"/>
+              <a:srgbClr val="2E2E2E"/>
             </a:solidFill>
             <a:prstDash val="solid"/>
           </a:ln>
@@ -4002,11 +4094,11 @@
             <a:r>
               <a:rPr lang="en-US" sz="1150" dirty="0">
                 <a:solidFill>
-                  <a:srgbClr val="6E6E6E"/>
-                </a:solidFill>
-                <a:latin typeface="Arial" pitchFamily="34" charset="0"/>
-                <a:ea typeface="Arial" pitchFamily="34" charset="-122"/>
-                <a:cs typeface="Arial" pitchFamily="34" charset="-120"/>
+                  <a:srgbClr val="757575"/>
+                </a:solidFill>
+                <a:latin typeface="Roboto" pitchFamily="34" charset="0"/>
+                <a:ea typeface="Roboto" pitchFamily="34" charset="-122"/>
+                <a:cs typeface="Roboto" pitchFamily="34" charset="-120"/>
               </a:rPr>
               <a:t>Renda mensal</a:t>
             </a:r>
@@ -4043,9 +4135,9 @@
                 <a:solidFill>
                   <a:srgbClr val="FFFFFF"/>
                 </a:solidFill>
-                <a:latin typeface="Arial" pitchFamily="34" charset="0"/>
-                <a:ea typeface="Arial" pitchFamily="34" charset="-122"/>
-                <a:cs typeface="Arial" pitchFamily="34" charset="-120"/>
+                <a:latin typeface="Roboto" pitchFamily="34" charset="0"/>
+                <a:ea typeface="Roboto" pitchFamily="34" charset="-122"/>
+                <a:cs typeface="Roboto" pitchFamily="34" charset="-120"/>
               </a:rPr>
               <a:t>R$ 12.000</a:t>
             </a:r>
@@ -4070,7 +4162,7 @@
           <a:noFill/>
           <a:ln w="9525">
             <a:solidFill>
-              <a:srgbClr val="2B2B2B"/>
+              <a:srgbClr val="2E2E2E"/>
             </a:solidFill>
             <a:prstDash val="solid"/>
           </a:ln>
@@ -4103,11 +4195,11 @@
             <a:r>
               <a:rPr lang="en-US" sz="1150" dirty="0">
                 <a:solidFill>
-                  <a:srgbClr val="6E6E6E"/>
-                </a:solidFill>
-                <a:latin typeface="Arial" pitchFamily="34" charset="0"/>
-                <a:ea typeface="Arial" pitchFamily="34" charset="-122"/>
-                <a:cs typeface="Arial" pitchFamily="34" charset="-120"/>
+                  <a:srgbClr val="757575"/>
+                </a:solidFill>
+                <a:latin typeface="Roboto" pitchFamily="34" charset="0"/>
+                <a:ea typeface="Roboto" pitchFamily="34" charset="-122"/>
+                <a:cs typeface="Roboto" pitchFamily="34" charset="-120"/>
               </a:rPr>
               <a:t>Perfil declarado</a:t>
             </a:r>
@@ -4144,9 +4236,9 @@
                 <a:solidFill>
                   <a:srgbClr val="FFFFFF"/>
                 </a:solidFill>
-                <a:latin typeface="Arial" pitchFamily="34" charset="0"/>
-                <a:ea typeface="Arial" pitchFamily="34" charset="-122"/>
-                <a:cs typeface="Arial" pitchFamily="34" charset="-120"/>
+                <a:latin typeface="Roboto" pitchFamily="34" charset="0"/>
+                <a:ea typeface="Roboto" pitchFamily="34" charset="-122"/>
+                <a:cs typeface="Roboto" pitchFamily="34" charset="-120"/>
               </a:rPr>
               <a:t>Moderado</a:t>
             </a:r>
@@ -4171,7 +4263,7 @@
           <a:noFill/>
           <a:ln w="9525">
             <a:solidFill>
-              <a:srgbClr val="2B2B2B"/>
+              <a:srgbClr val="2E2E2E"/>
             </a:solidFill>
             <a:prstDash val="solid"/>
           </a:ln>
@@ -4202,17 +4294,17 @@
               <a:buNone/>
             </a:pPr>
             <a:r>
-              <a:rPr lang="en-US" sz="3400" b="1" dirty="0">
+              <a:rPr lang="en-US" sz="3100" b="1" dirty="0">
                 <a:solidFill>
                   <a:srgbClr val="FFC709"/>
                 </a:solidFill>
-                <a:latin typeface="Arial" pitchFamily="34" charset="0"/>
-                <a:ea typeface="Arial" pitchFamily="34" charset="-122"/>
-                <a:cs typeface="Arial" pitchFamily="34" charset="-120"/>
+                <a:latin typeface="Roboto Slab" pitchFamily="34" charset="0"/>
+                <a:ea typeface="Roboto Slab" pitchFamily="34" charset="-122"/>
+                <a:cs typeface="Roboto Slab" pitchFamily="34" charset="-120"/>
               </a:rPr>
               <a:t>R$ 200.000</a:t>
             </a:r>
-            <a:endParaRPr lang="en-US" sz="3400" dirty="0"/>
+            <a:endParaRPr lang="en-US" sz="3100" dirty="0"/>
           </a:p>
         </p:txBody>
       </p:sp>
@@ -4245,9 +4337,9 @@
                 <a:solidFill>
                   <a:srgbClr val="FFFFFF"/>
                 </a:solidFill>
-                <a:latin typeface="Arial" pitchFamily="34" charset="0"/>
-                <a:ea typeface="Arial" pitchFamily="34" charset="-122"/>
-                <a:cs typeface="Arial" pitchFamily="34" charset="-120"/>
+                <a:latin typeface="Roboto" pitchFamily="34" charset="0"/>
+                <a:ea typeface="Roboto" pitchFamily="34" charset="-122"/>
+                <a:cs typeface="Roboto" pitchFamily="34" charset="-120"/>
               </a:rPr>
               <a:t>parados em conta corrente</a:t>
             </a:r>
@@ -4287,9 +4379,9 @@
                 <a:solidFill>
                   <a:srgbClr val="A5A5A5"/>
                 </a:solidFill>
-                <a:latin typeface="Arial" pitchFamily="34" charset="0"/>
-                <a:ea typeface="Arial" pitchFamily="34" charset="-122"/>
-                <a:cs typeface="Arial" pitchFamily="34" charset="-120"/>
+                <a:latin typeface="Roboto" pitchFamily="34" charset="0"/>
+                <a:ea typeface="Roboto" pitchFamily="34" charset="-122"/>
+                <a:cs typeface="Roboto" pitchFamily="34" charset="-120"/>
               </a:rPr>
               <a:t>Rendimento zero. Metade do seu patrimônio perde poder de compra todos os dias, enquanto a outra metade assume sozinha todo o risco.</a:t>
             </a:r>
@@ -4314,7 +4406,7 @@
           <a:noFill/>
           <a:ln w="9525">
             <a:solidFill>
-              <a:srgbClr val="2B2B2B"/>
+              <a:srgbClr val="2E2E2E"/>
             </a:solidFill>
             <a:prstDash val="solid"/>
           </a:ln>
@@ -4345,17 +4437,17 @@
               <a:buNone/>
             </a:pPr>
             <a:r>
-              <a:rPr lang="en-US" sz="3400" b="1" dirty="0">
+              <a:rPr lang="en-US" sz="3100" b="1" dirty="0">
                 <a:solidFill>
                   <a:srgbClr val="FFC709"/>
                 </a:solidFill>
-                <a:latin typeface="Arial" pitchFamily="34" charset="0"/>
-                <a:ea typeface="Arial" pitchFamily="34" charset="-122"/>
-                <a:cs typeface="Arial" pitchFamily="34" charset="-120"/>
+                <a:latin typeface="Roboto Slab" pitchFamily="34" charset="0"/>
+                <a:ea typeface="Roboto Slab" pitchFamily="34" charset="-122"/>
+                <a:cs typeface="Roboto Slab" pitchFamily="34" charset="-120"/>
               </a:rPr>
               <a:t>R$ 100.000</a:t>
             </a:r>
-            <a:endParaRPr lang="en-US" sz="3400" dirty="0"/>
+            <a:endParaRPr lang="en-US" sz="3100" dirty="0"/>
           </a:p>
         </p:txBody>
       </p:sp>
@@ -4388,9 +4480,9 @@
                 <a:solidFill>
                   <a:srgbClr val="FFFFFF"/>
                 </a:solidFill>
-                <a:latin typeface="Arial" pitchFamily="34" charset="0"/>
-                <a:ea typeface="Arial" pitchFamily="34" charset="-122"/>
-                <a:cs typeface="Arial" pitchFamily="34" charset="-120"/>
+                <a:latin typeface="Roboto" pitchFamily="34" charset="0"/>
+                <a:ea typeface="Roboto" pitchFamily="34" charset="-122"/>
+                <a:cs typeface="Roboto" pitchFamily="34" charset="-120"/>
               </a:rPr>
               <a:t>em ações, 25% do patrimônio total</a:t>
             </a:r>
@@ -4430,9 +4522,9 @@
                 <a:solidFill>
                   <a:srgbClr val="A5A5A5"/>
                 </a:solidFill>
-                <a:latin typeface="Arial" pitchFamily="34" charset="0"/>
-                <a:ea typeface="Arial" pitchFamily="34" charset="-122"/>
-                <a:cs typeface="Arial" pitchFamily="34" charset="-120"/>
+                <a:latin typeface="Roboto" pitchFamily="34" charset="0"/>
+                <a:ea typeface="Roboto" pitchFamily="34" charset="-122"/>
+                <a:cs typeface="Roboto" pitchFamily="34" charset="-120"/>
               </a:rPr>
               <a:t>Exposição direta à bolsa acima do que um perfil moderado sustenta com conforto, ainda mais sem tempo para acompanhar o mercado.</a:t>
             </a:r>
@@ -4457,7 +4549,7 @@
           <a:noFill/>
           <a:ln w="9525">
             <a:solidFill>
-              <a:srgbClr val="2B2B2B"/>
+              <a:srgbClr val="2E2E2E"/>
             </a:solidFill>
             <a:prstDash val="solid"/>
           </a:ln>
@@ -4492,9 +4584,9 @@
                 <a:solidFill>
                   <a:srgbClr val="FFC709"/>
                 </a:solidFill>
-                <a:latin typeface="Arial" pitchFamily="34" charset="0"/>
-                <a:ea typeface="Arial" pitchFamily="34" charset="-122"/>
-                <a:cs typeface="Arial" pitchFamily="34" charset="-120"/>
+                <a:latin typeface="Roboto" pitchFamily="34" charset="0"/>
+                <a:ea typeface="Roboto" pitchFamily="34" charset="-122"/>
+                <a:cs typeface="Roboto" pitchFamily="34" charset="-120"/>
               </a:rPr>
               <a:t>Suas dores, nas suas palavras</a:t>
             </a:r>
@@ -4531,9 +4623,9 @@
                 <a:solidFill>
                   <a:srgbClr val="FFFFFF"/>
                 </a:solidFill>
-                <a:latin typeface="Arial" pitchFamily="34" charset="0"/>
-                <a:ea typeface="Arial" pitchFamily="34" charset="-122"/>
-                <a:cs typeface="Arial" pitchFamily="34" charset="-120"/>
+                <a:latin typeface="Roboto" pitchFamily="34" charset="0"/>
+                <a:ea typeface="Roboto" pitchFamily="34" charset="-122"/>
+                <a:cs typeface="Roboto" pitchFamily="34" charset="-120"/>
               </a:rPr>
               <a:t>“Carteira sem plano definido”      “A oscilação incomoda”      “Sempre reclamando das taxas”</a:t>
             </a:r>
@@ -4558,7 +4650,7 @@
           <a:noFill/>
           <a:ln w="9525">
             <a:solidFill>
-              <a:srgbClr val="2B2B2B"/>
+              <a:srgbClr val="2E2E2E"/>
             </a:solidFill>
             <a:prstDash val="solid"/>
           </a:ln>
@@ -4591,11 +4683,11 @@
             <a:r>
               <a:rPr lang="en-US" sz="900" dirty="0">
                 <a:solidFill>
-                  <a:srgbClr val="6E6E6E"/>
-                </a:solidFill>
-                <a:latin typeface="Arial" pitchFamily="34" charset="0"/>
-                <a:ea typeface="Arial" pitchFamily="34" charset="-122"/>
-                <a:cs typeface="Arial" pitchFamily="34" charset="-120"/>
+                  <a:srgbClr val="757575"/>
+                </a:solidFill>
+                <a:latin typeface="Roboto" pitchFamily="34" charset="0"/>
+                <a:ea typeface="Roboto" pitchFamily="34" charset="-122"/>
+                <a:cs typeface="Roboto" pitchFamily="34" charset="-120"/>
               </a:rPr>
               <a:t>XP Investimentos  ·  Planejamento Patrimonial</a:t>
             </a:r>
@@ -4611,8 +4703,8 @@
         </p:nvSpPr>
         <p:spPr>
           <a:xfrm>
-            <a:off x="10607040" y="6473952"/>
-            <a:ext cx="914400" cy="219456"/>
+            <a:off x="10149840" y="6473952"/>
+            <a:ext cx="1005840" cy="219456"/>
           </a:xfrm>
           <a:prstGeom prst="rect">
             <a:avLst/>
@@ -4630,17 +4722,63 @@
             <a:r>
               <a:rPr lang="en-US" sz="900" dirty="0">
                 <a:solidFill>
-                  <a:srgbClr val="6E6E6E"/>
-                </a:solidFill>
-                <a:latin typeface="Arial" pitchFamily="34" charset="0"/>
-                <a:ea typeface="Arial" pitchFamily="34" charset="-122"/>
-                <a:cs typeface="Arial" pitchFamily="34" charset="-120"/>
+                  <a:srgbClr val="757575"/>
+                </a:solidFill>
+                <a:latin typeface="Roboto" pitchFamily="34" charset="0"/>
+                <a:ea typeface="Roboto" pitchFamily="34" charset="-122"/>
+                <a:cs typeface="Roboto" pitchFamily="34" charset="-120"/>
               </a:rPr>
               <a:t>02</a:t>
             </a:r>
             <a:endParaRPr lang="en-US" sz="900" dirty="0"/>
           </a:p>
         </p:txBody>
+      </p:sp>
+      <p:sp>
+        <p:nvSpPr>
+          <p:cNvPr id="34" name="Shape 32"/>
+          <p:cNvSpPr/>
+          <p:nvPr/>
+        </p:nvSpPr>
+        <p:spPr>
+          <a:xfrm>
+            <a:off x="11365992" y="6510528"/>
+            <a:ext cx="155448" cy="155448"/>
+          </a:xfrm>
+          <a:prstGeom prst="line">
+            <a:avLst/>
+          </a:prstGeom>
+          <a:noFill/>
+          <a:ln w="9525">
+            <a:solidFill>
+              <a:srgbClr val="FFC709"/>
+            </a:solidFill>
+            <a:prstDash val="solid"/>
+          </a:ln>
+        </p:spPr>
+      </p:sp>
+      <p:sp>
+        <p:nvSpPr>
+          <p:cNvPr id="35" name="Shape 33"/>
+          <p:cNvSpPr/>
+          <p:nvPr/>
+        </p:nvSpPr>
+        <p:spPr>
+          <a:xfrm flipH="1">
+            <a:off x="11365992" y="6510528"/>
+            <a:ext cx="155448" cy="155448"/>
+          </a:xfrm>
+          <a:prstGeom prst="line">
+            <a:avLst/>
+          </a:prstGeom>
+          <a:noFill/>
+          <a:ln w="9525">
+            <a:solidFill>
+              <a:srgbClr val="FFC709"/>
+            </a:solidFill>
+            <a:prstDash val="solid"/>
+          </a:ln>
+        </p:spPr>
       </p:sp>
     </p:spTree>
   </p:cSld>
@@ -4656,7 +4794,7 @@
     <p:bg>
       <p:bgPr>
         <a:solidFill>
-          <a:srgbClr val="000000"/>
+          <a:srgbClr val="0D0D0D"/>
         </a:solidFill>
       </p:bgPr>
     </p:bg>
@@ -4699,17 +4837,17 @@
               <a:buNone/>
             </a:pPr>
             <a:r>
-              <a:rPr lang="en-US" sz="1200" b="1" dirty="0">
+              <a:rPr lang="en-US" sz="1150" b="1" dirty="0">
                 <a:solidFill>
                   <a:srgbClr val="FFC709"/>
                 </a:solidFill>
-                <a:latin typeface="Arial" pitchFamily="34" charset="0"/>
-                <a:ea typeface="Arial" pitchFamily="34" charset="-122"/>
-                <a:cs typeface="Arial" pitchFamily="34" charset="-120"/>
+                <a:latin typeface="Roboto" pitchFamily="34" charset="0"/>
+                <a:ea typeface="Roboto" pitchFamily="34" charset="-122"/>
+                <a:cs typeface="Roboto" pitchFamily="34" charset="-120"/>
               </a:rPr>
               <a:t>Reconquista</a:t>
             </a:r>
-            <a:endParaRPr lang="en-US" sz="1200" dirty="0"/>
+            <a:endParaRPr lang="en-US" sz="1150" dirty="0"/>
           </a:p>
         </p:txBody>
       </p:sp>
@@ -4738,17 +4876,17 @@
               <a:buNone/>
             </a:pPr>
             <a:r>
-              <a:rPr lang="en-US" sz="3400" b="1" dirty="0">
+              <a:rPr lang="en-US" sz="3000" b="1" dirty="0">
                 <a:solidFill>
                   <a:srgbClr val="FFFFFF"/>
                 </a:solidFill>
-                <a:latin typeface="Arial" pitchFamily="34" charset="0"/>
-                <a:ea typeface="Arial" pitchFamily="34" charset="-122"/>
-                <a:cs typeface="Arial" pitchFamily="34" charset="-120"/>
+                <a:latin typeface="Roboto Slab" pitchFamily="34" charset="0"/>
+                <a:ea typeface="Roboto Slab" pitchFamily="34" charset="-122"/>
+                <a:cs typeface="Roboto Slab" pitchFamily="34" charset="-120"/>
               </a:rPr>
               <a:t>Você já foi assessorado pela XP</a:t>
             </a:r>
-            <a:endParaRPr lang="en-US" sz="3400" dirty="0"/>
+            <a:endParaRPr lang="en-US" sz="3000" dirty="0"/>
           </a:p>
         </p:txBody>
       </p:sp>
@@ -4781,9 +4919,9 @@
                 <a:solidFill>
                   <a:srgbClr val="A5A5A5"/>
                 </a:solidFill>
-                <a:latin typeface="Arial" pitchFamily="34" charset="0"/>
-                <a:ea typeface="Arial" pitchFamily="34" charset="-122"/>
-                <a:cs typeface="Arial" pitchFamily="34" charset="-120"/>
+                <a:latin typeface="Roboto" pitchFamily="34" charset="0"/>
+                <a:ea typeface="Roboto" pitchFamily="34" charset="-122"/>
+                <a:cs typeface="Roboto" pitchFamily="34" charset="-120"/>
               </a:rPr>
               <a:t>O que muda desta vez. Antes de falar de produto, precisamos falar do que não funcionou.</a:t>
             </a:r>
@@ -4818,11 +4956,11 @@
             <a:r>
               <a:rPr lang="en-US" sz="1150" b="1" dirty="0">
                 <a:solidFill>
-                  <a:srgbClr val="6E6E6E"/>
-                </a:solidFill>
-                <a:latin typeface="Arial" pitchFamily="34" charset="0"/>
-                <a:ea typeface="Arial" pitchFamily="34" charset="-122"/>
-                <a:cs typeface="Arial" pitchFamily="34" charset="-120"/>
+                  <a:srgbClr val="757575"/>
+                </a:solidFill>
+                <a:latin typeface="Roboto" pitchFamily="34" charset="0"/>
+                <a:ea typeface="Roboto" pitchFamily="34" charset="-122"/>
+                <a:cs typeface="Roboto" pitchFamily="34" charset="-120"/>
               </a:rPr>
               <a:t>O que provavelmente faltou</a:t>
             </a:r>
@@ -4859,9 +4997,9 @@
                 <a:solidFill>
                   <a:srgbClr val="FFC709"/>
                 </a:solidFill>
-                <a:latin typeface="Arial" pitchFamily="34" charset="0"/>
-                <a:ea typeface="Arial" pitchFamily="34" charset="-122"/>
-                <a:cs typeface="Arial" pitchFamily="34" charset="-120"/>
+                <a:latin typeface="Roboto" pitchFamily="34" charset="0"/>
+                <a:ea typeface="Roboto" pitchFamily="34" charset="-122"/>
+                <a:cs typeface="Roboto" pitchFamily="34" charset="-120"/>
               </a:rPr>
               <a:t>O nosso compromisso</a:t>
             </a:r>
@@ -4921,9 +5059,9 @@
                 <a:solidFill>
                   <a:srgbClr val="A5A5A5"/>
                 </a:solidFill>
-                <a:latin typeface="Arial" pitchFamily="34" charset="0"/>
-                <a:ea typeface="Arial" pitchFamily="34" charset="-122"/>
-                <a:cs typeface="Arial" pitchFamily="34" charset="-120"/>
+                <a:latin typeface="Roboto" pitchFamily="34" charset="0"/>
+                <a:ea typeface="Roboto" pitchFamily="34" charset="-122"/>
+                <a:cs typeface="Roboto" pitchFamily="34" charset="-120"/>
               </a:rPr>
               <a:t>Carteira montada sem tese e sem objetivo nomeado</a:t>
             </a:r>
@@ -4960,9 +5098,9 @@
                 <a:solidFill>
                   <a:srgbClr val="FFFFFF"/>
                 </a:solidFill>
-                <a:latin typeface="Arial" pitchFamily="34" charset="0"/>
-                <a:ea typeface="Arial" pitchFamily="34" charset="-122"/>
-                <a:cs typeface="Arial" pitchFamily="34" charset="-120"/>
+                <a:latin typeface="Roboto" pitchFamily="34" charset="0"/>
+                <a:ea typeface="Roboto" pitchFamily="34" charset="-122"/>
+                <a:cs typeface="Roboto" pitchFamily="34" charset="-120"/>
               </a:rPr>
               <a:t>Cada real com finalidade e prazo declarados</a:t>
             </a:r>
@@ -4987,7 +5125,7 @@
           <a:noFill/>
           <a:ln w="9525">
             <a:solidFill>
-              <a:srgbClr val="2B2B2B"/>
+              <a:srgbClr val="2E2E2E"/>
             </a:solidFill>
             <a:prstDash val="solid"/>
           </a:ln>
@@ -5022,9 +5160,9 @@
                 <a:solidFill>
                   <a:srgbClr val="A5A5A5"/>
                 </a:solidFill>
-                <a:latin typeface="Arial" pitchFamily="34" charset="0"/>
-                <a:ea typeface="Arial" pitchFamily="34" charset="-122"/>
-                <a:cs typeface="Arial" pitchFamily="34" charset="-120"/>
+                <a:latin typeface="Roboto" pitchFamily="34" charset="0"/>
+                <a:ea typeface="Roboto" pitchFamily="34" charset="-122"/>
+                <a:cs typeface="Roboto" pitchFamily="34" charset="-120"/>
               </a:rPr>
               <a:t>Produto oferecido sem o custo total na mesa</a:t>
             </a:r>
@@ -5061,9 +5199,9 @@
                 <a:solidFill>
                   <a:srgbClr val="FFFFFF"/>
                 </a:solidFill>
-                <a:latin typeface="Arial" pitchFamily="34" charset="0"/>
-                <a:ea typeface="Arial" pitchFamily="34" charset="-122"/>
-                <a:cs typeface="Arial" pitchFamily="34" charset="-120"/>
+                <a:latin typeface="Roboto" pitchFamily="34" charset="0"/>
+                <a:ea typeface="Roboto" pitchFamily="34" charset="-122"/>
+                <a:cs typeface="Roboto" pitchFamily="34" charset="-120"/>
               </a:rPr>
               <a:t>Custo total apresentado antes de cada alocação</a:t>
             </a:r>
@@ -5088,7 +5226,7 @@
           <a:noFill/>
           <a:ln w="9525">
             <a:solidFill>
-              <a:srgbClr val="2B2B2B"/>
+              <a:srgbClr val="2E2E2E"/>
             </a:solidFill>
             <a:prstDash val="solid"/>
           </a:ln>
@@ -5123,9 +5261,9 @@
                 <a:solidFill>
                   <a:srgbClr val="A5A5A5"/>
                 </a:solidFill>
-                <a:latin typeface="Arial" pitchFamily="34" charset="0"/>
-                <a:ea typeface="Arial" pitchFamily="34" charset="-122"/>
-                <a:cs typeface="Arial" pitchFamily="34" charset="-120"/>
+                <a:latin typeface="Roboto" pitchFamily="34" charset="0"/>
+                <a:ea typeface="Roboto" pitchFamily="34" charset="-122"/>
+                <a:cs typeface="Roboto" pitchFamily="34" charset="-120"/>
               </a:rPr>
               <a:t>Contato apenas quando havia algo para vender</a:t>
             </a:r>
@@ -5162,9 +5300,9 @@
                 <a:solidFill>
                   <a:srgbClr val="FFFFFF"/>
                 </a:solidFill>
-                <a:latin typeface="Arial" pitchFamily="34" charset="0"/>
-                <a:ea typeface="Arial" pitchFamily="34" charset="-122"/>
-                <a:cs typeface="Arial" pitchFamily="34" charset="-120"/>
+                <a:latin typeface="Roboto" pitchFamily="34" charset="0"/>
+                <a:ea typeface="Roboto" pitchFamily="34" charset="-122"/>
+                <a:cs typeface="Roboto" pitchFamily="34" charset="-120"/>
               </a:rPr>
               <a:t>Agenda fixa: relatório trimestral e duas reuniões por ano</a:t>
             </a:r>
@@ -5189,7 +5327,7 @@
           <a:noFill/>
           <a:ln w="9525">
             <a:solidFill>
-              <a:srgbClr val="2B2B2B"/>
+              <a:srgbClr val="2E2E2E"/>
             </a:solidFill>
             <a:prstDash val="solid"/>
           </a:ln>
@@ -5224,9 +5362,9 @@
                 <a:solidFill>
                   <a:srgbClr val="A5A5A5"/>
                 </a:solidFill>
-                <a:latin typeface="Arial" pitchFamily="34" charset="0"/>
-                <a:ea typeface="Arial" pitchFamily="34" charset="-122"/>
-                <a:cs typeface="Arial" pitchFamily="34" charset="-120"/>
+                <a:latin typeface="Roboto" pitchFamily="34" charset="0"/>
+                <a:ea typeface="Roboto" pitchFamily="34" charset="-122"/>
+                <a:cs typeface="Roboto" pitchFamily="34" charset="-120"/>
               </a:rPr>
               <a:t>Volatilidade sem contexto, gerando ansiedade</a:t>
             </a:r>
@@ -5263,9 +5401,9 @@
                 <a:solidFill>
                   <a:srgbClr val="FFFFFF"/>
                 </a:solidFill>
-                <a:latin typeface="Arial" pitchFamily="34" charset="0"/>
-                <a:ea typeface="Arial" pitchFamily="34" charset="-122"/>
-                <a:cs typeface="Arial" pitchFamily="34" charset="-120"/>
+                <a:latin typeface="Roboto" pitchFamily="34" charset="0"/>
+                <a:ea typeface="Roboto" pitchFamily="34" charset="-122"/>
+                <a:cs typeface="Roboto" pitchFamily="34" charset="-120"/>
               </a:rPr>
               <a:t>Risco dimensionado por caixa, não pela carteira inteira</a:t>
             </a:r>
@@ -5290,7 +5428,7 @@
           <a:noFill/>
           <a:ln w="9525">
             <a:solidFill>
-              <a:srgbClr val="2B2B2B"/>
+              <a:srgbClr val="2E2E2E"/>
             </a:solidFill>
             <a:prstDash val="solid"/>
           </a:ln>
@@ -5325,9 +5463,9 @@
                 <a:solidFill>
                   <a:srgbClr val="FFC709"/>
                 </a:solidFill>
-                <a:latin typeface="Arial" pitchFamily="34" charset="0"/>
-                <a:ea typeface="Arial" pitchFamily="34" charset="-122"/>
-                <a:cs typeface="Arial" pitchFamily="34" charset="-120"/>
+                <a:latin typeface="Roboto" pitchFamily="34" charset="0"/>
+                <a:ea typeface="Roboto" pitchFamily="34" charset="-122"/>
+                <a:cs typeface="Roboto" pitchFamily="34" charset="-120"/>
               </a:rPr>
               <a:t>Corrigir isso exige método, não uma prateleira diferente. É o método que estamos trazendo hoje.</a:t>
             </a:r>
@@ -5352,7 +5490,7 @@
           <a:noFill/>
           <a:ln w="9525">
             <a:solidFill>
-              <a:srgbClr val="2B2B2B"/>
+              <a:srgbClr val="2E2E2E"/>
             </a:solidFill>
             <a:prstDash val="solid"/>
           </a:ln>
@@ -5385,11 +5523,11 @@
             <a:r>
               <a:rPr lang="en-US" sz="900" dirty="0">
                 <a:solidFill>
-                  <a:srgbClr val="6E6E6E"/>
-                </a:solidFill>
-                <a:latin typeface="Arial" pitchFamily="34" charset="0"/>
-                <a:ea typeface="Arial" pitchFamily="34" charset="-122"/>
-                <a:cs typeface="Arial" pitchFamily="34" charset="-120"/>
+                  <a:srgbClr val="757575"/>
+                </a:solidFill>
+                <a:latin typeface="Roboto" pitchFamily="34" charset="0"/>
+                <a:ea typeface="Roboto" pitchFamily="34" charset="-122"/>
+                <a:cs typeface="Roboto" pitchFamily="34" charset="-120"/>
               </a:rPr>
               <a:t>XP Investimentos  ·  Planejamento Patrimonial</a:t>
             </a:r>
@@ -5405,8 +5543,8 @@
         </p:nvSpPr>
         <p:spPr>
           <a:xfrm>
-            <a:off x="10607040" y="6473952"/>
-            <a:ext cx="914400" cy="219456"/>
+            <a:off x="10149840" y="6473952"/>
+            <a:ext cx="1005840" cy="219456"/>
           </a:xfrm>
           <a:prstGeom prst="rect">
             <a:avLst/>
@@ -5424,17 +5562,63 @@
             <a:r>
               <a:rPr lang="en-US" sz="900" dirty="0">
                 <a:solidFill>
-                  <a:srgbClr val="6E6E6E"/>
-                </a:solidFill>
-                <a:latin typeface="Arial" pitchFamily="34" charset="0"/>
-                <a:ea typeface="Arial" pitchFamily="34" charset="-122"/>
-                <a:cs typeface="Arial" pitchFamily="34" charset="-120"/>
+                  <a:srgbClr val="757575"/>
+                </a:solidFill>
+                <a:latin typeface="Roboto" pitchFamily="34" charset="0"/>
+                <a:ea typeface="Roboto" pitchFamily="34" charset="-122"/>
+                <a:cs typeface="Roboto" pitchFamily="34" charset="-120"/>
               </a:rPr>
               <a:t>03</a:t>
             </a:r>
             <a:endParaRPr lang="en-US" sz="900" dirty="0"/>
           </a:p>
         </p:txBody>
+      </p:sp>
+      <p:sp>
+        <p:nvSpPr>
+          <p:cNvPr id="24" name="Shape 22"/>
+          <p:cNvSpPr/>
+          <p:nvPr/>
+        </p:nvSpPr>
+        <p:spPr>
+          <a:xfrm>
+            <a:off x="11365992" y="6510528"/>
+            <a:ext cx="155448" cy="155448"/>
+          </a:xfrm>
+          <a:prstGeom prst="line">
+            <a:avLst/>
+          </a:prstGeom>
+          <a:noFill/>
+          <a:ln w="9525">
+            <a:solidFill>
+              <a:srgbClr val="FFC709"/>
+            </a:solidFill>
+            <a:prstDash val="solid"/>
+          </a:ln>
+        </p:spPr>
+      </p:sp>
+      <p:sp>
+        <p:nvSpPr>
+          <p:cNvPr id="25" name="Shape 23"/>
+          <p:cNvSpPr/>
+          <p:nvPr/>
+        </p:nvSpPr>
+        <p:spPr>
+          <a:xfrm flipH="1">
+            <a:off x="11365992" y="6510528"/>
+            <a:ext cx="155448" cy="155448"/>
+          </a:xfrm>
+          <a:prstGeom prst="line">
+            <a:avLst/>
+          </a:prstGeom>
+          <a:noFill/>
+          <a:ln w="9525">
+            <a:solidFill>
+              <a:srgbClr val="FFC709"/>
+            </a:solidFill>
+            <a:prstDash val="solid"/>
+          </a:ln>
+        </p:spPr>
       </p:sp>
     </p:spTree>
   </p:cSld>
@@ -5450,7 +5634,7 @@
     <p:bg>
       <p:bgPr>
         <a:solidFill>
-          <a:srgbClr val="000000"/>
+          <a:srgbClr val="0D0D0D"/>
         </a:solidFill>
       </p:bgPr>
     </p:bg>
@@ -5493,17 +5677,17 @@
               <a:buNone/>
             </a:pPr>
             <a:r>
-              <a:rPr lang="en-US" sz="1200" b="1" dirty="0">
+              <a:rPr lang="en-US" sz="1150" b="1" dirty="0">
                 <a:solidFill>
                   <a:srgbClr val="FFC709"/>
                 </a:solidFill>
-                <a:latin typeface="Arial" pitchFamily="34" charset="0"/>
-                <a:ea typeface="Arial" pitchFamily="34" charset="-122"/>
-                <a:cs typeface="Arial" pitchFamily="34" charset="-120"/>
+                <a:latin typeface="Roboto" pitchFamily="34" charset="0"/>
+                <a:ea typeface="Roboto" pitchFamily="34" charset="-122"/>
+                <a:cs typeface="Roboto" pitchFamily="34" charset="-120"/>
               </a:rPr>
               <a:t>Metodologia</a:t>
             </a:r>
-            <a:endParaRPr lang="en-US" sz="1200" dirty="0"/>
+            <a:endParaRPr lang="en-US" sz="1150" dirty="0"/>
           </a:p>
         </p:txBody>
       </p:sp>
@@ -5532,17 +5716,17 @@
               <a:buNone/>
             </a:pPr>
             <a:r>
-              <a:rPr lang="en-US" sz="3000" b="1" dirty="0">
+              <a:rPr lang="en-US" sz="2600" b="1" dirty="0">
                 <a:solidFill>
                   <a:srgbClr val="FFFFFF"/>
                 </a:solidFill>
-                <a:latin typeface="Arial" pitchFamily="34" charset="0"/>
-                <a:ea typeface="Arial" pitchFamily="34" charset="-122"/>
-                <a:cs typeface="Arial" pitchFamily="34" charset="-120"/>
+                <a:latin typeface="Roboto Slab" pitchFamily="34" charset="0"/>
+                <a:ea typeface="Roboto Slab" pitchFamily="34" charset="-122"/>
+                <a:cs typeface="Roboto Slab" pitchFamily="34" charset="-120"/>
               </a:rPr>
               <a:t>Seu patrimônio dividido por objetivo, não por produto</a:t>
             </a:r>
-            <a:endParaRPr lang="en-US" sz="3000" dirty="0"/>
+            <a:endParaRPr lang="en-US" sz="2600" dirty="0"/>
           </a:p>
         </p:txBody>
       </p:sp>
@@ -5575,9 +5759,9 @@
                 <a:solidFill>
                   <a:srgbClr val="A5A5A5"/>
                 </a:solidFill>
-                <a:latin typeface="Arial" pitchFamily="34" charset="0"/>
-                <a:ea typeface="Arial" pitchFamily="34" charset="-122"/>
-                <a:cs typeface="Arial" pitchFamily="34" charset="-120"/>
+                <a:latin typeface="Roboto" pitchFamily="34" charset="0"/>
+                <a:ea typeface="Roboto" pitchFamily="34" charset="-122"/>
+                <a:cs typeface="Roboto" pitchFamily="34" charset="-120"/>
               </a:rPr>
               <a:t>Três caixas independentes, cada uma com prazo, risco e função próprios.</a:t>
             </a:r>
@@ -5637,9 +5821,9 @@
                 <a:solidFill>
                   <a:srgbClr val="FFC709"/>
                 </a:solidFill>
-                <a:latin typeface="Arial" pitchFamily="34" charset="0"/>
-                <a:ea typeface="Arial" pitchFamily="34" charset="-122"/>
-                <a:cs typeface="Arial" pitchFamily="34" charset="-120"/>
+                <a:latin typeface="Roboto" pitchFamily="34" charset="0"/>
+                <a:ea typeface="Roboto" pitchFamily="34" charset="-122"/>
+                <a:cs typeface="Roboto" pitchFamily="34" charset="-120"/>
               </a:rPr>
               <a:t>01</a:t>
             </a:r>
@@ -5676,9 +5860,9 @@
                 <a:solidFill>
                   <a:srgbClr val="FFFFFF"/>
                 </a:solidFill>
-                <a:latin typeface="Arial" pitchFamily="34" charset="0"/>
-                <a:ea typeface="Arial" pitchFamily="34" charset="-122"/>
-                <a:cs typeface="Arial" pitchFamily="34" charset="-120"/>
+                <a:latin typeface="Roboto" pitchFamily="34" charset="0"/>
+                <a:ea typeface="Roboto" pitchFamily="34" charset="-122"/>
+                <a:cs typeface="Roboto" pitchFamily="34" charset="-120"/>
               </a:rPr>
               <a:t>Liquidez</a:t>
             </a:r>
@@ -5711,17 +5895,17 @@
               <a:buNone/>
             </a:pPr>
             <a:r>
-              <a:rPr lang="en-US" sz="3300" b="1" dirty="0">
+              <a:rPr lang="en-US" sz="2900" b="1" dirty="0">
                 <a:solidFill>
                   <a:srgbClr val="FFFFFF"/>
                 </a:solidFill>
-                <a:latin typeface="Arial" pitchFamily="34" charset="0"/>
-                <a:ea typeface="Arial" pitchFamily="34" charset="-122"/>
-                <a:cs typeface="Arial" pitchFamily="34" charset="-120"/>
+                <a:latin typeface="Roboto Slab" pitchFamily="34" charset="0"/>
+                <a:ea typeface="Roboto Slab" pitchFamily="34" charset="-122"/>
+                <a:cs typeface="Roboto Slab" pitchFamily="34" charset="-120"/>
               </a:rPr>
               <a:t>R$ 60.000</a:t>
             </a:r>
-            <a:endParaRPr lang="en-US" sz="3300" dirty="0"/>
+            <a:endParaRPr lang="en-US" sz="2900" dirty="0"/>
           </a:p>
         </p:txBody>
       </p:sp>
@@ -5754,9 +5938,9 @@
                 <a:solidFill>
                   <a:srgbClr val="FFC709"/>
                 </a:solidFill>
-                <a:latin typeface="Arial" pitchFamily="34" charset="0"/>
-                <a:ea typeface="Arial" pitchFamily="34" charset="-122"/>
-                <a:cs typeface="Arial" pitchFamily="34" charset="-120"/>
+                <a:latin typeface="Roboto" pitchFamily="34" charset="0"/>
+                <a:ea typeface="Roboto" pitchFamily="34" charset="-122"/>
+                <a:cs typeface="Roboto" pitchFamily="34" charset="-120"/>
               </a:rPr>
               <a:t>15% do patrimônio</a:t>
             </a:r>
@@ -5781,7 +5965,7 @@
           <a:noFill/>
           <a:ln w="9525">
             <a:solidFill>
-              <a:srgbClr val="2B2B2B"/>
+              <a:srgbClr val="2E2E2E"/>
             </a:solidFill>
             <a:prstDash val="solid"/>
           </a:ln>
@@ -5816,9 +6000,9 @@
                 <a:solidFill>
                   <a:srgbClr val="FFFFFF"/>
                 </a:solidFill>
-                <a:latin typeface="Arial" pitchFamily="34" charset="0"/>
-                <a:ea typeface="Arial" pitchFamily="34" charset="-122"/>
-                <a:cs typeface="Arial" pitchFamily="34" charset="-120"/>
+                <a:latin typeface="Roboto" pitchFamily="34" charset="0"/>
+                <a:ea typeface="Roboto" pitchFamily="34" charset="-122"/>
+                <a:cs typeface="Roboto" pitchFamily="34" charset="-120"/>
               </a:rPr>
               <a:t>Curto prazo</a:t>
             </a:r>
@@ -5858,9 +6042,9 @@
                 <a:solidFill>
                   <a:srgbClr val="A5A5A5"/>
                 </a:solidFill>
-                <a:latin typeface="Arial" pitchFamily="34" charset="0"/>
-                <a:ea typeface="Arial" pitchFamily="34" charset="-122"/>
-                <a:cs typeface="Arial" pitchFamily="34" charset="-120"/>
+                <a:latin typeface="Roboto" pitchFamily="34" charset="0"/>
+                <a:ea typeface="Roboto" pitchFamily="34" charset="-122"/>
+                <a:cs typeface="Roboto" pitchFamily="34" charset="-120"/>
               </a:rPr>
               <a:t>Reserva de emergência com resgate no mesmo dia e volatilidade zero.</a:t>
             </a:r>
@@ -5897,9 +6081,9 @@
                 <a:solidFill>
                   <a:srgbClr val="FFC709"/>
                 </a:solidFill>
-                <a:latin typeface="Arial" pitchFamily="34" charset="0"/>
-                <a:ea typeface="Arial" pitchFamily="34" charset="-122"/>
-                <a:cs typeface="Arial" pitchFamily="34" charset="-120"/>
+                <a:latin typeface="Roboto" pitchFamily="34" charset="0"/>
+                <a:ea typeface="Roboto" pitchFamily="34" charset="-122"/>
+                <a:cs typeface="Roboto" pitchFamily="34" charset="-120"/>
               </a:rPr>
               <a:t>02</a:t>
             </a:r>
@@ -5936,9 +6120,9 @@
                 <a:solidFill>
                   <a:srgbClr val="FFFFFF"/>
                 </a:solidFill>
-                <a:latin typeface="Arial" pitchFamily="34" charset="0"/>
-                <a:ea typeface="Arial" pitchFamily="34" charset="-122"/>
-                <a:cs typeface="Arial" pitchFamily="34" charset="-120"/>
+                <a:latin typeface="Roboto" pitchFamily="34" charset="0"/>
+                <a:ea typeface="Roboto" pitchFamily="34" charset="-122"/>
+                <a:cs typeface="Roboto" pitchFamily="34" charset="-120"/>
               </a:rPr>
               <a:t>Proteção e futuro</a:t>
             </a:r>
@@ -5971,17 +6155,17 @@
               <a:buNone/>
             </a:pPr>
             <a:r>
-              <a:rPr lang="en-US" sz="3300" b="1" dirty="0">
+              <a:rPr lang="en-US" sz="2900" b="1" dirty="0">
                 <a:solidFill>
                   <a:srgbClr val="FFFFFF"/>
                 </a:solidFill>
-                <a:latin typeface="Arial" pitchFamily="34" charset="0"/>
-                <a:ea typeface="Arial" pitchFamily="34" charset="-122"/>
-                <a:cs typeface="Arial" pitchFamily="34" charset="-120"/>
+                <a:latin typeface="Roboto Slab" pitchFamily="34" charset="0"/>
+                <a:ea typeface="Roboto Slab" pitchFamily="34" charset="-122"/>
+                <a:cs typeface="Roboto Slab" pitchFamily="34" charset="-120"/>
               </a:rPr>
               <a:t>R$ 140.000</a:t>
             </a:r>
-            <a:endParaRPr lang="en-US" sz="3300" dirty="0"/>
+            <a:endParaRPr lang="en-US" sz="2900" dirty="0"/>
           </a:p>
         </p:txBody>
       </p:sp>
@@ -6014,9 +6198,9 @@
                 <a:solidFill>
                   <a:srgbClr val="FFC709"/>
                 </a:solidFill>
-                <a:latin typeface="Arial" pitchFamily="34" charset="0"/>
-                <a:ea typeface="Arial" pitchFamily="34" charset="-122"/>
-                <a:cs typeface="Arial" pitchFamily="34" charset="-120"/>
+                <a:latin typeface="Roboto" pitchFamily="34" charset="0"/>
+                <a:ea typeface="Roboto" pitchFamily="34" charset="-122"/>
+                <a:cs typeface="Roboto" pitchFamily="34" charset="-120"/>
               </a:rPr>
               <a:t>35% do patrimônio</a:t>
             </a:r>
@@ -6041,7 +6225,7 @@
           <a:noFill/>
           <a:ln w="9525">
             <a:solidFill>
-              <a:srgbClr val="2B2B2B"/>
+              <a:srgbClr val="2E2E2E"/>
             </a:solidFill>
             <a:prstDash val="solid"/>
           </a:ln>
@@ -6076,9 +6260,9 @@
                 <a:solidFill>
                   <a:srgbClr val="FFFFFF"/>
                 </a:solidFill>
-                <a:latin typeface="Arial" pitchFamily="34" charset="0"/>
-                <a:ea typeface="Arial" pitchFamily="34" charset="-122"/>
-                <a:cs typeface="Arial" pitchFamily="34" charset="-120"/>
+                <a:latin typeface="Roboto" pitchFamily="34" charset="0"/>
+                <a:ea typeface="Roboto" pitchFamily="34" charset="-122"/>
+                <a:cs typeface="Roboto" pitchFamily="34" charset="-120"/>
               </a:rPr>
               <a:t>Médio e longo prazo</a:t>
             </a:r>
@@ -6118,9 +6302,9 @@
                 <a:solidFill>
                   <a:srgbClr val="A5A5A5"/>
                 </a:solidFill>
-                <a:latin typeface="Arial" pitchFamily="34" charset="0"/>
-                <a:ea typeface="Arial" pitchFamily="34" charset="-122"/>
-                <a:cs typeface="Arial" pitchFamily="34" charset="-120"/>
+                <a:latin typeface="Roboto" pitchFamily="34" charset="0"/>
+                <a:ea typeface="Roboto" pitchFamily="34" charset="-122"/>
+                <a:cs typeface="Roboto" pitchFamily="34" charset="-120"/>
               </a:rPr>
               <a:t>Educação da filha, eficiência fiscal e sucessão sem inventário.</a:t>
             </a:r>
@@ -6157,9 +6341,9 @@
                 <a:solidFill>
                   <a:srgbClr val="FFC709"/>
                 </a:solidFill>
-                <a:latin typeface="Arial" pitchFamily="34" charset="0"/>
-                <a:ea typeface="Arial" pitchFamily="34" charset="-122"/>
-                <a:cs typeface="Arial" pitchFamily="34" charset="-120"/>
+                <a:latin typeface="Roboto" pitchFamily="34" charset="0"/>
+                <a:ea typeface="Roboto" pitchFamily="34" charset="-122"/>
+                <a:cs typeface="Roboto" pitchFamily="34" charset="-120"/>
               </a:rPr>
               <a:t>03</a:t>
             </a:r>
@@ -6196,9 +6380,9 @@
                 <a:solidFill>
                   <a:srgbClr val="FFFFFF"/>
                 </a:solidFill>
-                <a:latin typeface="Arial" pitchFamily="34" charset="0"/>
-                <a:ea typeface="Arial" pitchFamily="34" charset="-122"/>
-                <a:cs typeface="Arial" pitchFamily="34" charset="-120"/>
+                <a:latin typeface="Roboto" pitchFamily="34" charset="0"/>
+                <a:ea typeface="Roboto" pitchFamily="34" charset="-122"/>
+                <a:cs typeface="Roboto" pitchFamily="34" charset="-120"/>
               </a:rPr>
               <a:t>Crescimento</a:t>
             </a:r>
@@ -6231,17 +6415,17 @@
               <a:buNone/>
             </a:pPr>
             <a:r>
-              <a:rPr lang="en-US" sz="3300" b="1" dirty="0">
+              <a:rPr lang="en-US" sz="2900" b="1" dirty="0">
                 <a:solidFill>
                   <a:srgbClr val="FFFFFF"/>
                 </a:solidFill>
-                <a:latin typeface="Arial" pitchFamily="34" charset="0"/>
-                <a:ea typeface="Arial" pitchFamily="34" charset="-122"/>
-                <a:cs typeface="Arial" pitchFamily="34" charset="-120"/>
+                <a:latin typeface="Roboto Slab" pitchFamily="34" charset="0"/>
+                <a:ea typeface="Roboto Slab" pitchFamily="34" charset="-122"/>
+                <a:cs typeface="Roboto Slab" pitchFamily="34" charset="-120"/>
               </a:rPr>
               <a:t>R$ 200.000</a:t>
             </a:r>
-            <a:endParaRPr lang="en-US" sz="3300" dirty="0"/>
+            <a:endParaRPr lang="en-US" sz="2900" dirty="0"/>
           </a:p>
         </p:txBody>
       </p:sp>
@@ -6274,9 +6458,9 @@
                 <a:solidFill>
                   <a:srgbClr val="FFC709"/>
                 </a:solidFill>
-                <a:latin typeface="Arial" pitchFamily="34" charset="0"/>
-                <a:ea typeface="Arial" pitchFamily="34" charset="-122"/>
-                <a:cs typeface="Arial" pitchFamily="34" charset="-120"/>
+                <a:latin typeface="Roboto" pitchFamily="34" charset="0"/>
+                <a:ea typeface="Roboto" pitchFamily="34" charset="-122"/>
+                <a:cs typeface="Roboto" pitchFamily="34" charset="-120"/>
               </a:rPr>
               <a:t>50% do patrimônio</a:t>
             </a:r>
@@ -6301,7 +6485,7 @@
           <a:noFill/>
           <a:ln w="9525">
             <a:solidFill>
-              <a:srgbClr val="2B2B2B"/>
+              <a:srgbClr val="2E2E2E"/>
             </a:solidFill>
             <a:prstDash val="solid"/>
           </a:ln>
@@ -6336,9 +6520,9 @@
                 <a:solidFill>
                   <a:srgbClr val="FFFFFF"/>
                 </a:solidFill>
-                <a:latin typeface="Arial" pitchFamily="34" charset="0"/>
-                <a:ea typeface="Arial" pitchFamily="34" charset="-122"/>
-                <a:cs typeface="Arial" pitchFamily="34" charset="-120"/>
+                <a:latin typeface="Roboto" pitchFamily="34" charset="0"/>
+                <a:ea typeface="Roboto" pitchFamily="34" charset="-122"/>
+                <a:cs typeface="Roboto" pitchFamily="34" charset="-120"/>
               </a:rPr>
               <a:t>Longo prazo</a:t>
             </a:r>
@@ -6378,9 +6562,9 @@
                 <a:solidFill>
                   <a:srgbClr val="A5A5A5"/>
                 </a:solidFill>
-                <a:latin typeface="Arial" pitchFamily="34" charset="0"/>
-                <a:ea typeface="Arial" pitchFamily="34" charset="-122"/>
-                <a:cs typeface="Arial" pitchFamily="34" charset="-120"/>
+                <a:latin typeface="Roboto" pitchFamily="34" charset="0"/>
+                <a:ea typeface="Roboto" pitchFamily="34" charset="-122"/>
+                <a:cs typeface="Roboto" pitchFamily="34" charset="-120"/>
               </a:rPr>
               <a:t>Rentabilidade real acima da inflação, com risco dimensionado.</a:t>
             </a:r>
@@ -6403,7 +6587,7 @@
             <a:avLst/>
           </a:prstGeom>
           <a:solidFill>
-            <a:srgbClr val="121212"/>
+            <a:srgbClr val="1A1A1A"/>
           </a:solidFill>
           <a:ln w="12700">
             <a:solidFill>
@@ -6445,9 +6629,9 @@
                 <a:solidFill>
                   <a:srgbClr val="FFC709"/>
                 </a:solidFill>
-                <a:latin typeface="Arial" pitchFamily="34" charset="0"/>
-                <a:ea typeface="Arial" pitchFamily="34" charset="-122"/>
-                <a:cs typeface="Arial" pitchFamily="34" charset="-120"/>
+                <a:latin typeface="Roboto" pitchFamily="34" charset="0"/>
+                <a:ea typeface="Roboto" pitchFamily="34" charset="-122"/>
+                <a:cs typeface="Roboto" pitchFamily="34" charset="-120"/>
               </a:rPr>
               <a:t>Origem dos recursos.  </a:t>
             </a:r>
@@ -6462,9 +6646,9 @@
                 <a:solidFill>
                   <a:srgbClr val="A5A5A5"/>
                 </a:solidFill>
-                <a:latin typeface="Arial" pitchFamily="34" charset="0"/>
-                <a:ea typeface="Arial" pitchFamily="34" charset="-122"/>
-                <a:cs typeface="Arial" pitchFamily="34" charset="-120"/>
+                <a:latin typeface="Roboto" pitchFamily="34" charset="0"/>
+                <a:ea typeface="Roboto" pitchFamily="34" charset="-122"/>
+                <a:cs typeface="Roboto" pitchFamily="34" charset="-120"/>
               </a:rPr>
               <a:t>Os R$ 200.000 da conta corrente financiam as Caixas 1 e 2. Os R$ 200.000 já investidos são reestruturados na Caixa 3.
 </a:t>
@@ -6480,9 +6664,9 @@
                 <a:solidFill>
                   <a:srgbClr val="FFFFFF"/>
                 </a:solidFill>
-                <a:latin typeface="Arial" pitchFamily="34" charset="0"/>
-                <a:ea typeface="Arial" pitchFamily="34" charset="-122"/>
-                <a:cs typeface="Arial" pitchFamily="34" charset="-120"/>
+                <a:latin typeface="Roboto" pitchFamily="34" charset="0"/>
+                <a:ea typeface="Roboto" pitchFamily="34" charset="-122"/>
+                <a:cs typeface="Roboto" pitchFamily="34" charset="-120"/>
               </a:rPr>
               <a:t>Premissa declarada.  </a:t>
             </a:r>
@@ -6497,9 +6681,9 @@
                 <a:solidFill>
                   <a:srgbClr val="A5A5A5"/>
                 </a:solidFill>
-                <a:latin typeface="Arial" pitchFamily="34" charset="0"/>
-                <a:ea typeface="Arial" pitchFamily="34" charset="-122"/>
-                <a:cs typeface="Arial" pitchFamily="34" charset="-120"/>
+                <a:latin typeface="Roboto" pitchFamily="34" charset="0"/>
+                <a:ea typeface="Roboto" pitchFamily="34" charset="-122"/>
+                <a:cs typeface="Roboto" pitchFamily="34" charset="-120"/>
               </a:rPr>
               <a:t>O briefing não informa despesas, então assumimos custo de vida de R$ 8.400 por mês, 70% da renda.</a:t>
             </a:r>
@@ -6524,7 +6708,7 @@
           <a:noFill/>
           <a:ln w="9525">
             <a:solidFill>
-              <a:srgbClr val="2B2B2B"/>
+              <a:srgbClr val="2E2E2E"/>
             </a:solidFill>
             <a:prstDash val="solid"/>
           </a:ln>
@@ -6557,11 +6741,11 @@
             <a:r>
               <a:rPr lang="en-US" sz="900" dirty="0">
                 <a:solidFill>
-                  <a:srgbClr val="6E6E6E"/>
-                </a:solidFill>
-                <a:latin typeface="Arial" pitchFamily="34" charset="0"/>
-                <a:ea typeface="Arial" pitchFamily="34" charset="-122"/>
-                <a:cs typeface="Arial" pitchFamily="34" charset="-120"/>
+                  <a:srgbClr val="757575"/>
+                </a:solidFill>
+                <a:latin typeface="Roboto" pitchFamily="34" charset="0"/>
+                <a:ea typeface="Roboto" pitchFamily="34" charset="-122"/>
+                <a:cs typeface="Roboto" pitchFamily="34" charset="-120"/>
               </a:rPr>
               <a:t>XP Investimentos  ·  Planejamento Patrimonial</a:t>
             </a:r>
@@ -6577,8 +6761,8 @@
         </p:nvSpPr>
         <p:spPr>
           <a:xfrm>
-            <a:off x="10607040" y="6473952"/>
-            <a:ext cx="914400" cy="219456"/>
+            <a:off x="10149840" y="6473952"/>
+            <a:ext cx="1005840" cy="219456"/>
           </a:xfrm>
           <a:prstGeom prst="rect">
             <a:avLst/>
@@ -6596,17 +6780,63 @@
             <a:r>
               <a:rPr lang="en-US" sz="900" dirty="0">
                 <a:solidFill>
-                  <a:srgbClr val="6E6E6E"/>
-                </a:solidFill>
-                <a:latin typeface="Arial" pitchFamily="34" charset="0"/>
-                <a:ea typeface="Arial" pitchFamily="34" charset="-122"/>
-                <a:cs typeface="Arial" pitchFamily="34" charset="-120"/>
+                  <a:srgbClr val="757575"/>
+                </a:solidFill>
+                <a:latin typeface="Roboto" pitchFamily="34" charset="0"/>
+                <a:ea typeface="Roboto" pitchFamily="34" charset="-122"/>
+                <a:cs typeface="Roboto" pitchFamily="34" charset="-120"/>
               </a:rPr>
               <a:t>04</a:t>
             </a:r>
             <a:endParaRPr lang="en-US" sz="900" dirty="0"/>
           </a:p>
         </p:txBody>
+      </p:sp>
+      <p:sp>
+        <p:nvSpPr>
+          <p:cNvPr id="32" name="Shape 30"/>
+          <p:cNvSpPr/>
+          <p:nvPr/>
+        </p:nvSpPr>
+        <p:spPr>
+          <a:xfrm>
+            <a:off x="11365992" y="6510528"/>
+            <a:ext cx="155448" cy="155448"/>
+          </a:xfrm>
+          <a:prstGeom prst="line">
+            <a:avLst/>
+          </a:prstGeom>
+          <a:noFill/>
+          <a:ln w="9525">
+            <a:solidFill>
+              <a:srgbClr val="FFC709"/>
+            </a:solidFill>
+            <a:prstDash val="solid"/>
+          </a:ln>
+        </p:spPr>
+      </p:sp>
+      <p:sp>
+        <p:nvSpPr>
+          <p:cNvPr id="33" name="Shape 31"/>
+          <p:cNvSpPr/>
+          <p:nvPr/>
+        </p:nvSpPr>
+        <p:spPr>
+          <a:xfrm flipH="1">
+            <a:off x="11365992" y="6510528"/>
+            <a:ext cx="155448" cy="155448"/>
+          </a:xfrm>
+          <a:prstGeom prst="line">
+            <a:avLst/>
+          </a:prstGeom>
+          <a:noFill/>
+          <a:ln w="9525">
+            <a:solidFill>
+              <a:srgbClr val="FFC709"/>
+            </a:solidFill>
+            <a:prstDash val="solid"/>
+          </a:ln>
+        </p:spPr>
       </p:sp>
     </p:spTree>
   </p:cSld>
@@ -6622,7 +6852,7 @@
     <p:bg>
       <p:bgPr>
         <a:solidFill>
-          <a:srgbClr val="000000"/>
+          <a:srgbClr val="0D0D0D"/>
         </a:solidFill>
       </p:bgPr>
     </p:bg>
@@ -6665,17 +6895,17 @@
               <a:buNone/>
             </a:pPr>
             <a:r>
-              <a:rPr lang="en-US" sz="1200" b="1" dirty="0">
+              <a:rPr lang="en-US" sz="1150" b="1" dirty="0">
                 <a:solidFill>
                   <a:srgbClr val="FFC709"/>
                 </a:solidFill>
-                <a:latin typeface="Arial" pitchFamily="34" charset="0"/>
-                <a:ea typeface="Arial" pitchFamily="34" charset="-122"/>
-                <a:cs typeface="Arial" pitchFamily="34" charset="-120"/>
+                <a:latin typeface="Roboto" pitchFamily="34" charset="0"/>
+                <a:ea typeface="Roboto" pitchFamily="34" charset="-122"/>
+                <a:cs typeface="Roboto" pitchFamily="34" charset="-120"/>
               </a:rPr>
               <a:t>Caixa 01  ·  Curto prazo</a:t>
             </a:r>
-            <a:endParaRPr lang="en-US" sz="1200" dirty="0"/>
+            <a:endParaRPr lang="en-US" sz="1150" dirty="0"/>
           </a:p>
         </p:txBody>
       </p:sp>
@@ -6704,17 +6934,17 @@
               <a:buNone/>
             </a:pPr>
             <a:r>
-              <a:rPr lang="en-US" sz="3400" b="1" dirty="0">
+              <a:rPr lang="en-US" sz="3000" b="1" dirty="0">
                 <a:solidFill>
                   <a:srgbClr val="FFFFFF"/>
                 </a:solidFill>
-                <a:latin typeface="Arial" pitchFamily="34" charset="0"/>
-                <a:ea typeface="Arial" pitchFamily="34" charset="-122"/>
-                <a:cs typeface="Arial" pitchFamily="34" charset="-120"/>
+                <a:latin typeface="Roboto Slab" pitchFamily="34" charset="0"/>
+                <a:ea typeface="Roboto Slab" pitchFamily="34" charset="-122"/>
+                <a:cs typeface="Roboto Slab" pitchFamily="34" charset="-120"/>
               </a:rPr>
               <a:t>Liquidez imediata e reserva de emergência</a:t>
             </a:r>
-            <a:endParaRPr lang="en-US" sz="3400" dirty="0"/>
+            <a:endParaRPr lang="en-US" sz="3000" dirty="0"/>
           </a:p>
         </p:txBody>
       </p:sp>
@@ -6747,9 +6977,9 @@
                 <a:solidFill>
                   <a:srgbClr val="A5A5A5"/>
                 </a:solidFill>
-                <a:latin typeface="Arial" pitchFamily="34" charset="0"/>
-                <a:ea typeface="Arial" pitchFamily="34" charset="-122"/>
-                <a:cs typeface="Arial" pitchFamily="34" charset="-120"/>
+                <a:latin typeface="Roboto" pitchFamily="34" charset="0"/>
+                <a:ea typeface="Roboto" pitchFamily="34" charset="-122"/>
+                <a:cs typeface="Roboto" pitchFamily="34" charset="-120"/>
               </a:rPr>
               <a:t>O primeiro dinheiro a sair da conta corrente e o único que nunca oscila.</a:t>
             </a:r>
@@ -6766,33 +6996,33 @@
         <p:spPr>
           <a:xfrm>
             <a:off x="640080" y="1920240"/>
-            <a:ext cx="3749040" cy="777240"/>
-          </a:xfrm>
-          <a:prstGeom prst="rect">
-            <a:avLst/>
-          </a:prstGeom>
-          <a:noFill/>
-          <a:ln/>
-        </p:spPr>
-        <p:txBody>
-          <a:bodyPr wrap="square" lIns="0" tIns="0" rIns="0" bIns="0" rtlCol="0" anchor="ctr"/>
-          <a:lstStyle/>
-          <a:p>
-            <a:pPr indent="0" marL="0">
-              <a:buNone/>
-            </a:pPr>
-            <a:r>
-              <a:rPr lang="en-US" sz="4600" b="1" dirty="0">
+            <a:ext cx="3931920" cy="777240"/>
+          </a:xfrm>
+          <a:prstGeom prst="rect">
+            <a:avLst/>
+          </a:prstGeom>
+          <a:noFill/>
+          <a:ln/>
+        </p:spPr>
+        <p:txBody>
+          <a:bodyPr wrap="square" lIns="0" tIns="0" rIns="0" bIns="0" rtlCol="0" anchor="ctr"/>
+          <a:lstStyle/>
+          <a:p>
+            <a:pPr indent="0" marL="0">
+              <a:buNone/>
+            </a:pPr>
+            <a:r>
+              <a:rPr lang="en-US" sz="4000" b="1" dirty="0">
                 <a:solidFill>
                   <a:srgbClr val="FFC709"/>
                 </a:solidFill>
-                <a:latin typeface="Arial" pitchFamily="34" charset="0"/>
-                <a:ea typeface="Arial" pitchFamily="34" charset="-122"/>
-                <a:cs typeface="Arial" pitchFamily="34" charset="-120"/>
+                <a:latin typeface="Roboto Slab" pitchFamily="34" charset="0"/>
+                <a:ea typeface="Roboto Slab" pitchFamily="34" charset="-122"/>
+                <a:cs typeface="Roboto Slab" pitchFamily="34" charset="-120"/>
               </a:rPr>
               <a:t>R$ 60.000</a:t>
             </a:r>
-            <a:endParaRPr lang="en-US" sz="4600" dirty="0"/>
+            <a:endParaRPr lang="en-US" sz="4000" dirty="0"/>
           </a:p>
         </p:txBody>
       </p:sp>
@@ -6825,9 +7055,9 @@
                 <a:solidFill>
                   <a:srgbClr val="A5A5A5"/>
                 </a:solidFill>
-                <a:latin typeface="Arial" pitchFamily="34" charset="0"/>
-                <a:ea typeface="Arial" pitchFamily="34" charset="-122"/>
-                <a:cs typeface="Arial" pitchFamily="34" charset="-120"/>
+                <a:latin typeface="Roboto" pitchFamily="34" charset="0"/>
+                <a:ea typeface="Roboto" pitchFamily="34" charset="-122"/>
+                <a:cs typeface="Roboto" pitchFamily="34" charset="-120"/>
               </a:rPr>
               <a:t>15% do patrimônio total</a:t>
             </a:r>
@@ -6852,7 +7082,7 @@
           <a:noFill/>
           <a:ln w="9525">
             <a:solidFill>
-              <a:srgbClr val="2B2B2B"/>
+              <a:srgbClr val="2E2E2E"/>
             </a:solidFill>
             <a:prstDash val="solid"/>
           </a:ln>
@@ -6887,9 +7117,9 @@
                 <a:solidFill>
                   <a:srgbClr val="FFC709"/>
                 </a:solidFill>
-                <a:latin typeface="Arial" pitchFamily="34" charset="0"/>
-                <a:ea typeface="Arial" pitchFamily="34" charset="-122"/>
-                <a:cs typeface="Arial" pitchFamily="34" charset="-120"/>
+                <a:latin typeface="Roboto" pitchFamily="34" charset="0"/>
+                <a:ea typeface="Roboto" pitchFamily="34" charset="-122"/>
+                <a:cs typeface="Roboto" pitchFamily="34" charset="-120"/>
               </a:rPr>
               <a:t>Como chegamos ao valor</a:t>
             </a:r>
@@ -6924,11 +7154,11 @@
             <a:r>
               <a:rPr lang="en-US" sz="1150" dirty="0">
                 <a:solidFill>
-                  <a:srgbClr val="6E6E6E"/>
-                </a:solidFill>
-                <a:latin typeface="Arial" pitchFamily="34" charset="0"/>
-                <a:ea typeface="Arial" pitchFamily="34" charset="-122"/>
-                <a:cs typeface="Arial" pitchFamily="34" charset="-120"/>
+                  <a:srgbClr val="757575"/>
+                </a:solidFill>
+                <a:latin typeface="Roboto" pitchFamily="34" charset="0"/>
+                <a:ea typeface="Roboto" pitchFamily="34" charset="-122"/>
+                <a:cs typeface="Roboto" pitchFamily="34" charset="-120"/>
               </a:rPr>
               <a:t>Custo de vida estimado</a:t>
             </a:r>
@@ -6965,9 +7195,9 @@
                 <a:solidFill>
                   <a:srgbClr val="FFFFFF"/>
                 </a:solidFill>
-                <a:latin typeface="Arial" pitchFamily="34" charset="0"/>
-                <a:ea typeface="Arial" pitchFamily="34" charset="-122"/>
-                <a:cs typeface="Arial" pitchFamily="34" charset="-120"/>
+                <a:latin typeface="Roboto" pitchFamily="34" charset="0"/>
+                <a:ea typeface="Roboto" pitchFamily="34" charset="-122"/>
+                <a:cs typeface="Roboto" pitchFamily="34" charset="-120"/>
               </a:rPr>
               <a:t>R$ 8.400 / mês</a:t>
             </a:r>
@@ -7002,11 +7232,11 @@
             <a:r>
               <a:rPr lang="en-US" sz="1150" dirty="0">
                 <a:solidFill>
-                  <a:srgbClr val="6E6E6E"/>
-                </a:solidFill>
-                <a:latin typeface="Arial" pitchFamily="34" charset="0"/>
-                <a:ea typeface="Arial" pitchFamily="34" charset="-122"/>
-                <a:cs typeface="Arial" pitchFamily="34" charset="-120"/>
+                  <a:srgbClr val="757575"/>
+                </a:solidFill>
+                <a:latin typeface="Roboto" pitchFamily="34" charset="0"/>
+                <a:ea typeface="Roboto" pitchFamily="34" charset="-122"/>
+                <a:cs typeface="Roboto" pitchFamily="34" charset="-120"/>
               </a:rPr>
               <a:t>Cobertura alvo</a:t>
             </a:r>
@@ -7043,9 +7273,9 @@
                 <a:solidFill>
                   <a:srgbClr val="FFFFFF"/>
                 </a:solidFill>
-                <a:latin typeface="Arial" pitchFamily="34" charset="0"/>
-                <a:ea typeface="Arial" pitchFamily="34" charset="-122"/>
-                <a:cs typeface="Arial" pitchFamily="34" charset="-120"/>
+                <a:latin typeface="Roboto" pitchFamily="34" charset="0"/>
+                <a:ea typeface="Roboto" pitchFamily="34" charset="-122"/>
+                <a:cs typeface="Roboto" pitchFamily="34" charset="-120"/>
               </a:rPr>
               <a:t>6 meses</a:t>
             </a:r>
@@ -7080,11 +7310,11 @@
             <a:r>
               <a:rPr lang="en-US" sz="1150" dirty="0">
                 <a:solidFill>
-                  <a:srgbClr val="6E6E6E"/>
-                </a:solidFill>
-                <a:latin typeface="Arial" pitchFamily="34" charset="0"/>
-                <a:ea typeface="Arial" pitchFamily="34" charset="-122"/>
-                <a:cs typeface="Arial" pitchFamily="34" charset="-120"/>
+                  <a:srgbClr val="757575"/>
+                </a:solidFill>
+                <a:latin typeface="Roboto" pitchFamily="34" charset="0"/>
+                <a:ea typeface="Roboto" pitchFamily="34" charset="-122"/>
+                <a:cs typeface="Roboto" pitchFamily="34" charset="-120"/>
               </a:rPr>
               <a:t>Resultado</a:t>
             </a:r>
@@ -7121,9 +7351,9 @@
                 <a:solidFill>
                   <a:srgbClr val="FFFFFF"/>
                 </a:solidFill>
-                <a:latin typeface="Arial" pitchFamily="34" charset="0"/>
-                <a:ea typeface="Arial" pitchFamily="34" charset="-122"/>
-                <a:cs typeface="Arial" pitchFamily="34" charset="-120"/>
+                <a:latin typeface="Roboto" pitchFamily="34" charset="0"/>
+                <a:ea typeface="Roboto" pitchFamily="34" charset="-122"/>
+                <a:cs typeface="Roboto" pitchFamily="34" charset="-120"/>
               </a:rPr>
               <a:t>R$ 50.400</a:t>
             </a:r>
@@ -7158,11 +7388,11 @@
             <a:r>
               <a:rPr lang="en-US" sz="1150" dirty="0">
                 <a:solidFill>
-                  <a:srgbClr val="6E6E6E"/>
-                </a:solidFill>
-                <a:latin typeface="Arial" pitchFamily="34" charset="0"/>
-                <a:ea typeface="Arial" pitchFamily="34" charset="-122"/>
-                <a:cs typeface="Arial" pitchFamily="34" charset="-120"/>
+                  <a:srgbClr val="757575"/>
+                </a:solidFill>
+                <a:latin typeface="Roboto" pitchFamily="34" charset="0"/>
+                <a:ea typeface="Roboto" pitchFamily="34" charset="-122"/>
+                <a:cs typeface="Roboto" pitchFamily="34" charset="-120"/>
               </a:rPr>
               <a:t>Arredondado para</a:t>
             </a:r>
@@ -7199,9 +7429,9 @@
                 <a:solidFill>
                   <a:srgbClr val="FFFFFF"/>
                 </a:solidFill>
-                <a:latin typeface="Arial" pitchFamily="34" charset="0"/>
-                <a:ea typeface="Arial" pitchFamily="34" charset="-122"/>
-                <a:cs typeface="Arial" pitchFamily="34" charset="-120"/>
+                <a:latin typeface="Roboto" pitchFamily="34" charset="0"/>
+                <a:ea typeface="Roboto" pitchFamily="34" charset="-122"/>
+                <a:cs typeface="Roboto" pitchFamily="34" charset="-120"/>
               </a:rPr>
               <a:t>R$ 60.000, ou 7,1 meses</a:t>
             </a:r>
@@ -7261,9 +7491,9 @@
                 <a:solidFill>
                   <a:srgbClr val="FFFFFF"/>
                 </a:solidFill>
-                <a:latin typeface="Arial" pitchFamily="34" charset="0"/>
-                <a:ea typeface="Arial" pitchFamily="34" charset="-122"/>
-                <a:cs typeface="Arial" pitchFamily="34" charset="-120"/>
+                <a:latin typeface="Roboto" pitchFamily="34" charset="0"/>
+                <a:ea typeface="Roboto" pitchFamily="34" charset="-122"/>
+                <a:cs typeface="Roboto" pitchFamily="34" charset="-120"/>
               </a:rPr>
               <a:t>CDB de liquidez diária D+0</a:t>
             </a:r>
@@ -7303,9 +7533,9 @@
                 <a:solidFill>
                   <a:srgbClr val="A5A5A5"/>
                 </a:solidFill>
-                <a:latin typeface="Arial" pitchFamily="34" charset="0"/>
-                <a:ea typeface="Arial" pitchFamily="34" charset="-122"/>
-                <a:cs typeface="Arial" pitchFamily="34" charset="-120"/>
+                <a:latin typeface="Roboto" pitchFamily="34" charset="0"/>
+                <a:ea typeface="Roboto" pitchFamily="34" charset="-122"/>
+                <a:cs typeface="Roboto" pitchFamily="34" charset="-120"/>
               </a:rPr>
               <a:t>Bancos de primeira linha na plataforma XP, faixa de 100% a 103% do CDI, com resgate no mesmo dia pelo aplicativo.</a:t>
             </a:r>
@@ -7330,7 +7560,7 @@
           <a:noFill/>
           <a:ln w="9525">
             <a:solidFill>
-              <a:srgbClr val="2B2B2B"/>
+              <a:srgbClr val="2E2E2E"/>
             </a:solidFill>
             <a:prstDash val="solid"/>
           </a:ln>
@@ -7365,9 +7595,9 @@
                 <a:solidFill>
                   <a:srgbClr val="FFFFFF"/>
                 </a:solidFill>
-                <a:latin typeface="Arial" pitchFamily="34" charset="0"/>
-                <a:ea typeface="Arial" pitchFamily="34" charset="-122"/>
-                <a:cs typeface="Arial" pitchFamily="34" charset="-120"/>
+                <a:latin typeface="Roboto" pitchFamily="34" charset="0"/>
+                <a:ea typeface="Roboto" pitchFamily="34" charset="-122"/>
+                <a:cs typeface="Roboto" pitchFamily="34" charset="-120"/>
               </a:rPr>
               <a:t>Fundo DI com taxa zero de administração</a:t>
             </a:r>
@@ -7407,9 +7637,9 @@
                 <a:solidFill>
                   <a:srgbClr val="A5A5A5"/>
                 </a:solidFill>
-                <a:latin typeface="Arial" pitchFamily="34" charset="0"/>
-                <a:ea typeface="Arial" pitchFamily="34" charset="-122"/>
-                <a:cs typeface="Arial" pitchFamily="34" charset="-120"/>
+                <a:latin typeface="Roboto" pitchFamily="34" charset="0"/>
+                <a:ea typeface="Roboto" pitchFamily="34" charset="-122"/>
+                <a:cs typeface="Roboto" pitchFamily="34" charset="-120"/>
               </a:rPr>
               <a:t>Alternativa sem taxa de administração para a parcela de giro, com liquidez no mesmo dia útil.</a:t>
             </a:r>
@@ -7434,7 +7664,7 @@
           <a:noFill/>
           <a:ln w="9525">
             <a:solidFill>
-              <a:srgbClr val="2B2B2B"/>
+              <a:srgbClr val="2E2E2E"/>
             </a:solidFill>
             <a:prstDash val="solid"/>
           </a:ln>
@@ -7469,9 +7699,9 @@
                 <a:solidFill>
                   <a:srgbClr val="FFFFFF"/>
                 </a:solidFill>
-                <a:latin typeface="Arial" pitchFamily="34" charset="0"/>
-                <a:ea typeface="Arial" pitchFamily="34" charset="-122"/>
-                <a:cs typeface="Arial" pitchFamily="34" charset="-120"/>
+                <a:latin typeface="Roboto" pitchFamily="34" charset="0"/>
+                <a:ea typeface="Roboto" pitchFamily="34" charset="-122"/>
+                <a:cs typeface="Roboto" pitchFamily="34" charset="-120"/>
               </a:rPr>
               <a:t>Cobertura do FGC</a:t>
             </a:r>
@@ -7511,9 +7741,9 @@
                 <a:solidFill>
                   <a:srgbClr val="A5A5A5"/>
                 </a:solidFill>
-                <a:latin typeface="Arial" pitchFamily="34" charset="0"/>
-                <a:ea typeface="Arial" pitchFamily="34" charset="-122"/>
-                <a:cs typeface="Arial" pitchFamily="34" charset="-120"/>
+                <a:latin typeface="Roboto" pitchFamily="34" charset="0"/>
+                <a:ea typeface="Roboto" pitchFamily="34" charset="-122"/>
+                <a:cs typeface="Roboto" pitchFamily="34" charset="-120"/>
               </a:rPr>
               <a:t>Até R$ 250 mil por CPF por instituição, com teto global de R$ 1 milhão a cada quatro anos. Pulverizando em dois emissores, sua exposição fica muito abaixo do limite.</a:t>
             </a:r>
@@ -7536,7 +7766,7 @@
             <a:avLst/>
           </a:prstGeom>
           <a:solidFill>
-            <a:srgbClr val="121212"/>
+            <a:srgbClr val="1A1A1A"/>
           </a:solidFill>
           <a:ln w="12700">
             <a:solidFill>
@@ -7575,9 +7805,9 @@
                 <a:solidFill>
                   <a:srgbClr val="FFFFFF"/>
                 </a:solidFill>
-                <a:latin typeface="Arial" pitchFamily="34" charset="0"/>
-                <a:ea typeface="Arial" pitchFamily="34" charset="-122"/>
-                <a:cs typeface="Arial" pitchFamily="34" charset="-120"/>
+                <a:latin typeface="Roboto" pitchFamily="34" charset="0"/>
+                <a:ea typeface="Roboto" pitchFamily="34" charset="-122"/>
+                <a:cs typeface="Roboto" pitchFamily="34" charset="-120"/>
               </a:rPr>
               <a:t>Volatilidade desta caixa: zero. Este dinheiro não participa de mercado. Ele existe para que você nunca precise resgatar as outras duas caixas num momento ruim.</a:t>
             </a:r>
@@ -7602,7 +7832,7 @@
           <a:noFill/>
           <a:ln w="9525">
             <a:solidFill>
-              <a:srgbClr val="2B2B2B"/>
+              <a:srgbClr val="2E2E2E"/>
             </a:solidFill>
             <a:prstDash val="solid"/>
           </a:ln>
@@ -7635,11 +7865,11 @@
             <a:r>
               <a:rPr lang="en-US" sz="900" dirty="0">
                 <a:solidFill>
-                  <a:srgbClr val="6E6E6E"/>
-                </a:solidFill>
-                <a:latin typeface="Arial" pitchFamily="34" charset="0"/>
-                <a:ea typeface="Arial" pitchFamily="34" charset="-122"/>
-                <a:cs typeface="Arial" pitchFamily="34" charset="-120"/>
+                  <a:srgbClr val="757575"/>
+                </a:solidFill>
+                <a:latin typeface="Roboto" pitchFamily="34" charset="0"/>
+                <a:ea typeface="Roboto" pitchFamily="34" charset="-122"/>
+                <a:cs typeface="Roboto" pitchFamily="34" charset="-120"/>
               </a:rPr>
               <a:t>XP Investimentos  ·  Planejamento Patrimonial</a:t>
             </a:r>
@@ -7655,8 +7885,8 @@
         </p:nvSpPr>
         <p:spPr>
           <a:xfrm>
-            <a:off x="10607040" y="6473952"/>
-            <a:ext cx="914400" cy="219456"/>
+            <a:off x="10149840" y="6473952"/>
+            <a:ext cx="1005840" cy="219456"/>
           </a:xfrm>
           <a:prstGeom prst="rect">
             <a:avLst/>
@@ -7674,17 +7904,63 @@
             <a:r>
               <a:rPr lang="en-US" sz="900" dirty="0">
                 <a:solidFill>
-                  <a:srgbClr val="6E6E6E"/>
-                </a:solidFill>
-                <a:latin typeface="Arial" pitchFamily="34" charset="0"/>
-                <a:ea typeface="Arial" pitchFamily="34" charset="-122"/>
-                <a:cs typeface="Arial" pitchFamily="34" charset="-120"/>
+                  <a:srgbClr val="757575"/>
+                </a:solidFill>
+                <a:latin typeface="Roboto" pitchFamily="34" charset="0"/>
+                <a:ea typeface="Roboto" pitchFamily="34" charset="-122"/>
+                <a:cs typeface="Roboto" pitchFamily="34" charset="-120"/>
               </a:rPr>
               <a:t>05</a:t>
             </a:r>
             <a:endParaRPr lang="en-US" sz="900" dirty="0"/>
           </a:p>
         </p:txBody>
+      </p:sp>
+      <p:sp>
+        <p:nvSpPr>
+          <p:cNvPr id="31" name="Shape 29"/>
+          <p:cNvSpPr/>
+          <p:nvPr/>
+        </p:nvSpPr>
+        <p:spPr>
+          <a:xfrm>
+            <a:off x="11365992" y="6510528"/>
+            <a:ext cx="155448" cy="155448"/>
+          </a:xfrm>
+          <a:prstGeom prst="line">
+            <a:avLst/>
+          </a:prstGeom>
+          <a:noFill/>
+          <a:ln w="9525">
+            <a:solidFill>
+              <a:srgbClr val="FFC709"/>
+            </a:solidFill>
+            <a:prstDash val="solid"/>
+          </a:ln>
+        </p:spPr>
+      </p:sp>
+      <p:sp>
+        <p:nvSpPr>
+          <p:cNvPr id="32" name="Shape 30"/>
+          <p:cNvSpPr/>
+          <p:nvPr/>
+        </p:nvSpPr>
+        <p:spPr>
+          <a:xfrm flipH="1">
+            <a:off x="11365992" y="6510528"/>
+            <a:ext cx="155448" cy="155448"/>
+          </a:xfrm>
+          <a:prstGeom prst="line">
+            <a:avLst/>
+          </a:prstGeom>
+          <a:noFill/>
+          <a:ln w="9525">
+            <a:solidFill>
+              <a:srgbClr val="FFC709"/>
+            </a:solidFill>
+            <a:prstDash val="solid"/>
+          </a:ln>
+        </p:spPr>
       </p:sp>
     </p:spTree>
   </p:cSld>
@@ -7700,7 +7976,7 @@
     <p:bg>
       <p:bgPr>
         <a:solidFill>
-          <a:srgbClr val="000000"/>
+          <a:srgbClr val="0D0D0D"/>
         </a:solidFill>
       </p:bgPr>
     </p:bg>
@@ -7743,17 +8019,17 @@
               <a:buNone/>
             </a:pPr>
             <a:r>
-              <a:rPr lang="en-US" sz="1200" b="1" dirty="0">
+              <a:rPr lang="en-US" sz="1150" b="1" dirty="0">
                 <a:solidFill>
                   <a:srgbClr val="FFC709"/>
                 </a:solidFill>
-                <a:latin typeface="Arial" pitchFamily="34" charset="0"/>
-                <a:ea typeface="Arial" pitchFamily="34" charset="-122"/>
-                <a:cs typeface="Arial" pitchFamily="34" charset="-120"/>
+                <a:latin typeface="Roboto" pitchFamily="34" charset="0"/>
+                <a:ea typeface="Roboto" pitchFamily="34" charset="-122"/>
+                <a:cs typeface="Roboto" pitchFamily="34" charset="-120"/>
               </a:rPr>
               <a:t>Caixa 02  ·  Médio e longo prazo</a:t>
             </a:r>
-            <a:endParaRPr lang="en-US" sz="1200" dirty="0"/>
+            <a:endParaRPr lang="en-US" sz="1150" dirty="0"/>
           </a:p>
         </p:txBody>
       </p:sp>
@@ -7782,17 +8058,17 @@
               <a:buNone/>
             </a:pPr>
             <a:r>
-              <a:rPr lang="en-US" sz="3400" b="1" dirty="0">
+              <a:rPr lang="en-US" sz="3000" b="1" dirty="0">
                 <a:solidFill>
                   <a:srgbClr val="FFFFFF"/>
                 </a:solidFill>
-                <a:latin typeface="Arial" pitchFamily="34" charset="0"/>
-                <a:ea typeface="Arial" pitchFamily="34" charset="-122"/>
-                <a:cs typeface="Arial" pitchFamily="34" charset="-120"/>
+                <a:latin typeface="Roboto Slab" pitchFamily="34" charset="0"/>
+                <a:ea typeface="Roboto Slab" pitchFamily="34" charset="-122"/>
+                <a:cs typeface="Roboto Slab" pitchFamily="34" charset="-120"/>
               </a:rPr>
               <a:t>Proteção da família e o futuro da sua filha</a:t>
             </a:r>
-            <a:endParaRPr lang="en-US" sz="3400" dirty="0"/>
+            <a:endParaRPr lang="en-US" sz="3000" dirty="0"/>
           </a:p>
         </p:txBody>
       </p:sp>
@@ -7825,9 +8101,9 @@
                 <a:solidFill>
                   <a:srgbClr val="A5A5A5"/>
                 </a:solidFill>
-                <a:latin typeface="Arial" pitchFamily="34" charset="0"/>
-                <a:ea typeface="Arial" pitchFamily="34" charset="-122"/>
-                <a:cs typeface="Arial" pitchFamily="34" charset="-120"/>
+                <a:latin typeface="Roboto" pitchFamily="34" charset="0"/>
+                <a:ea typeface="Roboto" pitchFamily="34" charset="-122"/>
+                <a:cs typeface="Roboto" pitchFamily="34" charset="-120"/>
               </a:rPr>
               <a:t>R$ 140.000 alocados, mais a camada de proteção que faltava no seu planejamento.</a:t>
             </a:r>
@@ -7883,17 +8159,17 @@
               <a:buNone/>
             </a:pPr>
             <a:r>
-              <a:rPr lang="en-US" sz="1650" b="1" dirty="0">
+              <a:rPr lang="en-US" sz="1550" b="1" dirty="0">
                 <a:solidFill>
                   <a:srgbClr val="FFC709"/>
                 </a:solidFill>
-                <a:latin typeface="Arial" pitchFamily="34" charset="0"/>
-                <a:ea typeface="Arial" pitchFamily="34" charset="-122"/>
-                <a:cs typeface="Arial" pitchFamily="34" charset="-120"/>
+                <a:latin typeface="Roboto Slab" pitchFamily="34" charset="0"/>
+                <a:ea typeface="Roboto Slab" pitchFamily="34" charset="-122"/>
+                <a:cs typeface="Roboto Slab" pitchFamily="34" charset="-120"/>
               </a:rPr>
               <a:t>VGBL</a:t>
             </a:r>
-            <a:endParaRPr lang="en-US" sz="1650" dirty="0"/>
+            <a:endParaRPr lang="en-US" sz="1550" dirty="0"/>
           </a:p>
         </p:txBody>
       </p:sp>
@@ -7922,17 +8198,17 @@
               <a:buNone/>
             </a:pPr>
             <a:r>
-              <a:rPr lang="en-US" sz="3100" b="1" dirty="0">
+              <a:rPr lang="en-US" sz="2700" b="1" dirty="0">
                 <a:solidFill>
                   <a:srgbClr val="FFFFFF"/>
                 </a:solidFill>
-                <a:latin typeface="Arial" pitchFamily="34" charset="0"/>
-                <a:ea typeface="Arial" pitchFamily="34" charset="-122"/>
-                <a:cs typeface="Arial" pitchFamily="34" charset="-120"/>
+                <a:latin typeface="Roboto Slab" pitchFamily="34" charset="0"/>
+                <a:ea typeface="Roboto Slab" pitchFamily="34" charset="-122"/>
+                <a:cs typeface="Roboto Slab" pitchFamily="34" charset="-120"/>
               </a:rPr>
               <a:t>R$ 80.000</a:t>
             </a:r>
-            <a:endParaRPr lang="en-US" sz="3100" dirty="0"/>
+            <a:endParaRPr lang="en-US" sz="2700" dirty="0"/>
           </a:p>
         </p:txBody>
       </p:sp>
@@ -7963,11 +8239,11 @@
             <a:r>
               <a:rPr lang="en-US" sz="1150" dirty="0">
                 <a:solidFill>
-                  <a:srgbClr val="6E6E6E"/>
-                </a:solidFill>
-                <a:latin typeface="Arial" pitchFamily="34" charset="0"/>
-                <a:ea typeface="Arial" pitchFamily="34" charset="-122"/>
-                <a:cs typeface="Arial" pitchFamily="34" charset="-120"/>
+                  <a:srgbClr val="757575"/>
+                </a:solidFill>
+                <a:latin typeface="Roboto" pitchFamily="34" charset="0"/>
+                <a:ea typeface="Roboto" pitchFamily="34" charset="-122"/>
+                <a:cs typeface="Roboto" pitchFamily="34" charset="-120"/>
               </a:rPr>
               <a:t>Aporte único</a:t>
             </a:r>
@@ -7992,7 +8268,7 @@
           <a:noFill/>
           <a:ln w="9525">
             <a:solidFill>
-              <a:srgbClr val="2B2B2B"/>
+              <a:srgbClr val="2E2E2E"/>
             </a:solidFill>
             <a:prstDash val="solid"/>
           </a:ln>
@@ -8030,9 +8306,9 @@
                 <a:solidFill>
                   <a:srgbClr val="A5A5A5"/>
                 </a:solidFill>
-                <a:latin typeface="Arial" pitchFamily="34" charset="0"/>
-                <a:ea typeface="Arial" pitchFamily="34" charset="-122"/>
-                <a:cs typeface="Arial" pitchFamily="34" charset="-120"/>
+                <a:latin typeface="Roboto" pitchFamily="34" charset="0"/>
+                <a:ea typeface="Roboto" pitchFamily="34" charset="-122"/>
+                <a:cs typeface="Roboto" pitchFamily="34" charset="-120"/>
               </a:rPr>
               <a:t>Tabela regressiva de IR, com alíquota de 10% a partir de dez anos e incidência apenas sobre o rendimento. Sucessão direta à sua filha, sem inventário e sem custo de partilha.</a:t>
             </a:r>
@@ -8065,17 +8341,17 @@
               <a:buNone/>
             </a:pPr>
             <a:r>
-              <a:rPr lang="en-US" sz="1650" b="1" dirty="0">
+              <a:rPr lang="en-US" sz="1550" b="1" dirty="0">
                 <a:solidFill>
                   <a:srgbClr val="FFC709"/>
                 </a:solidFill>
-                <a:latin typeface="Arial" pitchFamily="34" charset="0"/>
-                <a:ea typeface="Arial" pitchFamily="34" charset="-122"/>
-                <a:cs typeface="Arial" pitchFamily="34" charset="-120"/>
+                <a:latin typeface="Roboto Slab" pitchFamily="34" charset="0"/>
+                <a:ea typeface="Roboto Slab" pitchFamily="34" charset="-122"/>
+                <a:cs typeface="Roboto Slab" pitchFamily="34" charset="-120"/>
               </a:rPr>
               <a:t>LCI e LCA</a:t>
             </a:r>
-            <a:endParaRPr lang="en-US" sz="1650" dirty="0"/>
+            <a:endParaRPr lang="en-US" sz="1550" dirty="0"/>
           </a:p>
         </p:txBody>
       </p:sp>
@@ -8104,17 +8380,17 @@
               <a:buNone/>
             </a:pPr>
             <a:r>
-              <a:rPr lang="en-US" sz="3100" b="1" dirty="0">
+              <a:rPr lang="en-US" sz="2700" b="1" dirty="0">
                 <a:solidFill>
                   <a:srgbClr val="FFFFFF"/>
                 </a:solidFill>
-                <a:latin typeface="Arial" pitchFamily="34" charset="0"/>
-                <a:ea typeface="Arial" pitchFamily="34" charset="-122"/>
-                <a:cs typeface="Arial" pitchFamily="34" charset="-120"/>
+                <a:latin typeface="Roboto Slab" pitchFamily="34" charset="0"/>
+                <a:ea typeface="Roboto Slab" pitchFamily="34" charset="-122"/>
+                <a:cs typeface="Roboto Slab" pitchFamily="34" charset="-120"/>
               </a:rPr>
               <a:t>R$ 60.000</a:t>
             </a:r>
-            <a:endParaRPr lang="en-US" sz="3100" dirty="0"/>
+            <a:endParaRPr lang="en-US" sz="2700" dirty="0"/>
           </a:p>
         </p:txBody>
       </p:sp>
@@ -8145,11 +8421,11 @@
             <a:r>
               <a:rPr lang="en-US" sz="1150" dirty="0">
                 <a:solidFill>
-                  <a:srgbClr val="6E6E6E"/>
-                </a:solidFill>
-                <a:latin typeface="Arial" pitchFamily="34" charset="0"/>
-                <a:ea typeface="Arial" pitchFamily="34" charset="-122"/>
-                <a:cs typeface="Arial" pitchFamily="34" charset="-120"/>
+                  <a:srgbClr val="757575"/>
+                </a:solidFill>
+                <a:latin typeface="Roboto" pitchFamily="34" charset="0"/>
+                <a:ea typeface="Roboto" pitchFamily="34" charset="-122"/>
+                <a:cs typeface="Roboto" pitchFamily="34" charset="-120"/>
               </a:rPr>
               <a:t>Isentos de IR</a:t>
             </a:r>
@@ -8174,7 +8450,7 @@
           <a:noFill/>
           <a:ln w="9525">
             <a:solidFill>
-              <a:srgbClr val="2B2B2B"/>
+              <a:srgbClr val="2E2E2E"/>
             </a:solidFill>
             <a:prstDash val="solid"/>
           </a:ln>
@@ -8212,9 +8488,9 @@
                 <a:solidFill>
                   <a:srgbClr val="A5A5A5"/>
                 </a:solidFill>
-                <a:latin typeface="Arial" pitchFamily="34" charset="0"/>
-                <a:ea typeface="Arial" pitchFamily="34" charset="-122"/>
-                <a:cs typeface="Arial" pitchFamily="34" charset="-120"/>
+                <a:latin typeface="Roboto" pitchFamily="34" charset="0"/>
+                <a:ea typeface="Roboto" pitchFamily="34" charset="-122"/>
+                <a:cs typeface="Roboto" pitchFamily="34" charset="-120"/>
               </a:rPr>
               <a:t>Isenção total de Imposto de Renda para pessoa física e cobertura do FGC. Vencimentos escalonados e casados com os marcos escolares da sua filha. Carência mínima de nove meses.</a:t>
             </a:r>
@@ -8247,17 +8523,17 @@
               <a:buNone/>
             </a:pPr>
             <a:r>
-              <a:rPr lang="en-US" sz="1650" b="1" dirty="0">
+              <a:rPr lang="en-US" sz="1550" b="1" dirty="0">
                 <a:solidFill>
                   <a:srgbClr val="FFC709"/>
                 </a:solidFill>
-                <a:latin typeface="Arial" pitchFamily="34" charset="0"/>
-                <a:ea typeface="Arial" pitchFamily="34" charset="-122"/>
-                <a:cs typeface="Arial" pitchFamily="34" charset="-120"/>
+                <a:latin typeface="Roboto Slab" pitchFamily="34" charset="0"/>
+                <a:ea typeface="Roboto Slab" pitchFamily="34" charset="-122"/>
+                <a:cs typeface="Roboto Slab" pitchFamily="34" charset="-120"/>
               </a:rPr>
               <a:t>Seguro de vida</a:t>
             </a:r>
-            <a:endParaRPr lang="en-US" sz="1650" dirty="0"/>
+            <a:endParaRPr lang="en-US" sz="1550" dirty="0"/>
           </a:p>
         </p:txBody>
       </p:sp>
@@ -8286,17 +8562,17 @@
               <a:buNone/>
             </a:pPr>
             <a:r>
-              <a:rPr lang="en-US" sz="3100" b="1" dirty="0">
+              <a:rPr lang="en-US" sz="2700" b="1" dirty="0">
                 <a:solidFill>
                   <a:srgbClr val="FFFFFF"/>
                 </a:solidFill>
-                <a:latin typeface="Arial" pitchFamily="34" charset="0"/>
-                <a:ea typeface="Arial" pitchFamily="34" charset="-122"/>
-                <a:cs typeface="Arial" pitchFamily="34" charset="-120"/>
+                <a:latin typeface="Roboto Slab" pitchFamily="34" charset="0"/>
+                <a:ea typeface="Roboto Slab" pitchFamily="34" charset="-122"/>
+                <a:cs typeface="Roboto Slab" pitchFamily="34" charset="-120"/>
               </a:rPr>
               <a:t>R$ 720.000</a:t>
             </a:r>
-            <a:endParaRPr lang="en-US" sz="3100" dirty="0"/>
+            <a:endParaRPr lang="en-US" sz="2700" dirty="0"/>
           </a:p>
         </p:txBody>
       </p:sp>
@@ -8327,11 +8603,11 @@
             <a:r>
               <a:rPr lang="en-US" sz="1150" dirty="0">
                 <a:solidFill>
-                  <a:srgbClr val="6E6E6E"/>
-                </a:solidFill>
-                <a:latin typeface="Arial" pitchFamily="34" charset="0"/>
-                <a:ea typeface="Arial" pitchFamily="34" charset="-122"/>
-                <a:cs typeface="Arial" pitchFamily="34" charset="-120"/>
+                  <a:srgbClr val="757575"/>
+                </a:solidFill>
+                <a:latin typeface="Roboto" pitchFamily="34" charset="0"/>
+                <a:ea typeface="Roboto" pitchFamily="34" charset="-122"/>
+                <a:cs typeface="Roboto" pitchFamily="34" charset="-120"/>
               </a:rPr>
               <a:t>Capital segurado</a:t>
             </a:r>
@@ -8356,7 +8632,7 @@
           <a:noFill/>
           <a:ln w="9525">
             <a:solidFill>
-              <a:srgbClr val="2B2B2B"/>
+              <a:srgbClr val="2E2E2E"/>
             </a:solidFill>
             <a:prstDash val="solid"/>
           </a:ln>
@@ -8394,9 +8670,9 @@
                 <a:solidFill>
                   <a:srgbClr val="A5A5A5"/>
                 </a:solidFill>
-                <a:latin typeface="Arial" pitchFamily="34" charset="0"/>
-                <a:ea typeface="Arial" pitchFamily="34" charset="-122"/>
-                <a:cs typeface="Arial" pitchFamily="34" charset="-120"/>
+                <a:latin typeface="Roboto" pitchFamily="34" charset="0"/>
+                <a:ea typeface="Roboto" pitchFamily="34" charset="-122"/>
+                <a:cs typeface="Roboto" pitchFamily="34" charset="-120"/>
               </a:rPr>
               <a:t>Cinco vezes a sua renda anual, custeado pelo fluxo mensal e não pelo principal. Estimativa a partir de R$ 250 por mês, sujeita à análise de risco da seguradora.</a:t>
             </a:r>
@@ -8419,7 +8695,7 @@
             <a:avLst/>
           </a:prstGeom>
           <a:solidFill>
-            <a:srgbClr val="121212"/>
+            <a:srgbClr val="1A1A1A"/>
           </a:solidFill>
           <a:ln w="12700">
             <a:solidFill>
@@ -8458,9 +8734,9 @@
                 <a:solidFill>
                   <a:srgbClr val="FFC709"/>
                 </a:solidFill>
-                <a:latin typeface="Arial" pitchFamily="34" charset="0"/>
-                <a:ea typeface="Arial" pitchFamily="34" charset="-122"/>
-                <a:cs typeface="Arial" pitchFamily="34" charset="-120"/>
+                <a:latin typeface="Roboto" pitchFamily="34" charset="0"/>
+                <a:ea typeface="Roboto" pitchFamily="34" charset="-122"/>
+                <a:cs typeface="Roboto" pitchFamily="34" charset="-120"/>
               </a:rPr>
               <a:t>Por que VGBL e não PGBL no aporte único</a:t>
             </a:r>
@@ -8500,9 +8776,9 @@
                 <a:solidFill>
                   <a:srgbClr val="A5A5A5"/>
                 </a:solidFill>
-                <a:latin typeface="Arial" pitchFamily="34" charset="0"/>
-                <a:ea typeface="Arial" pitchFamily="34" charset="-122"/>
-                <a:cs typeface="Arial" pitchFamily="34" charset="-120"/>
+                <a:latin typeface="Roboto" pitchFamily="34" charset="0"/>
+                <a:ea typeface="Roboto" pitchFamily="34" charset="-122"/>
+                <a:cs typeface="Roboto" pitchFamily="34" charset="-120"/>
               </a:rPr>
               <a:t>A dedução do PGBL é limitada a 12% da renda bruta tributável anual, o que dá R$ 17.280 no seu caso. Um aporte único de R$ 80 mil em PGBL desperdiçaria o benefício e ainda seria tributado sobre o valor total no resgate. Por isso: VGBL no aporte único, e PGBL como aporte mensal de R$ 1.440, exatamente dentro do teto, caso você declare no modelo completo.</a:t>
             </a:r>
@@ -8527,7 +8803,7 @@
           <a:noFill/>
           <a:ln w="9525">
             <a:solidFill>
-              <a:srgbClr val="2B2B2B"/>
+              <a:srgbClr val="2E2E2E"/>
             </a:solidFill>
             <a:prstDash val="solid"/>
           </a:ln>
@@ -8560,11 +8836,11 @@
             <a:r>
               <a:rPr lang="en-US" sz="900" dirty="0">
                 <a:solidFill>
-                  <a:srgbClr val="6E6E6E"/>
-                </a:solidFill>
-                <a:latin typeface="Arial" pitchFamily="34" charset="0"/>
-                <a:ea typeface="Arial" pitchFamily="34" charset="-122"/>
-                <a:cs typeface="Arial" pitchFamily="34" charset="-120"/>
+                  <a:srgbClr val="757575"/>
+                </a:solidFill>
+                <a:latin typeface="Roboto" pitchFamily="34" charset="0"/>
+                <a:ea typeface="Roboto" pitchFamily="34" charset="-122"/>
+                <a:cs typeface="Roboto" pitchFamily="34" charset="-120"/>
               </a:rPr>
               <a:t>XP Investimentos  ·  Planejamento Patrimonial</a:t>
             </a:r>
@@ -8580,8 +8856,8 @@
         </p:nvSpPr>
         <p:spPr>
           <a:xfrm>
-            <a:off x="10607040" y="6473952"/>
-            <a:ext cx="914400" cy="219456"/>
+            <a:off x="10149840" y="6473952"/>
+            <a:ext cx="1005840" cy="219456"/>
           </a:xfrm>
           <a:prstGeom prst="rect">
             <a:avLst/>
@@ -8599,17 +8875,63 @@
             <a:r>
               <a:rPr lang="en-US" sz="900" dirty="0">
                 <a:solidFill>
-                  <a:srgbClr val="6E6E6E"/>
-                </a:solidFill>
-                <a:latin typeface="Arial" pitchFamily="34" charset="0"/>
-                <a:ea typeface="Arial" pitchFamily="34" charset="-122"/>
-                <a:cs typeface="Arial" pitchFamily="34" charset="-120"/>
+                  <a:srgbClr val="757575"/>
+                </a:solidFill>
+                <a:latin typeface="Roboto" pitchFamily="34" charset="0"/>
+                <a:ea typeface="Roboto" pitchFamily="34" charset="-122"/>
+                <a:cs typeface="Roboto" pitchFamily="34" charset="-120"/>
               </a:rPr>
               <a:t>06</a:t>
             </a:r>
             <a:endParaRPr lang="en-US" sz="900" dirty="0"/>
           </a:p>
         </p:txBody>
+      </p:sp>
+      <p:sp>
+        <p:nvSpPr>
+          <p:cNvPr id="27" name="Shape 25"/>
+          <p:cNvSpPr/>
+          <p:nvPr/>
+        </p:nvSpPr>
+        <p:spPr>
+          <a:xfrm>
+            <a:off x="11365992" y="6510528"/>
+            <a:ext cx="155448" cy="155448"/>
+          </a:xfrm>
+          <a:prstGeom prst="line">
+            <a:avLst/>
+          </a:prstGeom>
+          <a:noFill/>
+          <a:ln w="9525">
+            <a:solidFill>
+              <a:srgbClr val="FFC709"/>
+            </a:solidFill>
+            <a:prstDash val="solid"/>
+          </a:ln>
+        </p:spPr>
+      </p:sp>
+      <p:sp>
+        <p:nvSpPr>
+          <p:cNvPr id="28" name="Shape 26"/>
+          <p:cNvSpPr/>
+          <p:nvPr/>
+        </p:nvSpPr>
+        <p:spPr>
+          <a:xfrm flipH="1">
+            <a:off x="11365992" y="6510528"/>
+            <a:ext cx="155448" cy="155448"/>
+          </a:xfrm>
+          <a:prstGeom prst="line">
+            <a:avLst/>
+          </a:prstGeom>
+          <a:noFill/>
+          <a:ln w="9525">
+            <a:solidFill>
+              <a:srgbClr val="FFC709"/>
+            </a:solidFill>
+            <a:prstDash val="solid"/>
+          </a:ln>
+        </p:spPr>
       </p:sp>
     </p:spTree>
   </p:cSld>
@@ -8625,7 +8947,7 @@
     <p:bg>
       <p:bgPr>
         <a:solidFill>
-          <a:srgbClr val="000000"/>
+          <a:srgbClr val="0D0D0D"/>
         </a:solidFill>
       </p:bgPr>
     </p:bg>
@@ -8668,17 +8990,17 @@
               <a:buNone/>
             </a:pPr>
             <a:r>
-              <a:rPr lang="en-US" sz="1200" b="1" dirty="0">
+              <a:rPr lang="en-US" sz="1150" b="1" dirty="0">
                 <a:solidFill>
                   <a:srgbClr val="FFC709"/>
                 </a:solidFill>
-                <a:latin typeface="Arial" pitchFamily="34" charset="0"/>
-                <a:ea typeface="Arial" pitchFamily="34" charset="-122"/>
-                <a:cs typeface="Arial" pitchFamily="34" charset="-120"/>
+                <a:latin typeface="Roboto" pitchFamily="34" charset="0"/>
+                <a:ea typeface="Roboto" pitchFamily="34" charset="-122"/>
+                <a:cs typeface="Roboto" pitchFamily="34" charset="-120"/>
               </a:rPr>
               <a:t>Caixa 03  ·  Longo prazo</a:t>
             </a:r>
-            <a:endParaRPr lang="en-US" sz="1200" dirty="0"/>
+            <a:endParaRPr lang="en-US" sz="1150" dirty="0"/>
           </a:p>
         </p:txBody>
       </p:sp>
@@ -8707,17 +9029,17 @@
               <a:buNone/>
             </a:pPr>
             <a:r>
-              <a:rPr lang="en-US" sz="3400" b="1" dirty="0">
+              <a:rPr lang="en-US" sz="3000" b="1" dirty="0">
                 <a:solidFill>
                   <a:srgbClr val="FFFFFF"/>
                 </a:solidFill>
-                <a:latin typeface="Arial" pitchFamily="34" charset="0"/>
-                <a:ea typeface="Arial" pitchFamily="34" charset="-122"/>
-                <a:cs typeface="Arial" pitchFamily="34" charset="-120"/>
+                <a:latin typeface="Roboto Slab" pitchFamily="34" charset="0"/>
+                <a:ea typeface="Roboto Slab" pitchFamily="34" charset="-122"/>
+                <a:cs typeface="Roboto Slab" pitchFamily="34" charset="-120"/>
               </a:rPr>
               <a:t>Crescimento com risco dimensionado</a:t>
             </a:r>
-            <a:endParaRPr lang="en-US" sz="3400" dirty="0"/>
+            <a:endParaRPr lang="en-US" sz="3000" dirty="0"/>
           </a:p>
         </p:txBody>
       </p:sp>
@@ -8750,9 +9072,9 @@
                 <a:solidFill>
                   <a:srgbClr val="A5A5A5"/>
                 </a:solidFill>
-                <a:latin typeface="Arial" pitchFamily="34" charset="0"/>
-                <a:ea typeface="Arial" pitchFamily="34" charset="-122"/>
-                <a:cs typeface="Arial" pitchFamily="34" charset="-120"/>
+                <a:latin typeface="Roboto" pitchFamily="34" charset="0"/>
+                <a:ea typeface="Roboto" pitchFamily="34" charset="-122"/>
+                <a:cs typeface="Roboto" pitchFamily="34" charset="-120"/>
               </a:rPr>
               <a:t>R$ 200.000 reestruturados a partir da carteira que você já tem hoje.</a:t>
             </a:r>
@@ -8808,17 +9130,17 @@
               <a:buNone/>
             </a:pPr>
             <a:r>
-              <a:rPr lang="en-US" sz="3000" b="1" dirty="0">
+              <a:rPr lang="en-US" sz="2700" b="1" dirty="0">
                 <a:solidFill>
                   <a:srgbClr val="FFC709"/>
                 </a:solidFill>
-                <a:latin typeface="Arial" pitchFamily="34" charset="0"/>
-                <a:ea typeface="Arial" pitchFamily="34" charset="-122"/>
-                <a:cs typeface="Arial" pitchFamily="34" charset="-120"/>
+                <a:latin typeface="Roboto Slab" pitchFamily="34" charset="0"/>
+                <a:ea typeface="Roboto Slab" pitchFamily="34" charset="-122"/>
+                <a:cs typeface="Roboto Slab" pitchFamily="34" charset="-120"/>
               </a:rPr>
               <a:t>55%</a:t>
             </a:r>
-            <a:endParaRPr lang="en-US" sz="3000" dirty="0"/>
+            <a:endParaRPr lang="en-US" sz="2700" dirty="0"/>
           </a:p>
         </p:txBody>
       </p:sp>
@@ -8851,9 +9173,9 @@
                 <a:solidFill>
                   <a:srgbClr val="FFFFFF"/>
                 </a:solidFill>
-                <a:latin typeface="Arial" pitchFamily="34" charset="0"/>
-                <a:ea typeface="Arial" pitchFamily="34" charset="-122"/>
-                <a:cs typeface="Arial" pitchFamily="34" charset="-120"/>
+                <a:latin typeface="Roboto" pitchFamily="34" charset="0"/>
+                <a:ea typeface="Roboto" pitchFamily="34" charset="-122"/>
+                <a:cs typeface="Roboto" pitchFamily="34" charset="-120"/>
               </a:rPr>
               <a:t>R$ 110.000</a:t>
             </a:r>
@@ -8890,9 +9212,9 @@
                 <a:solidFill>
                   <a:srgbClr val="FFFFFF"/>
                 </a:solidFill>
-                <a:latin typeface="Arial" pitchFamily="34" charset="0"/>
-                <a:ea typeface="Arial" pitchFamily="34" charset="-122"/>
-                <a:cs typeface="Arial" pitchFamily="34" charset="-120"/>
+                <a:latin typeface="Roboto" pitchFamily="34" charset="0"/>
+                <a:ea typeface="Roboto" pitchFamily="34" charset="-122"/>
+                <a:cs typeface="Roboto" pitchFamily="34" charset="-120"/>
               </a:rPr>
               <a:t>Renda fixa de carrego</a:t>
             </a:r>
@@ -8932,9 +9254,9 @@
                 <a:solidFill>
                   <a:srgbClr val="A5A5A5"/>
                 </a:solidFill>
-                <a:latin typeface="Arial" pitchFamily="34" charset="0"/>
-                <a:ea typeface="Arial" pitchFamily="34" charset="-122"/>
-                <a:cs typeface="Arial" pitchFamily="34" charset="-120"/>
+                <a:latin typeface="Roboto" pitchFamily="34" charset="0"/>
+                <a:ea typeface="Roboto" pitchFamily="34" charset="-122"/>
+                <a:cs typeface="Roboto" pitchFamily="34" charset="-120"/>
               </a:rPr>
               <a:t>Tesouro IPCA+ e debêntures incentivadas pela Lei 12.431, isentas de IR para pessoa física. Levadas ao vencimento, com o prazo casado ao objetivo, a marcação a mercado deixa de ser um problema.</a:t>
             </a:r>
@@ -8959,7 +9281,7 @@
           <a:noFill/>
           <a:ln w="9525">
             <a:solidFill>
-              <a:srgbClr val="2B2B2B"/>
+              <a:srgbClr val="2E2E2E"/>
             </a:solidFill>
             <a:prstDash val="solid"/>
           </a:ln>
@@ -8990,17 +9312,17 @@
               <a:buNone/>
             </a:pPr>
             <a:r>
-              <a:rPr lang="en-US" sz="3000" b="1" dirty="0">
+              <a:rPr lang="en-US" sz="2700" b="1" dirty="0">
                 <a:solidFill>
                   <a:srgbClr val="FFC709"/>
                 </a:solidFill>
-                <a:latin typeface="Arial" pitchFamily="34" charset="0"/>
-                <a:ea typeface="Arial" pitchFamily="34" charset="-122"/>
-                <a:cs typeface="Arial" pitchFamily="34" charset="-120"/>
+                <a:latin typeface="Roboto Slab" pitchFamily="34" charset="0"/>
+                <a:ea typeface="Roboto Slab" pitchFamily="34" charset="-122"/>
+                <a:cs typeface="Roboto Slab" pitchFamily="34" charset="-120"/>
               </a:rPr>
               <a:t>25%</a:t>
             </a:r>
-            <a:endParaRPr lang="en-US" sz="3000" dirty="0"/>
+            <a:endParaRPr lang="en-US" sz="2700" dirty="0"/>
           </a:p>
         </p:txBody>
       </p:sp>
@@ -9033,9 +9355,9 @@
                 <a:solidFill>
                   <a:srgbClr val="FFFFFF"/>
                 </a:solidFill>
-                <a:latin typeface="Arial" pitchFamily="34" charset="0"/>
-                <a:ea typeface="Arial" pitchFamily="34" charset="-122"/>
-                <a:cs typeface="Arial" pitchFamily="34" charset="-120"/>
+                <a:latin typeface="Roboto" pitchFamily="34" charset="0"/>
+                <a:ea typeface="Roboto" pitchFamily="34" charset="-122"/>
+                <a:cs typeface="Roboto" pitchFamily="34" charset="-120"/>
               </a:rPr>
               <a:t>R$ 50.000</a:t>
             </a:r>
@@ -9072,9 +9394,9 @@
                 <a:solidFill>
                   <a:srgbClr val="FFFFFF"/>
                 </a:solidFill>
-                <a:latin typeface="Arial" pitchFamily="34" charset="0"/>
-                <a:ea typeface="Arial" pitchFamily="34" charset="-122"/>
-                <a:cs typeface="Arial" pitchFamily="34" charset="-120"/>
+                <a:latin typeface="Roboto" pitchFamily="34" charset="0"/>
+                <a:ea typeface="Roboto" pitchFamily="34" charset="-122"/>
+                <a:cs typeface="Roboto" pitchFamily="34" charset="-120"/>
               </a:rPr>
               <a:t>Multimercados de baixa volatilidade</a:t>
             </a:r>
@@ -9114,9 +9436,9 @@
                 <a:solidFill>
                   <a:srgbClr val="A5A5A5"/>
                 </a:solidFill>
-                <a:latin typeface="Arial" pitchFamily="34" charset="0"/>
-                <a:ea typeface="Arial" pitchFamily="34" charset="-122"/>
-                <a:cs typeface="Arial" pitchFamily="34" charset="-120"/>
+                <a:latin typeface="Roboto" pitchFamily="34" charset="0"/>
+                <a:ea typeface="Roboto" pitchFamily="34" charset="-122"/>
+                <a:cs typeface="Roboto" pitchFamily="34" charset="-120"/>
               </a:rPr>
               <a:t>Gestão ativa da prateleira XP, com mandato de baixa volatilidade e alvo de retorno acima do CDI. Diversificação de estratégia sem exigir acompanhamento seu.</a:t>
             </a:r>
@@ -9141,7 +9463,7 @@
           <a:noFill/>
           <a:ln w="9525">
             <a:solidFill>
-              <a:srgbClr val="2B2B2B"/>
+              <a:srgbClr val="2E2E2E"/>
             </a:solidFill>
             <a:prstDash val="solid"/>
           </a:ln>
@@ -9172,17 +9494,17 @@
               <a:buNone/>
             </a:pPr>
             <a:r>
-              <a:rPr lang="en-US" sz="3000" b="1" dirty="0">
+              <a:rPr lang="en-US" sz="2700" b="1" dirty="0">
                 <a:solidFill>
                   <a:srgbClr val="FFC709"/>
                 </a:solidFill>
-                <a:latin typeface="Arial" pitchFamily="34" charset="0"/>
-                <a:ea typeface="Arial" pitchFamily="34" charset="-122"/>
-                <a:cs typeface="Arial" pitchFamily="34" charset="-120"/>
+                <a:latin typeface="Roboto Slab" pitchFamily="34" charset="0"/>
+                <a:ea typeface="Roboto Slab" pitchFamily="34" charset="-122"/>
+                <a:cs typeface="Roboto Slab" pitchFamily="34" charset="-120"/>
               </a:rPr>
               <a:t>20%</a:t>
             </a:r>
-            <a:endParaRPr lang="en-US" sz="3000" dirty="0"/>
+            <a:endParaRPr lang="en-US" sz="2700" dirty="0"/>
           </a:p>
         </p:txBody>
       </p:sp>
@@ -9215,9 +9537,9 @@
                 <a:solidFill>
                   <a:srgbClr val="FFFFFF"/>
                 </a:solidFill>
-                <a:latin typeface="Arial" pitchFamily="34" charset="0"/>
-                <a:ea typeface="Arial" pitchFamily="34" charset="-122"/>
-                <a:cs typeface="Arial" pitchFamily="34" charset="-120"/>
+                <a:latin typeface="Roboto" pitchFamily="34" charset="0"/>
+                <a:ea typeface="Roboto" pitchFamily="34" charset="-122"/>
+                <a:cs typeface="Roboto" pitchFamily="34" charset="-120"/>
               </a:rPr>
               <a:t>R$ 40.000</a:t>
             </a:r>
@@ -9254,9 +9576,9 @@
                 <a:solidFill>
                   <a:srgbClr val="FFFFFF"/>
                 </a:solidFill>
-                <a:latin typeface="Arial" pitchFamily="34" charset="0"/>
-                <a:ea typeface="Arial" pitchFamily="34" charset="-122"/>
-                <a:cs typeface="Arial" pitchFamily="34" charset="-120"/>
+                <a:latin typeface="Roboto" pitchFamily="34" charset="0"/>
+                <a:ea typeface="Roboto" pitchFamily="34" charset="-122"/>
+                <a:cs typeface="Roboto" pitchFamily="34" charset="-120"/>
               </a:rPr>
               <a:t>Renda variável via ETFs</a:t>
             </a:r>
@@ -9296,9 +9618,9 @@
                 <a:solidFill>
                   <a:srgbClr val="A5A5A5"/>
                 </a:solidFill>
-                <a:latin typeface="Arial" pitchFamily="34" charset="0"/>
-                <a:ea typeface="Arial" pitchFamily="34" charset="-122"/>
-                <a:cs typeface="Arial" pitchFamily="34" charset="-120"/>
+                <a:latin typeface="Roboto" pitchFamily="34" charset="0"/>
+                <a:ea typeface="Roboto" pitchFamily="34" charset="-122"/>
+                <a:cs typeface="Roboto" pitchFamily="34" charset="-120"/>
               </a:rPr>
               <a:t>BOVA11 e IVVB11 dão bolsa brasileira e mercado americano em duas ordens. Diversificação automática, sem escolher ação nem acompanhar notícia.</a:t>
             </a:r>
@@ -9323,7 +9645,7 @@
           <a:noFill/>
           <a:ln w="9525">
             <a:solidFill>
-              <a:srgbClr val="2B2B2B"/>
+              <a:srgbClr val="2E2E2E"/>
             </a:solidFill>
             <a:prstDash val="solid"/>
           </a:ln>
@@ -9358,9 +9680,9 @@
                 <a:solidFill>
                   <a:srgbClr val="FFC709"/>
                 </a:solidFill>
-                <a:latin typeface="Arial" pitchFamily="34" charset="0"/>
-                <a:ea typeface="Arial" pitchFamily="34" charset="-122"/>
-                <a:cs typeface="Arial" pitchFamily="34" charset="-120"/>
+                <a:latin typeface="Roboto" pitchFamily="34" charset="0"/>
+                <a:ea typeface="Roboto" pitchFamily="34" charset="-122"/>
+                <a:cs typeface="Roboto" pitchFamily="34" charset="-120"/>
               </a:rPr>
               <a:t>Por que não indicamos COE nesta carteira</a:t>
             </a:r>
@@ -9397,9 +9719,9 @@
                 <a:solidFill>
                   <a:srgbClr val="A5A5A5"/>
                 </a:solidFill>
-                <a:latin typeface="Arial" pitchFamily="34" charset="0"/>
-                <a:ea typeface="Arial" pitchFamily="34" charset="-122"/>
-                <a:cs typeface="Arial" pitchFamily="34" charset="-120"/>
+                <a:latin typeface="Roboto" pitchFamily="34" charset="0"/>
+                <a:ea typeface="Roboto" pitchFamily="34" charset="-122"/>
+                <a:cs typeface="Roboto" pitchFamily="34" charset="-120"/>
               </a:rPr>
               <a:t>O custo de estruturação de um COE não aparece destacado no extrato. Como transparência de taxas é justamente o seu ponto sensível, indicá-lo seria incoerente. A proteção de capital vem da renda fixa de carrego, onde cada custo é declarado.</a:t>
             </a:r>
@@ -9424,7 +9746,7 @@
           <a:noFill/>
           <a:ln w="9525">
             <a:solidFill>
-              <a:srgbClr val="2B2B2B"/>
+              <a:srgbClr val="2E2E2E"/>
             </a:solidFill>
             <a:prstDash val="solid"/>
           </a:ln>
@@ -9457,11 +9779,11 @@
             <a:r>
               <a:rPr lang="en-US" sz="900" dirty="0">
                 <a:solidFill>
-                  <a:srgbClr val="6E6E6E"/>
-                </a:solidFill>
-                <a:latin typeface="Arial" pitchFamily="34" charset="0"/>
-                <a:ea typeface="Arial" pitchFamily="34" charset="-122"/>
-                <a:cs typeface="Arial" pitchFamily="34" charset="-120"/>
+                  <a:srgbClr val="757575"/>
+                </a:solidFill>
+                <a:latin typeface="Roboto" pitchFamily="34" charset="0"/>
+                <a:ea typeface="Roboto" pitchFamily="34" charset="-122"/>
+                <a:cs typeface="Roboto" pitchFamily="34" charset="-120"/>
               </a:rPr>
               <a:t>XP Investimentos  ·  Planejamento Patrimonial</a:t>
             </a:r>
@@ -9477,8 +9799,8 @@
         </p:nvSpPr>
         <p:spPr>
           <a:xfrm>
-            <a:off x="10607040" y="6473952"/>
-            <a:ext cx="914400" cy="219456"/>
+            <a:off x="10149840" y="6473952"/>
+            <a:ext cx="1005840" cy="219456"/>
           </a:xfrm>
           <a:prstGeom prst="rect">
             <a:avLst/>
@@ -9496,17 +9818,63 @@
             <a:r>
               <a:rPr lang="en-US" sz="900" dirty="0">
                 <a:solidFill>
-                  <a:srgbClr val="6E6E6E"/>
-                </a:solidFill>
-                <a:latin typeface="Arial" pitchFamily="34" charset="0"/>
-                <a:ea typeface="Arial" pitchFamily="34" charset="-122"/>
-                <a:cs typeface="Arial" pitchFamily="34" charset="-120"/>
+                  <a:srgbClr val="757575"/>
+                </a:solidFill>
+                <a:latin typeface="Roboto" pitchFamily="34" charset="0"/>
+                <a:ea typeface="Roboto" pitchFamily="34" charset="-122"/>
+                <a:cs typeface="Roboto" pitchFamily="34" charset="-120"/>
               </a:rPr>
               <a:t>07</a:t>
             </a:r>
             <a:endParaRPr lang="en-US" sz="900" dirty="0"/>
           </a:p>
         </p:txBody>
+      </p:sp>
+      <p:sp>
+        <p:nvSpPr>
+          <p:cNvPr id="26" name="Shape 24"/>
+          <p:cNvSpPr/>
+          <p:nvPr/>
+        </p:nvSpPr>
+        <p:spPr>
+          <a:xfrm>
+            <a:off x="11365992" y="6510528"/>
+            <a:ext cx="155448" cy="155448"/>
+          </a:xfrm>
+          <a:prstGeom prst="line">
+            <a:avLst/>
+          </a:prstGeom>
+          <a:noFill/>
+          <a:ln w="9525">
+            <a:solidFill>
+              <a:srgbClr val="FFC709"/>
+            </a:solidFill>
+            <a:prstDash val="solid"/>
+          </a:ln>
+        </p:spPr>
+      </p:sp>
+      <p:sp>
+        <p:nvSpPr>
+          <p:cNvPr id="27" name="Shape 25"/>
+          <p:cNvSpPr/>
+          <p:nvPr/>
+        </p:nvSpPr>
+        <p:spPr>
+          <a:xfrm flipH="1">
+            <a:off x="11365992" y="6510528"/>
+            <a:ext cx="155448" cy="155448"/>
+          </a:xfrm>
+          <a:prstGeom prst="line">
+            <a:avLst/>
+          </a:prstGeom>
+          <a:noFill/>
+          <a:ln w="9525">
+            <a:solidFill>
+              <a:srgbClr val="FFC709"/>
+            </a:solidFill>
+            <a:prstDash val="solid"/>
+          </a:ln>
+        </p:spPr>
       </p:sp>
     </p:spTree>
   </p:cSld>
@@ -9522,7 +9890,7 @@
     <p:bg>
       <p:bgPr>
         <a:solidFill>
-          <a:srgbClr val="000000"/>
+          <a:srgbClr val="0D0D0D"/>
         </a:solidFill>
       </p:bgPr>
     </p:bg>
@@ -9565,17 +9933,17 @@
               <a:buNone/>
             </a:pPr>
             <a:r>
-              <a:rPr lang="en-US" sz="1200" b="1" dirty="0">
+              <a:rPr lang="en-US" sz="1150" b="1" dirty="0">
                 <a:solidFill>
                   <a:srgbClr val="FFC709"/>
                 </a:solidFill>
-                <a:latin typeface="Arial" pitchFamily="34" charset="0"/>
-                <a:ea typeface="Arial" pitchFamily="34" charset="-122"/>
-                <a:cs typeface="Arial" pitchFamily="34" charset="-120"/>
+                <a:latin typeface="Roboto" pitchFamily="34" charset="0"/>
+                <a:ea typeface="Roboto" pitchFamily="34" charset="-122"/>
+                <a:cs typeface="Roboto" pitchFamily="34" charset="-120"/>
               </a:rPr>
               <a:t>Consolidação</a:t>
             </a:r>
-            <a:endParaRPr lang="en-US" sz="1200" dirty="0"/>
+            <a:endParaRPr lang="en-US" sz="1150" dirty="0"/>
           </a:p>
         </p:txBody>
       </p:sp>
@@ -9604,17 +9972,17 @@
               <a:buNone/>
             </a:pPr>
             <a:r>
-              <a:rPr lang="en-US" sz="3400" b="1" dirty="0">
+              <a:rPr lang="en-US" sz="3000" b="1" dirty="0">
                 <a:solidFill>
                   <a:srgbClr val="FFFFFF"/>
                 </a:solidFill>
-                <a:latin typeface="Arial" pitchFamily="34" charset="0"/>
-                <a:ea typeface="Arial" pitchFamily="34" charset="-122"/>
-                <a:cs typeface="Arial" pitchFamily="34" charset="-120"/>
+                <a:latin typeface="Roboto Slab" pitchFamily="34" charset="0"/>
+                <a:ea typeface="Roboto Slab" pitchFamily="34" charset="-122"/>
+                <a:cs typeface="Roboto Slab" pitchFamily="34" charset="-120"/>
               </a:rPr>
               <a:t>Antes e depois, na mesma base de comparação</a:t>
             </a:r>
-            <a:endParaRPr lang="en-US" sz="3400" dirty="0"/>
+            <a:endParaRPr lang="en-US" sz="3000" dirty="0"/>
           </a:p>
         </p:txBody>
       </p:sp>
@@ -9647,9 +10015,9 @@
                 <a:solidFill>
                   <a:srgbClr val="A5A5A5"/>
                 </a:solidFill>
-                <a:latin typeface="Arial" pitchFamily="34" charset="0"/>
-                <a:ea typeface="Arial" pitchFamily="34" charset="-122"/>
-                <a:cs typeface="Arial" pitchFamily="34" charset="-120"/>
+                <a:latin typeface="Roboto" pitchFamily="34" charset="0"/>
+                <a:ea typeface="Roboto" pitchFamily="34" charset="-122"/>
+                <a:cs typeface="Roboto" pitchFamily="34" charset="-120"/>
               </a:rPr>
               <a:t>Todos os percentuais se referem ao patrimônio total de R$ 400.000.</a:t>
             </a:r>
@@ -9700,11 +10068,11 @@
             <a:r>
               <a:rPr lang="en-US" sz="950" dirty="0">
                 <a:solidFill>
-                  <a:srgbClr val="6E6E6E"/>
-                </a:solidFill>
-                <a:latin typeface="Arial" pitchFamily="34" charset="0"/>
-                <a:ea typeface="Arial" pitchFamily="34" charset="-122"/>
-                <a:cs typeface="Arial" pitchFamily="34" charset="-120"/>
+                  <a:srgbClr val="757575"/>
+                </a:solidFill>
+                <a:latin typeface="Roboto" pitchFamily="34" charset="0"/>
+                <a:ea typeface="Roboto" pitchFamily="34" charset="-122"/>
+                <a:cs typeface="Roboto" pitchFamily="34" charset="-120"/>
               </a:rPr>
               <a:t>Valores em R$ mil</a:t>
             </a:r>
@@ -9764,9 +10132,9 @@
                 <a:solidFill>
                   <a:srgbClr val="FFC709"/>
                 </a:solidFill>
-                <a:latin typeface="Arial" pitchFamily="34" charset="0"/>
-                <a:ea typeface="Arial" pitchFamily="34" charset="-122"/>
-                <a:cs typeface="Arial" pitchFamily="34" charset="-120"/>
+                <a:latin typeface="Roboto" pitchFamily="34" charset="0"/>
+                <a:ea typeface="Roboto" pitchFamily="34" charset="-122"/>
+                <a:cs typeface="Roboto" pitchFamily="34" charset="-120"/>
               </a:rPr>
               <a:t>Exposição a ações</a:t>
             </a:r>
@@ -9799,17 +10167,17 @@
               <a:buNone/>
             </a:pPr>
             <a:r>
-              <a:rPr lang="en-US" sz="2000" b="1" dirty="0">
+              <a:rPr lang="en-US" sz="1800" b="1" dirty="0">
                 <a:solidFill>
                   <a:srgbClr val="FFFFFF"/>
                 </a:solidFill>
-                <a:latin typeface="Arial" pitchFamily="34" charset="0"/>
-                <a:ea typeface="Arial" pitchFamily="34" charset="-122"/>
-                <a:cs typeface="Arial" pitchFamily="34" charset="-120"/>
+                <a:latin typeface="Roboto Slab" pitchFamily="34" charset="0"/>
+                <a:ea typeface="Roboto Slab" pitchFamily="34" charset="-122"/>
+                <a:cs typeface="Roboto Slab" pitchFamily="34" charset="-120"/>
               </a:rPr>
               <a:t>25%  →  10%</a:t>
             </a:r>
-            <a:endParaRPr lang="en-US" sz="2000" dirty="0"/>
+            <a:endParaRPr lang="en-US" sz="1800" dirty="0"/>
           </a:p>
         </p:txBody>
       </p:sp>
@@ -9842,9 +10210,9 @@
                 <a:solidFill>
                   <a:srgbClr val="A5A5A5"/>
                 </a:solidFill>
-                <a:latin typeface="Arial" pitchFamily="34" charset="0"/>
-                <a:ea typeface="Arial" pitchFamily="34" charset="-122"/>
-                <a:cs typeface="Arial" pitchFamily="34" charset="-120"/>
+                <a:latin typeface="Roboto" pitchFamily="34" charset="0"/>
+                <a:ea typeface="Roboto" pitchFamily="34" charset="-122"/>
+                <a:cs typeface="Roboto" pitchFamily="34" charset="-120"/>
               </a:rPr>
               <a:t>R$ 100.000 para R$ 40.000, agora via ETF</a:t>
             </a:r>
@@ -9869,7 +10237,7 @@
           <a:noFill/>
           <a:ln w="9525">
             <a:solidFill>
-              <a:srgbClr val="2B2B2B"/>
+              <a:srgbClr val="2E2E2E"/>
             </a:solidFill>
             <a:prstDash val="solid"/>
           </a:ln>
@@ -9904,9 +10272,9 @@
                 <a:solidFill>
                   <a:srgbClr val="FFC709"/>
                 </a:solidFill>
-                <a:latin typeface="Arial" pitchFamily="34" charset="0"/>
-                <a:ea typeface="Arial" pitchFamily="34" charset="-122"/>
-                <a:cs typeface="Arial" pitchFamily="34" charset="-120"/>
+                <a:latin typeface="Roboto" pitchFamily="34" charset="0"/>
+                <a:ea typeface="Roboto" pitchFamily="34" charset="-122"/>
+                <a:cs typeface="Roboto" pitchFamily="34" charset="-120"/>
               </a:rPr>
               <a:t>Capital rendendo</a:t>
             </a:r>
@@ -9939,17 +10307,17 @@
               <a:buNone/>
             </a:pPr>
             <a:r>
-              <a:rPr lang="en-US" sz="2000" b="1" dirty="0">
+              <a:rPr lang="en-US" sz="1800" b="1" dirty="0">
                 <a:solidFill>
                   <a:srgbClr val="FFFFFF"/>
                 </a:solidFill>
-                <a:latin typeface="Arial" pitchFamily="34" charset="0"/>
-                <a:ea typeface="Arial" pitchFamily="34" charset="-122"/>
-                <a:cs typeface="Arial" pitchFamily="34" charset="-120"/>
+                <a:latin typeface="Roboto Slab" pitchFamily="34" charset="0"/>
+                <a:ea typeface="Roboto Slab" pitchFamily="34" charset="-122"/>
+                <a:cs typeface="Roboto Slab" pitchFamily="34" charset="-120"/>
               </a:rPr>
               <a:t>50%  →  100%</a:t>
             </a:r>
-            <a:endParaRPr lang="en-US" sz="2000" dirty="0"/>
+            <a:endParaRPr lang="en-US" sz="1800" dirty="0"/>
           </a:p>
         </p:txBody>
       </p:sp>
@@ -9982,9 +10350,9 @@
                 <a:solidFill>
                   <a:srgbClr val="A5A5A5"/>
                 </a:solidFill>
-                <a:latin typeface="Arial" pitchFamily="34" charset="0"/>
-                <a:ea typeface="Arial" pitchFamily="34" charset="-122"/>
-                <a:cs typeface="Arial" pitchFamily="34" charset="-120"/>
+                <a:latin typeface="Roboto" pitchFamily="34" charset="0"/>
+                <a:ea typeface="Roboto" pitchFamily="34" charset="-122"/>
+                <a:cs typeface="Roboto" pitchFamily="34" charset="-120"/>
               </a:rPr>
               <a:t>nenhum real parado em conta corrente</a:t>
             </a:r>
@@ -10009,7 +10377,7 @@
           <a:noFill/>
           <a:ln w="9525">
             <a:solidFill>
-              <a:srgbClr val="2B2B2B"/>
+              <a:srgbClr val="2E2E2E"/>
             </a:solidFill>
             <a:prstDash val="solid"/>
           </a:ln>
@@ -10044,9 +10412,9 @@
                 <a:solidFill>
                   <a:srgbClr val="FFC709"/>
                 </a:solidFill>
-                <a:latin typeface="Arial" pitchFamily="34" charset="0"/>
-                <a:ea typeface="Arial" pitchFamily="34" charset="-122"/>
-                <a:cs typeface="Arial" pitchFamily="34" charset="-120"/>
+                <a:latin typeface="Roboto" pitchFamily="34" charset="0"/>
+                <a:ea typeface="Roboto" pitchFamily="34" charset="-122"/>
+                <a:cs typeface="Roboto" pitchFamily="34" charset="-120"/>
               </a:rPr>
               <a:t>Ativos isentos de IR</a:t>
             </a:r>
@@ -10079,17 +10447,17 @@
               <a:buNone/>
             </a:pPr>
             <a:r>
-              <a:rPr lang="en-US" sz="2000" b="1" dirty="0">
+              <a:rPr lang="en-US" sz="1800" b="1" dirty="0">
                 <a:solidFill>
                   <a:srgbClr val="FFFFFF"/>
                 </a:solidFill>
-                <a:latin typeface="Arial" pitchFamily="34" charset="0"/>
-                <a:ea typeface="Arial" pitchFamily="34" charset="-122"/>
-                <a:cs typeface="Arial" pitchFamily="34" charset="-120"/>
+                <a:latin typeface="Roboto Slab" pitchFamily="34" charset="0"/>
+                <a:ea typeface="Roboto Slab" pitchFamily="34" charset="-122"/>
+                <a:cs typeface="Roboto Slab" pitchFamily="34" charset="-120"/>
               </a:rPr>
               <a:t>R$ 0  →  R$ 120.000</a:t>
             </a:r>
-            <a:endParaRPr lang="en-US" sz="2000" dirty="0"/>
+            <a:endParaRPr lang="en-US" sz="1800" dirty="0"/>
           </a:p>
         </p:txBody>
       </p:sp>
@@ -10122,9 +10490,9 @@
                 <a:solidFill>
                   <a:srgbClr val="A5A5A5"/>
                 </a:solidFill>
-                <a:latin typeface="Arial" pitchFamily="34" charset="0"/>
-                <a:ea typeface="Arial" pitchFamily="34" charset="-122"/>
-                <a:cs typeface="Arial" pitchFamily="34" charset="-120"/>
+                <a:latin typeface="Roboto" pitchFamily="34" charset="0"/>
+                <a:ea typeface="Roboto" pitchFamily="34" charset="-122"/>
+                <a:cs typeface="Roboto" pitchFamily="34" charset="-120"/>
               </a:rPr>
               <a:t>LCI, LCA e debêntures incentivadas</a:t>
             </a:r>
@@ -10149,7 +10517,7 @@
           <a:noFill/>
           <a:ln w="9525">
             <a:solidFill>
-              <a:srgbClr val="2B2B2B"/>
+              <a:srgbClr val="2E2E2E"/>
             </a:solidFill>
             <a:prstDash val="solid"/>
           </a:ln>
@@ -10184,9 +10552,9 @@
                 <a:solidFill>
                   <a:srgbClr val="FFC709"/>
                 </a:solidFill>
-                <a:latin typeface="Arial" pitchFamily="34" charset="0"/>
-                <a:ea typeface="Arial" pitchFamily="34" charset="-122"/>
-                <a:cs typeface="Arial" pitchFamily="34" charset="-120"/>
+                <a:latin typeface="Roboto" pitchFamily="34" charset="0"/>
+                <a:ea typeface="Roboto" pitchFamily="34" charset="-122"/>
+                <a:cs typeface="Roboto" pitchFamily="34" charset="-120"/>
               </a:rPr>
               <a:t>Taxa de custódia</a:t>
             </a:r>
@@ -10219,17 +10587,17 @@
               <a:buNone/>
             </a:pPr>
             <a:r>
-              <a:rPr lang="en-US" sz="2000" b="1" dirty="0">
+              <a:rPr lang="en-US" sz="1800" b="1" dirty="0">
                 <a:solidFill>
                   <a:srgbClr val="FFFFFF"/>
                 </a:solidFill>
-                <a:latin typeface="Arial" pitchFamily="34" charset="0"/>
-                <a:ea typeface="Arial" pitchFamily="34" charset="-122"/>
-                <a:cs typeface="Arial" pitchFamily="34" charset="-120"/>
+                <a:latin typeface="Roboto Slab" pitchFamily="34" charset="0"/>
+                <a:ea typeface="Roboto Slab" pitchFamily="34" charset="-122"/>
+                <a:cs typeface="Roboto Slab" pitchFamily="34" charset="-120"/>
               </a:rPr>
               <a:t>R$ 0</a:t>
             </a:r>
-            <a:endParaRPr lang="en-US" sz="2000" dirty="0"/>
+            <a:endParaRPr lang="en-US" sz="1800" dirty="0"/>
           </a:p>
         </p:txBody>
       </p:sp>
@@ -10262,9 +10630,9 @@
                 <a:solidFill>
                   <a:srgbClr val="A5A5A5"/>
                 </a:solidFill>
-                <a:latin typeface="Arial" pitchFamily="34" charset="0"/>
-                <a:ea typeface="Arial" pitchFamily="34" charset="-122"/>
-                <a:cs typeface="Arial" pitchFamily="34" charset="-120"/>
+                <a:latin typeface="Roboto" pitchFamily="34" charset="0"/>
+                <a:ea typeface="Roboto" pitchFamily="34" charset="-122"/>
+                <a:cs typeface="Roboto" pitchFamily="34" charset="-120"/>
               </a:rPr>
               <a:t>renda fixa, fundos e previdência</a:t>
             </a:r>
@@ -10289,7 +10657,7 @@
           <a:noFill/>
           <a:ln w="9525">
             <a:solidFill>
-              <a:srgbClr val="2B2B2B"/>
+              <a:srgbClr val="2E2E2E"/>
             </a:solidFill>
             <a:prstDash val="solid"/>
           </a:ln>
@@ -10312,7 +10680,7 @@
           <a:noFill/>
           <a:ln w="9525">
             <a:solidFill>
-              <a:srgbClr val="2B2B2B"/>
+              <a:srgbClr val="2E2E2E"/>
             </a:solidFill>
             <a:prstDash val="solid"/>
           </a:ln>
@@ -10345,11 +10713,11 @@
             <a:r>
               <a:rPr lang="en-US" sz="900" dirty="0">
                 <a:solidFill>
-                  <a:srgbClr val="6E6E6E"/>
-                </a:solidFill>
-                <a:latin typeface="Arial" pitchFamily="34" charset="0"/>
-                <a:ea typeface="Arial" pitchFamily="34" charset="-122"/>
-                <a:cs typeface="Arial" pitchFamily="34" charset="-120"/>
+                  <a:srgbClr val="757575"/>
+                </a:solidFill>
+                <a:latin typeface="Roboto" pitchFamily="34" charset="0"/>
+                <a:ea typeface="Roboto" pitchFamily="34" charset="-122"/>
+                <a:cs typeface="Roboto" pitchFamily="34" charset="-120"/>
               </a:rPr>
               <a:t>XP Investimentos  ·  Planejamento Patrimonial</a:t>
             </a:r>
@@ -10365,8 +10733,8 @@
         </p:nvSpPr>
         <p:spPr>
           <a:xfrm>
-            <a:off x="10607040" y="6473952"/>
-            <a:ext cx="914400" cy="219456"/>
+            <a:off x="10149840" y="6473952"/>
+            <a:ext cx="1005840" cy="219456"/>
           </a:xfrm>
           <a:prstGeom prst="rect">
             <a:avLst/>
@@ -10384,17 +10752,63 @@
             <a:r>
               <a:rPr lang="en-US" sz="900" dirty="0">
                 <a:solidFill>
-                  <a:srgbClr val="6E6E6E"/>
-                </a:solidFill>
-                <a:latin typeface="Arial" pitchFamily="34" charset="0"/>
-                <a:ea typeface="Arial" pitchFamily="34" charset="-122"/>
-                <a:cs typeface="Arial" pitchFamily="34" charset="-120"/>
+                  <a:srgbClr val="757575"/>
+                </a:solidFill>
+                <a:latin typeface="Roboto" pitchFamily="34" charset="0"/>
+                <a:ea typeface="Roboto" pitchFamily="34" charset="-122"/>
+                <a:cs typeface="Roboto" pitchFamily="34" charset="-120"/>
               </a:rPr>
               <a:t>08</a:t>
             </a:r>
             <a:endParaRPr lang="en-US" sz="900" dirty="0"/>
           </a:p>
         </p:txBody>
+      </p:sp>
+      <p:sp>
+        <p:nvSpPr>
+          <p:cNvPr id="27" name="Shape 24"/>
+          <p:cNvSpPr/>
+          <p:nvPr/>
+        </p:nvSpPr>
+        <p:spPr>
+          <a:xfrm>
+            <a:off x="11365992" y="6510528"/>
+            <a:ext cx="155448" cy="155448"/>
+          </a:xfrm>
+          <a:prstGeom prst="line">
+            <a:avLst/>
+          </a:prstGeom>
+          <a:noFill/>
+          <a:ln w="9525">
+            <a:solidFill>
+              <a:srgbClr val="FFC709"/>
+            </a:solidFill>
+            <a:prstDash val="solid"/>
+          </a:ln>
+        </p:spPr>
+      </p:sp>
+      <p:sp>
+        <p:nvSpPr>
+          <p:cNvPr id="28" name="Shape 25"/>
+          <p:cNvSpPr/>
+          <p:nvPr/>
+        </p:nvSpPr>
+        <p:spPr>
+          <a:xfrm flipH="1">
+            <a:off x="11365992" y="6510528"/>
+            <a:ext cx="155448" cy="155448"/>
+          </a:xfrm>
+          <a:prstGeom prst="line">
+            <a:avLst/>
+          </a:prstGeom>
+          <a:noFill/>
+          <a:ln w="9525">
+            <a:solidFill>
+              <a:srgbClr val="FFC709"/>
+            </a:solidFill>
+            <a:prstDash val="solid"/>
+          </a:ln>
+        </p:spPr>
       </p:sp>
     </p:spTree>
   </p:cSld>
@@ -10410,7 +10824,7 @@
     <p:bg>
       <p:bgPr>
         <a:solidFill>
-          <a:srgbClr val="000000"/>
+          <a:srgbClr val="0D0D0D"/>
         </a:solidFill>
       </p:bgPr>
     </p:bg>
@@ -10453,17 +10867,17 @@
               <a:buNone/>
             </a:pPr>
             <a:r>
-              <a:rPr lang="en-US" sz="1200" b="1" dirty="0">
+              <a:rPr lang="en-US" sz="1150" b="1" dirty="0">
                 <a:solidFill>
                   <a:srgbClr val="FFC709"/>
                 </a:solidFill>
-                <a:latin typeface="Arial" pitchFamily="34" charset="0"/>
-                <a:ea typeface="Arial" pitchFamily="34" charset="-122"/>
-                <a:cs typeface="Arial" pitchFamily="34" charset="-120"/>
+                <a:latin typeface="Roboto" pitchFamily="34" charset="0"/>
+                <a:ea typeface="Roboto" pitchFamily="34" charset="-122"/>
+                <a:cs typeface="Roboto" pitchFamily="34" charset="-120"/>
               </a:rPr>
               <a:t>O valor do serviço</a:t>
             </a:r>
-            <a:endParaRPr lang="en-US" sz="1200" dirty="0"/>
+            <a:endParaRPr lang="en-US" sz="1150" dirty="0"/>
           </a:p>
         </p:txBody>
       </p:sp>
@@ -10492,17 +10906,17 @@
               <a:buNone/>
             </a:pPr>
             <a:r>
-              <a:rPr lang="en-US" sz="3400" b="1" dirty="0">
+              <a:rPr lang="en-US" sz="3000" b="1" dirty="0">
                 <a:solidFill>
                   <a:srgbClr val="FFFFFF"/>
                 </a:solidFill>
-                <a:latin typeface="Arial" pitchFamily="34" charset="0"/>
-                <a:ea typeface="Arial" pitchFamily="34" charset="-122"/>
-                <a:cs typeface="Arial" pitchFamily="34" charset="-120"/>
+                <a:latin typeface="Roboto Slab" pitchFamily="34" charset="0"/>
+                <a:ea typeface="Roboto Slab" pitchFamily="34" charset="-122"/>
+                <a:cs typeface="Roboto Slab" pitchFamily="34" charset="-120"/>
               </a:rPr>
               <a:t>Custo transparente e tempo preservado</a:t>
             </a:r>
-            <a:endParaRPr lang="en-US" sz="3400" dirty="0"/>
+            <a:endParaRPr lang="en-US" sz="3000" dirty="0"/>
           </a:p>
         </p:txBody>
       </p:sp>
@@ -10535,9 +10949,9 @@
                 <a:solidFill>
                   <a:srgbClr val="A5A5A5"/>
                 </a:solidFill>
-                <a:latin typeface="Arial" pitchFamily="34" charset="0"/>
-                <a:ea typeface="Arial" pitchFamily="34" charset="-122"/>
-                <a:cs typeface="Arial" pitchFamily="34" charset="-120"/>
+                <a:latin typeface="Roboto" pitchFamily="34" charset="0"/>
+                <a:ea typeface="Roboto" pitchFamily="34" charset="-122"/>
+                <a:cs typeface="Roboto" pitchFamily="34" charset="-120"/>
               </a:rPr>
               <a:t>As duas dores que sobraram: a reclamação com taxas e a falta de tempo para acompanhar.</a:t>
             </a:r>
@@ -10593,17 +11007,17 @@
               <a:buNone/>
             </a:pPr>
             <a:r>
-              <a:rPr lang="en-US" sz="1650" b="1" dirty="0">
+              <a:rPr lang="en-US" sz="1550" b="1" dirty="0">
                 <a:solidFill>
                   <a:srgbClr val="FFC709"/>
                 </a:solidFill>
-                <a:latin typeface="Arial" pitchFamily="34" charset="0"/>
-                <a:ea typeface="Arial" pitchFamily="34" charset="-122"/>
-                <a:cs typeface="Arial" pitchFamily="34" charset="-120"/>
+                <a:latin typeface="Roboto Slab" pitchFamily="34" charset="0"/>
+                <a:ea typeface="Roboto Slab" pitchFamily="34" charset="-122"/>
+                <a:cs typeface="Roboto Slab" pitchFamily="34" charset="-120"/>
               </a:rPr>
               <a:t>Transparência de custos</a:t>
             </a:r>
-            <a:endParaRPr lang="en-US" sz="1650" dirty="0"/>
+            <a:endParaRPr lang="en-US" sz="1550" dirty="0"/>
           </a:p>
         </p:txBody>
       </p:sp>
@@ -10639,9 +11053,9 @@
                 <a:solidFill>
                   <a:srgbClr val="FFFFFF"/>
                 </a:solidFill>
-                <a:latin typeface="Arial" pitchFamily="34" charset="0"/>
-                <a:ea typeface="Arial" pitchFamily="34" charset="-122"/>
-                <a:cs typeface="Arial" pitchFamily="34" charset="-120"/>
+                <a:latin typeface="Roboto" pitchFamily="34" charset="0"/>
+                <a:ea typeface="Roboto" pitchFamily="34" charset="-122"/>
+                <a:cs typeface="Roboto" pitchFamily="34" charset="-120"/>
               </a:rPr>
               <a:t>Taxa zero de custódia. </a:t>
             </a:r>
@@ -10656,9 +11070,9 @@
                 <a:solidFill>
                   <a:srgbClr val="A5A5A5"/>
                 </a:solidFill>
-                <a:latin typeface="Arial" pitchFamily="34" charset="0"/>
-                <a:ea typeface="Arial" pitchFamily="34" charset="-122"/>
-                <a:cs typeface="Arial" pitchFamily="34" charset="-120"/>
+                <a:latin typeface="Roboto" pitchFamily="34" charset="0"/>
+                <a:ea typeface="Roboto" pitchFamily="34" charset="-122"/>
+                <a:cs typeface="Roboto" pitchFamily="34" charset="-120"/>
               </a:rPr>
               <a:t>em renda fixa, fundos e previdência na plataforma XP.</a:t>
             </a:r>
@@ -10683,7 +11097,7 @@
           <a:noFill/>
           <a:ln w="9525">
             <a:solidFill>
-              <a:srgbClr val="2B2B2B"/>
+              <a:srgbClr val="2E2E2E"/>
             </a:solidFill>
             <a:prstDash val="solid"/>
           </a:ln>
@@ -10721,9 +11135,9 @@
                 <a:solidFill>
                   <a:srgbClr val="FFFFFF"/>
                 </a:solidFill>
-                <a:latin typeface="Arial" pitchFamily="34" charset="0"/>
-                <a:ea typeface="Arial" pitchFamily="34" charset="-122"/>
-                <a:cs typeface="Arial" pitchFamily="34" charset="-120"/>
+                <a:latin typeface="Roboto" pitchFamily="34" charset="0"/>
+                <a:ea typeface="Roboto" pitchFamily="34" charset="-122"/>
+                <a:cs typeface="Roboto" pitchFamily="34" charset="-120"/>
               </a:rPr>
               <a:t>Renda fixa. </a:t>
             </a:r>
@@ -10738,9 +11152,9 @@
                 <a:solidFill>
                   <a:srgbClr val="A5A5A5"/>
                 </a:solidFill>
-                <a:latin typeface="Arial" pitchFamily="34" charset="0"/>
-                <a:ea typeface="Arial" pitchFamily="34" charset="-122"/>
-                <a:cs typeface="Arial" pitchFamily="34" charset="-120"/>
+                <a:latin typeface="Roboto" pitchFamily="34" charset="0"/>
+                <a:ea typeface="Roboto" pitchFamily="34" charset="-122"/>
+                <a:cs typeface="Roboto" pitchFamily="34" charset="-120"/>
               </a:rPr>
               <a:t>remunera pelo spread do emissor, apresentado a você antes da alocação e não depois.</a:t>
             </a:r>
@@ -10765,7 +11179,7 @@
           <a:noFill/>
           <a:ln w="9525">
             <a:solidFill>
-              <a:srgbClr val="2B2B2B"/>
+              <a:srgbClr val="2E2E2E"/>
             </a:solidFill>
             <a:prstDash val="solid"/>
           </a:ln>
@@ -10803,9 +11217,9 @@
                 <a:solidFill>
                   <a:srgbClr val="FFFFFF"/>
                 </a:solidFill>
-                <a:latin typeface="Arial" pitchFamily="34" charset="0"/>
-                <a:ea typeface="Arial" pitchFamily="34" charset="-122"/>
-                <a:cs typeface="Arial" pitchFamily="34" charset="-120"/>
+                <a:latin typeface="Roboto" pitchFamily="34" charset="0"/>
+                <a:ea typeface="Roboto" pitchFamily="34" charset="-122"/>
+                <a:cs typeface="Roboto" pitchFamily="34" charset="-120"/>
               </a:rPr>
               <a:t>Fundos e previdência. </a:t>
             </a:r>
@@ -10820,9 +11234,9 @@
                 <a:solidFill>
                   <a:srgbClr val="A5A5A5"/>
                 </a:solidFill>
-                <a:latin typeface="Arial" pitchFamily="34" charset="0"/>
-                <a:ea typeface="Arial" pitchFamily="34" charset="-122"/>
-                <a:cs typeface="Arial" pitchFamily="34" charset="-120"/>
+                <a:latin typeface="Roboto" pitchFamily="34" charset="0"/>
+                <a:ea typeface="Roboto" pitchFamily="34" charset="-122"/>
+                <a:cs typeface="Roboto" pitchFamily="34" charset="-120"/>
               </a:rPr>
               <a:t>com taxa de administração na lâmina. Nenhum produto com custo embutido e não destacado.</a:t>
             </a:r>
@@ -10847,7 +11261,7 @@
           <a:noFill/>
           <a:ln w="9525">
             <a:solidFill>
-              <a:srgbClr val="2B2B2B"/>
+              <a:srgbClr val="2E2E2E"/>
             </a:solidFill>
             <a:prstDash val="solid"/>
           </a:ln>
@@ -10885,9 +11299,9 @@
                 <a:solidFill>
                   <a:srgbClr val="FFFFFF"/>
                 </a:solidFill>
-                <a:latin typeface="Arial" pitchFamily="34" charset="0"/>
-                <a:ea typeface="Arial" pitchFamily="34" charset="-122"/>
-                <a:cs typeface="Arial" pitchFamily="34" charset="-120"/>
+                <a:latin typeface="Roboto" pitchFamily="34" charset="0"/>
+                <a:ea typeface="Roboto" pitchFamily="34" charset="-122"/>
+                <a:cs typeface="Roboto" pitchFamily="34" charset="-120"/>
               </a:rPr>
               <a:t>Research XP. </a:t>
             </a:r>
@@ -10902,9 +11316,9 @@
                 <a:solidFill>
                   <a:srgbClr val="A5A5A5"/>
                 </a:solidFill>
-                <a:latin typeface="Arial" pitchFamily="34" charset="0"/>
-                <a:ea typeface="Arial" pitchFamily="34" charset="-122"/>
-                <a:cs typeface="Arial" pitchFamily="34" charset="-120"/>
+                <a:latin typeface="Roboto" pitchFamily="34" charset="0"/>
+                <a:ea typeface="Roboto" pitchFamily="34" charset="-122"/>
+                <a:cs typeface="Roboto" pitchFamily="34" charset="-120"/>
               </a:rPr>
               <a:t>analisa rating e saúde financeira de cada emissor antes de ele entrar na sua carteira.</a:t>
             </a:r>
@@ -10937,17 +11351,17 @@
               <a:buNone/>
             </a:pPr>
             <a:r>
-              <a:rPr lang="en-US" sz="1650" b="1" dirty="0">
+              <a:rPr lang="en-US" sz="1550" b="1" dirty="0">
                 <a:solidFill>
                   <a:srgbClr val="FFC709"/>
                 </a:solidFill>
-                <a:latin typeface="Arial" pitchFamily="34" charset="0"/>
-                <a:ea typeface="Arial" pitchFamily="34" charset="-122"/>
-                <a:cs typeface="Arial" pitchFamily="34" charset="-120"/>
+                <a:latin typeface="Roboto Slab" pitchFamily="34" charset="0"/>
+                <a:ea typeface="Roboto Slab" pitchFamily="34" charset="-122"/>
+                <a:cs typeface="Roboto Slab" pitchFamily="34" charset="-120"/>
               </a:rPr>
               <a:t>O seu tempo, preservado</a:t>
             </a:r>
-            <a:endParaRPr lang="en-US" sz="1650" dirty="0"/>
+            <a:endParaRPr lang="en-US" sz="1550" dirty="0"/>
           </a:p>
         </p:txBody>
       </p:sp>
@@ -10983,9 +11397,9 @@
                 <a:solidFill>
                   <a:srgbClr val="FFFFFF"/>
                 </a:solidFill>
-                <a:latin typeface="Arial" pitchFamily="34" charset="0"/>
-                <a:ea typeface="Arial" pitchFamily="34" charset="-122"/>
-                <a:cs typeface="Arial" pitchFamily="34" charset="-120"/>
+                <a:latin typeface="Roboto" pitchFamily="34" charset="0"/>
+                <a:ea typeface="Roboto" pitchFamily="34" charset="-122"/>
+                <a:cs typeface="Roboto" pitchFamily="34" charset="-120"/>
               </a:rPr>
               <a:t>Monitoramento diário. </a:t>
             </a:r>
@@ -11000,9 +11414,9 @@
                 <a:solidFill>
                   <a:srgbClr val="A5A5A5"/>
                 </a:solidFill>
-                <a:latin typeface="Arial" pitchFamily="34" charset="0"/>
-                <a:ea typeface="Arial" pitchFamily="34" charset="-122"/>
-                <a:cs typeface="Arial" pitchFamily="34" charset="-120"/>
+                <a:latin typeface="Roboto" pitchFamily="34" charset="0"/>
+                <a:ea typeface="Roboto" pitchFamily="34" charset="-122"/>
+                <a:cs typeface="Roboto" pitchFamily="34" charset="-120"/>
               </a:rPr>
               <a:t>feito pela nossa equipe. Você não precisa acompanhar notícia de mercado.</a:t>
             </a:r>
@@ -11027,7 +11441,7 @@
           <a:noFill/>
           <a:ln w="9525">
             <a:solidFill>
-              <a:srgbClr val="2B2B2B"/>
+              <a:srgbClr val="2E2E2E"/>
             </a:solidFill>
             <a:prstDash val="solid"/>
           </a:ln>
@@ -11065,9 +11479,9 @@
                 <a:solidFill>
                   <a:srgbClr val="FFFFFF"/>
                 </a:solidFill>
-                <a:latin typeface="Arial" pitchFamily="34" charset="0"/>
-                <a:ea typeface="Arial" pitchFamily="34" charset="-122"/>
-                <a:cs typeface="Arial" pitchFamily="34" charset="-120"/>
+                <a:latin typeface="Roboto" pitchFamily="34" charset="0"/>
+                <a:ea typeface="Roboto" pitchFamily="34" charset="-122"/>
+                <a:cs typeface="Roboto" pitchFamily="34" charset="-120"/>
               </a:rPr>
               <a:t>Relatório trimestral. </a:t>
             </a:r>
@@ -11082,9 +11496,9 @@
                 <a:solidFill>
                   <a:srgbClr val="A5A5A5"/>
                 </a:solidFill>
-                <a:latin typeface="Arial" pitchFamily="34" charset="0"/>
-                <a:ea typeface="Arial" pitchFamily="34" charset="-122"/>
-                <a:cs typeface="Arial" pitchFamily="34" charset="-120"/>
+                <a:latin typeface="Roboto" pitchFamily="34" charset="0"/>
+                <a:ea typeface="Roboto" pitchFamily="34" charset="-122"/>
+                <a:cs typeface="Roboto" pitchFamily="34" charset="-120"/>
               </a:rPr>
               <a:t>consolidado e resumido no aplicativo da XP.</a:t>
             </a:r>
@@ -11109,7 +11523,7 @@
           <a:noFill/>
           <a:ln w="9525">
             <a:solidFill>
-              <a:srgbClr val="2B2B2B"/>
+              <a:srgbClr val="2E2E2E"/>
             </a:solidFill>
             <a:prstDash val="solid"/>
           </a:ln>
@@ -11147,9 +11561,9 @@
                 <a:solidFill>
                   <a:srgbClr val="FFFFFF"/>
                 </a:solidFill>
-                <a:latin typeface="Arial" pitchFamily="34" charset="0"/>
-                <a:ea typeface="Arial" pitchFamily="34" charset="-122"/>
-                <a:cs typeface="Arial" pitchFamily="34" charset="-120"/>
+                <a:latin typeface="Roboto" pitchFamily="34" charset="0"/>
+                <a:ea typeface="Roboto" pitchFamily="34" charset="-122"/>
+                <a:cs typeface="Roboto" pitchFamily="34" charset="-120"/>
               </a:rPr>
               <a:t>Duas reuniões por ano. </a:t>
             </a:r>
@@ -11164,9 +11578,9 @@
                 <a:solidFill>
                   <a:srgbClr val="A5A5A5"/>
                 </a:solidFill>
-                <a:latin typeface="Arial" pitchFamily="34" charset="0"/>
-                <a:ea typeface="Arial" pitchFamily="34" charset="-122"/>
-                <a:cs typeface="Arial" pitchFamily="34" charset="-120"/>
+                <a:latin typeface="Roboto" pitchFamily="34" charset="0"/>
+                <a:ea typeface="Roboto" pitchFamily="34" charset="-122"/>
+                <a:cs typeface="Roboto" pitchFamily="34" charset="-120"/>
               </a:rPr>
               <a:t>de 30 minutos, para revisar metas familiares e reenquadrar o perfil.</a:t>
             </a:r>
@@ -11191,7 +11605,7 @@
           <a:noFill/>
           <a:ln w="9525">
             <a:solidFill>
-              <a:srgbClr val="2B2B2B"/>
+              <a:srgbClr val="2E2E2E"/>
             </a:solidFill>
             <a:prstDash val="solid"/>
           </a:ln>
@@ -11229,9 +11643,9 @@
                 <a:solidFill>
                   <a:srgbClr val="FFFFFF"/>
                 </a:solidFill>
-                <a:latin typeface="Arial" pitchFamily="34" charset="0"/>
-                <a:ea typeface="Arial" pitchFamily="34" charset="-122"/>
-                <a:cs typeface="Arial" pitchFamily="34" charset="-120"/>
+                <a:latin typeface="Roboto" pitchFamily="34" charset="0"/>
+                <a:ea typeface="Roboto" pitchFamily="34" charset="-122"/>
+                <a:cs typeface="Roboto" pitchFamily="34" charset="-120"/>
               </a:rPr>
               <a:t>Rebalanceamento por aporte. </a:t>
             </a:r>
@@ -11246,9 +11660,9 @@
                 <a:solidFill>
                   <a:srgbClr val="A5A5A5"/>
                 </a:solidFill>
-                <a:latin typeface="Arial" pitchFamily="34" charset="0"/>
-                <a:ea typeface="Arial" pitchFamily="34" charset="-122"/>
-                <a:cs typeface="Arial" pitchFamily="34" charset="-120"/>
+                <a:latin typeface="Roboto" pitchFamily="34" charset="0"/>
+                <a:ea typeface="Roboto" pitchFamily="34" charset="-122"/>
+                <a:cs typeface="Roboto" pitchFamily="34" charset="-120"/>
               </a:rPr>
               <a:t>e não por venda, evitando antecipar Imposto de Renda sem necessidade.</a:t>
             </a:r>
@@ -11271,7 +11685,7 @@
             <a:avLst/>
           </a:prstGeom>
           <a:solidFill>
-            <a:srgbClr val="121212"/>
+            <a:srgbClr val="1A1A1A"/>
           </a:solidFill>
           <a:ln w="12700">
             <a:solidFill>
@@ -11310,9 +11724,9 @@
                 <a:solidFill>
                   <a:srgbClr val="FFC709"/>
                 </a:solidFill>
-                <a:latin typeface="Arial" pitchFamily="34" charset="0"/>
-                <a:ea typeface="Arial" pitchFamily="34" charset="-122"/>
-                <a:cs typeface="Arial" pitchFamily="34" charset="-120"/>
+                <a:latin typeface="Roboto" pitchFamily="34" charset="0"/>
+                <a:ea typeface="Roboto" pitchFamily="34" charset="-122"/>
+                <a:cs typeface="Roboto" pitchFamily="34" charset="-120"/>
               </a:rPr>
               <a:t>Capacidade de aporte mensal.  </a:t>
             </a:r>
@@ -11324,9 +11738,9 @@
                 <a:solidFill>
                   <a:srgbClr val="FFFFFF"/>
                 </a:solidFill>
-                <a:latin typeface="Arial" pitchFamily="34" charset="0"/>
-                <a:ea typeface="Arial" pitchFamily="34" charset="-122"/>
-                <a:cs typeface="Arial" pitchFamily="34" charset="-120"/>
+                <a:latin typeface="Roboto" pitchFamily="34" charset="0"/>
+                <a:ea typeface="Roboto" pitchFamily="34" charset="-122"/>
+                <a:cs typeface="Roboto" pitchFamily="34" charset="-120"/>
               </a:rPr>
               <a:t>R$ 3.600, sendo R$ 1.440 no PGBL dentro do teto de 12%, cerca de R$ 250 no seguro de vida e R$ 1.910 para rebalanceamento.</a:t>
             </a:r>
@@ -11351,7 +11765,7 @@
           <a:noFill/>
           <a:ln w="9525">
             <a:solidFill>
-              <a:srgbClr val="2B2B2B"/>
+              <a:srgbClr val="2E2E2E"/>
             </a:solidFill>
             <a:prstDash val="solid"/>
           </a:ln>
@@ -11384,11 +11798,11 @@
             <a:r>
               <a:rPr lang="en-US" sz="900" dirty="0">
                 <a:solidFill>
-                  <a:srgbClr val="6E6E6E"/>
-                </a:solidFill>
-                <a:latin typeface="Arial" pitchFamily="34" charset="0"/>
-                <a:ea typeface="Arial" pitchFamily="34" charset="-122"/>
-                <a:cs typeface="Arial" pitchFamily="34" charset="-120"/>
+                  <a:srgbClr val="757575"/>
+                </a:solidFill>
+                <a:latin typeface="Roboto" pitchFamily="34" charset="0"/>
+                <a:ea typeface="Roboto" pitchFamily="34" charset="-122"/>
+                <a:cs typeface="Roboto" pitchFamily="34" charset="-120"/>
               </a:rPr>
               <a:t>XP Investimentos  ·  Planejamento Patrimonial</a:t>
             </a:r>
@@ -11404,8 +11818,8 @@
         </p:nvSpPr>
         <p:spPr>
           <a:xfrm>
-            <a:off x="10607040" y="6473952"/>
-            <a:ext cx="914400" cy="219456"/>
+            <a:off x="10149840" y="6473952"/>
+            <a:ext cx="1005840" cy="219456"/>
           </a:xfrm>
           <a:prstGeom prst="rect">
             <a:avLst/>
@@ -11423,17 +11837,63 @@
             <a:r>
               <a:rPr lang="en-US" sz="900" dirty="0">
                 <a:solidFill>
-                  <a:srgbClr val="6E6E6E"/>
-                </a:solidFill>
-                <a:latin typeface="Arial" pitchFamily="34" charset="0"/>
-                <a:ea typeface="Arial" pitchFamily="34" charset="-122"/>
-                <a:cs typeface="Arial" pitchFamily="34" charset="-120"/>
+                  <a:srgbClr val="757575"/>
+                </a:solidFill>
+                <a:latin typeface="Roboto" pitchFamily="34" charset="0"/>
+                <a:ea typeface="Roboto" pitchFamily="34" charset="-122"/>
+                <a:cs typeface="Roboto" pitchFamily="34" charset="-120"/>
               </a:rPr>
               <a:t>09</a:t>
             </a:r>
             <a:endParaRPr lang="en-US" sz="900" dirty="0"/>
           </a:p>
         </p:txBody>
+      </p:sp>
+      <p:sp>
+        <p:nvSpPr>
+          <p:cNvPr id="27" name="Shape 25"/>
+          <p:cNvSpPr/>
+          <p:nvPr/>
+        </p:nvSpPr>
+        <p:spPr>
+          <a:xfrm>
+            <a:off x="11365992" y="6510528"/>
+            <a:ext cx="155448" cy="155448"/>
+          </a:xfrm>
+          <a:prstGeom prst="line">
+            <a:avLst/>
+          </a:prstGeom>
+          <a:noFill/>
+          <a:ln w="9525">
+            <a:solidFill>
+              <a:srgbClr val="FFC709"/>
+            </a:solidFill>
+            <a:prstDash val="solid"/>
+          </a:ln>
+        </p:spPr>
+      </p:sp>
+      <p:sp>
+        <p:nvSpPr>
+          <p:cNvPr id="28" name="Shape 26"/>
+          <p:cNvSpPr/>
+          <p:nvPr/>
+        </p:nvSpPr>
+        <p:spPr>
+          <a:xfrm flipH="1">
+            <a:off x="11365992" y="6510528"/>
+            <a:ext cx="155448" cy="155448"/>
+          </a:xfrm>
+          <a:prstGeom prst="line">
+            <a:avLst/>
+          </a:prstGeom>
+          <a:noFill/>
+          <a:ln w="9525">
+            <a:solidFill>
+              <a:srgbClr val="FFC709"/>
+            </a:solidFill>
+            <a:prstDash val="solid"/>
+          </a:ln>
+        </p:spPr>
       </p:sp>
     </p:spTree>
   </p:cSld>
